--- a/decks/finding-your-people-lesson-v2.pptx
+++ b/decks/finding-your-people-lesson-v2.pptx
@@ -19,6 +19,7 @@
     <p:sldId id="267" r:id="rId19"/>
     <p:sldId id="268" r:id="rId20"/>
     <p:sldId id="269" r:id="rId21"/>
+    <p:sldId id="270" r:id="rId22"/>
   </p:sldIdLst>
   <p:sldSz cx="12192000" cy="6858000" type="screen4x3"/>
   <p:notesSz cx="6858000" cy="9144000"/>
@@ -515,7 +516,7 @@
           <a:lstStyle/>
           <a:p>
             <a:r>
-              <a:t>This page and the next three are hidden. They stay in the deck for you and are skipped when you present.</a:t>
+              <a:t>This page is hidden and skipped when you present. The full plan, care notes and research are on the hidden pages at the end of the deck, if you want them.</a:t>
             </a:r>
           </a:p>
         </p:txBody>
@@ -656,6 +657,76 @@
           <a:p>
             <a:r>
               <a:t>3 MINUTES. Students keep the card. Close with: "Almost everyone is open to an invitation right now. Someone has to go first." Share the take-home link (post it on your class page too). It has the hours, the ladder, openers, a private check-in, and who to talk to. Mention that counselors know about groups and programs students may not, and talking to one doesn't mean something is wrong with you.</a:t>
+            </a:r>
+          </a:p>
+        </p:txBody>
+      </p:sp>
+      <p:sp>
+        <p:nvSpPr>
+          <p:cNvPr id="4" name="Slide Number Placeholder 3"/>
+          <p:cNvSpPr>
+            <a:spLocks noGrp="1"/>
+          </p:cNvSpPr>
+          <p:nvPr>
+            <p:ph type="sldNum" idx="5" sz="quarter"/>
+          </p:nvPr>
+        </p:nvSpPr>
+        <p:spPr/>
+      </p:sp>
+    </p:spTree>
+  </p:cSld>
+  <p:clrMapOvr>
+    <a:masterClrMapping/>
+  </p:clrMapOvr>
+</p:notes>
+</file>
+
+<file path=ppt/notesSlides/notesSlide12.xml><?xml version="1.0" encoding="utf-8"?>
+<p:notes xmlns:a="http://schemas.openxmlformats.org/drawingml/2006/main" xmlns:p="http://schemas.openxmlformats.org/presentationml/2006/main" xmlns:r="http://schemas.openxmlformats.org/officeDocument/2006/relationships">
+  <p:cSld>
+    <p:spTree>
+      <p:nvGrpSpPr>
+        <p:cNvPr id="1" name=""/>
+        <p:cNvGrpSpPr/>
+        <p:nvPr/>
+      </p:nvGrpSpPr>
+      <p:grpSpPr>
+        <a:xfrm>
+          <a:off x="0" y="0"/>
+          <a:ext cx="0" cy="0"/>
+          <a:chOff x="0" y="0"/>
+          <a:chExt cx="0" cy="0"/>
+        </a:xfrm>
+      </p:grpSpPr>
+      <p:sp>
+        <p:nvSpPr>
+          <p:cNvPr id="2" name="Slide Image Placeholder 1"/>
+          <p:cNvSpPr>
+            <a:spLocks noGrp="1"/>
+          </p:cNvSpPr>
+          <p:nvPr>
+            <p:ph type="sldImg" idx="2"/>
+          </p:nvPr>
+        </p:nvSpPr>
+        <p:spPr/>
+      </p:sp>
+      <p:sp>
+        <p:nvSpPr>
+          <p:cNvPr id="3" name="Notes Placeholder 2"/>
+          <p:cNvSpPr>
+            <a:spLocks noGrp="1"/>
+          </p:cNvSpPr>
+          <p:nvPr>
+            <p:ph type="body" idx="3" sz="quarter"/>
+          </p:nvPr>
+        </p:nvSpPr>
+        <p:spPr/>
+        <p:txBody>
+          <a:bodyPr/>
+          <a:lstStyle/>
+          <a:p>
+            <a:r>
+              <a:t>If you want more: this page and the next three are hidden and skipped when you present.</a:t>
             </a:r>
           </a:p>
         </p:txBody>
@@ -4307,7 +4378,7 @@
                 </a:solidFill>
                 <a:latin typeface="Inter Tight"/>
               </a:rPr>
-              <a:t>TEACHER PAGE  ·  skipped when you present  ·  Lesson plan</a:t>
+              <a:t>TEACHER PAGE  ·  skipped when you present  ·  Before you start</a:t>
             </a:r>
           </a:p>
         </p:txBody>
@@ -4398,8 +4469,8 @@
         </p:nvSpPr>
         <p:spPr>
           <a:xfrm>
-            <a:off x="548640" y="1828800"/>
-            <a:ext cx="5120640" cy="4389120"/>
+            <a:off x="548640" y="2011680"/>
+            <a:ext cx="11064240" cy="4206240"/>
           </a:xfrm>
           <a:prstGeom prst="rect">
             <a:avLst/>
@@ -4414,43 +4485,43 @@
           <a:p>
             <a:pPr algn="l">
               <a:spcAft>
-                <a:spcPts val="675"/>
-              </a:spcAft>
-            </a:pPr>
-            <a:r>
-              <a:rPr sz="1100" b="1" i="0">
+                <a:spcPts val="810"/>
+              </a:spcAft>
+            </a:pPr>
+            <a:r>
+              <a:rPr sz="1200" b="1" i="0">
                 <a:solidFill>
                   <a:srgbClr val="0B2D5B"/>
                 </a:solidFill>
                 <a:latin typeface="Inter Tight"/>
               </a:rPr>
-              <a:t>GOAL</a:t>
-            </a:r>
-          </a:p>
-          <a:p>
-            <a:pPr algn="l">
-              <a:spcAft>
-                <a:spcPts val="675"/>
-              </a:spcAft>
-            </a:pPr>
-            <a:r>
-              <a:rPr sz="1500" b="0" i="0">
+              <a:t>BEFORE YOU START</a:t>
+            </a:r>
+          </a:p>
+          <a:p>
+            <a:pPr algn="l">
+              <a:spcAft>
+                <a:spcPts val="810"/>
+              </a:spcAft>
+            </a:pPr>
+            <a:r>
+              <a:rPr sz="1800" b="0" i="0">
                 <a:solidFill>
                   <a:srgbClr val="1C1B19"/>
                 </a:solidFill>
                 <a:latin typeface="Source Serif 4"/>
               </a:rPr>
-              <a:t>Students can explain why close friendships take time (the hours estimate and the liking gap), find their next step with one person using the friendship ladder, and leave with one specific move for this week. Nobody should have to say out loud how connected they are.</a:t>
-            </a:r>
-          </a:p>
-          <a:p>
-            <a:pPr algn="l">
-              <a:spcAft>
-                <a:spcPts val="675"/>
-              </a:spcAft>
-            </a:pPr>
-            <a:r>
-              <a:rPr sz="1500" b="0" i="0">
+              <a:t>Students learn that close friendships take time (roughly 50, 90, then 200 hours) and that people like us more than we think, then pick one small step with one person. Bring index cards, assign partners so nobody is picked last, and keep every personal question private since lonely students are in the room.</a:t>
+            </a:r>
+          </a:p>
+          <a:p>
+            <a:pPr algn="l">
+              <a:spcAft>
+                <a:spcPts val="810"/>
+              </a:spcAft>
+            </a:pPr>
+            <a:r>
+              <a:rPr sz="1800" b="0" i="0">
                 <a:solidFill>
                   <a:srgbClr val="1C1B19"/>
                 </a:solidFill>
@@ -4462,321 +4533,75 @@
           <a:p>
             <a:pPr algn="l">
               <a:spcAft>
-                <a:spcPts val="675"/>
-              </a:spcAft>
-            </a:pPr>
-            <a:r>
-              <a:rPr sz="1100" b="1" i="0">
+                <a:spcPts val="810"/>
+              </a:spcAft>
+            </a:pPr>
+            <a:r>
+              <a:rPr sz="1200" b="1" i="0">
                 <a:solidFill>
                   <a:srgbClr val="0B2D5B"/>
                 </a:solidFill>
                 <a:latin typeface="Inter Tight"/>
               </a:rPr>
-              <a:t>MATERIALS</a:t>
-            </a:r>
-          </a:p>
-          <a:p>
-            <a:pPr algn="l">
-              <a:spcAft>
-                <a:spcPts val="675"/>
-              </a:spcAft>
-            </a:pPr>
-            <a:r>
-              <a:rPr sz="1500" b="0" i="0">
+              <a:t>EVERY STUDENT IN THE ROOM</a:t>
+            </a:r>
+          </a:p>
+          <a:p>
+            <a:pPr algn="l">
+              <a:spcAft>
+                <a:spcPts val="810"/>
+              </a:spcAft>
+            </a:pPr>
+            <a:r>
+              <a:rPr sz="1800" b="0" i="0">
                 <a:solidFill>
                   <a:srgbClr val="1C1B19"/>
                 </a:solidFill>
                 <a:latin typeface="Source Serif 4"/>
               </a:rPr>
-              <a:t>Index cards for the private ladder and the exit card</a:t>
-            </a:r>
-          </a:p>
-          <a:p>
-            <a:pPr algn="l">
-              <a:spcAft>
-                <a:spcPts val="675"/>
-              </a:spcAft>
-            </a:pPr>
-            <a:r>
-              <a:rPr sz="1500" b="0" i="0">
+              <a:t>Point to repeat places that are free and fit inside family rules, and treat online friends and faith or language communities as real people of their own.</a:t>
+            </a:r>
+          </a:p>
+          <a:p>
+            <a:pPr algn="l">
+              <a:spcAft>
+                <a:spcPts val="810"/>
+              </a:spcAft>
+            </a:pPr>
+            <a:r>
+              <a:rPr sz="1800" b="0" i="0">
                 <a:solidFill>
                   <a:srgbClr val="1C1B19"/>
                 </a:solidFill>
                 <a:latin typeface="Source Serif 4"/>
               </a:rPr>
-              <a:t>A board to draw the hours scale</a:t>
-            </a:r>
-          </a:p>
-          <a:p>
-            <a:pPr algn="l">
-              <a:spcAft>
-                <a:spcPts val="675"/>
-              </a:spcAft>
-            </a:pPr>
-            <a:r>
-              <a:rPr sz="1500" b="0" i="0">
-                <a:solidFill>
-                  <a:srgbClr val="1C1B19"/>
-                </a:solidFill>
-                <a:latin typeface="Source Serif 4"/>
-              </a:rPr>
-              <a:t>The take-home link (last slide) to share after class</a:t>
-            </a:r>
-          </a:p>
-        </p:txBody>
-      </p:sp>
-      <p:sp>
-        <p:nvSpPr>
-          <p:cNvPr id="7" name="TextBox 6"/>
-          <p:cNvSpPr txBox="1"/>
-          <p:nvPr/>
-        </p:nvSpPr>
-        <p:spPr>
-          <a:xfrm>
-            <a:off x="6126480" y="1828800"/>
-            <a:ext cx="5486400" cy="4389120"/>
-          </a:xfrm>
-          <a:prstGeom prst="rect">
-            <a:avLst/>
-          </a:prstGeom>
-          <a:noFill/>
-        </p:spPr>
-        <p:txBody>
-          <a:bodyPr wrap="square" anchor="t" lIns="0" rIns="0" tIns="0" bIns="0">
-            <a:spAutoFit/>
-          </a:bodyPr>
-          <a:lstStyle/>
-          <a:p>
-            <a:pPr algn="l">
-              <a:spcAft>
-                <a:spcPts val="630"/>
-              </a:spcAft>
-            </a:pPr>
-            <a:r>
-              <a:rPr sz="1100" b="1" i="0">
+              <a:t/>
+            </a:r>
+          </a:p>
+          <a:p>
+            <a:pPr algn="l">
+              <a:spcAft>
+                <a:spcPts val="810"/>
+              </a:spcAft>
+            </a:pPr>
+            <a:r>
+              <a:rPr sz="1200" b="1" i="0">
                 <a:solidFill>
                   <a:srgbClr val="0B2D5B"/>
                 </a:solidFill>
                 <a:latin typeface="Inter Tight"/>
               </a:rPr>
-              <a:t>FLOW</a:t>
-            </a:r>
-          </a:p>
-          <a:p>
-            <a:pPr algn="l">
-              <a:spcAft>
-                <a:spcPts val="630"/>
-              </a:spcAft>
-            </a:pPr>
-            <a:r>
-              <a:rPr sz="1300" b="1" i="0">
-                <a:solidFill>
-                  <a:srgbClr val="F47B20"/>
-                </a:solidFill>
-                <a:latin typeface="Inter Tight"/>
-              </a:rPr>
-              <a:t>5 min   </a:t>
-            </a:r>
-            <a:r>
-              <a:rPr sz="1400" b="0" i="0">
-                <a:solidFill>
-                  <a:srgbClr val="1C1B19"/>
-                </a:solidFill>
-                <a:latin typeface="Source Serif 4"/>
-              </a:rPr>
-              <a:t>Myth or fact (stand up, sit down)</a:t>
-            </a:r>
-          </a:p>
-          <a:p>
-            <a:pPr algn="l">
-              <a:spcAft>
-                <a:spcPts val="630"/>
-              </a:spcAft>
-            </a:pPr>
-            <a:r>
-              <a:rPr sz="1300" b="1" i="0">
-                <a:solidFill>
-                  <a:srgbClr val="F47B20"/>
-                </a:solidFill>
-                <a:latin typeface="Inter Tight"/>
-              </a:rPr>
-              <a:t>8 min   </a:t>
-            </a:r>
-            <a:r>
-              <a:rPr sz="1400" b="0" i="0">
-                <a:solidFill>
-                  <a:srgbClr val="1C1B19"/>
-                </a:solidFill>
-                <a:latin typeface="Source Serif 4"/>
-              </a:rPr>
-              <a:t>Friendship runs on a clock</a:t>
-            </a:r>
-          </a:p>
-          <a:p>
-            <a:pPr algn="l">
-              <a:spcAft>
-                <a:spcPts val="630"/>
-              </a:spcAft>
-            </a:pPr>
-            <a:r>
-              <a:rPr sz="1300" b="1" i="0">
-                <a:solidFill>
-                  <a:srgbClr val="F47B20"/>
-                </a:solidFill>
-                <a:latin typeface="Inter Tight"/>
-              </a:rPr>
-              <a:t>7 min   </a:t>
-            </a:r>
-            <a:r>
-              <a:rPr sz="1400" b="0" i="0">
-                <a:solidFill>
-                  <a:srgbClr val="1C1B19"/>
-                </a:solidFill>
-                <a:latin typeface="Source Serif 4"/>
-              </a:rPr>
-              <a:t>The liking gap, then one layer down (pair-share)</a:t>
-            </a:r>
-          </a:p>
-          <a:p>
-            <a:pPr algn="l">
-              <a:spcAft>
-                <a:spcPts val="630"/>
-              </a:spcAft>
-            </a:pPr>
-            <a:r>
-              <a:rPr sz="1300" b="1" i="0">
-                <a:solidFill>
-                  <a:srgbClr val="F47B20"/>
-                </a:solidFill>
-                <a:latin typeface="Inter Tight"/>
-              </a:rPr>
-              <a:t>7 min   </a:t>
-            </a:r>
-            <a:r>
-              <a:rPr sz="1400" b="0" i="0">
-                <a:solidFill>
-                  <a:srgbClr val="1C1B19"/>
-                </a:solidFill>
-                <a:latin typeface="Source Serif 4"/>
-              </a:rPr>
-              <a:t>Find your rung (private card)</a:t>
-            </a:r>
-          </a:p>
-          <a:p>
-            <a:pPr algn="l">
-              <a:spcAft>
-                <a:spcPts val="630"/>
-              </a:spcAft>
-            </a:pPr>
-            <a:r>
-              <a:rPr sz="1300" b="1" i="0">
-                <a:solidFill>
-                  <a:srgbClr val="F47B20"/>
-                </a:solidFill>
-                <a:latin typeface="Inter Tight"/>
-              </a:rPr>
-              <a:t>10 min   </a:t>
-            </a:r>
-            <a:r>
-              <a:rPr sz="1400" b="0" i="0">
-                <a:solidFill>
-                  <a:srgbClr val="1C1B19"/>
-                </a:solidFill>
-                <a:latin typeface="Source Serif 4"/>
-              </a:rPr>
-              <a:t>Three moments (small groups)</a:t>
-            </a:r>
-          </a:p>
-          <a:p>
-            <a:pPr algn="l">
-              <a:spcAft>
-                <a:spcPts val="630"/>
-              </a:spcAft>
-            </a:pPr>
-            <a:r>
-              <a:rPr sz="1300" b="1" i="0">
-                <a:solidFill>
-                  <a:srgbClr val="F47B20"/>
-                </a:solidFill>
-                <a:latin typeface="Inter Tight"/>
-              </a:rPr>
-              <a:t>5 min   </a:t>
-            </a:r>
-            <a:r>
-              <a:rPr sz="1400" b="0" i="0">
-                <a:solidFill>
-                  <a:srgbClr val="1C1B19"/>
-                </a:solidFill>
-                <a:latin typeface="Source Serif 4"/>
-              </a:rPr>
-              <a:t>Your people might not be at school (private reflection)</a:t>
-            </a:r>
-          </a:p>
-          <a:p>
-            <a:pPr algn="l">
-              <a:spcAft>
-                <a:spcPts val="630"/>
-              </a:spcAft>
-            </a:pPr>
-            <a:r>
-              <a:rPr sz="1300" b="1" i="0">
-                <a:solidFill>
-                  <a:srgbClr val="F47B20"/>
-                </a:solidFill>
-                <a:latin typeface="Inter Tight"/>
-              </a:rPr>
-              <a:t>3 min   </a:t>
-            </a:r>
-            <a:r>
-              <a:rPr sz="1400" b="0" i="0">
-                <a:solidFill>
-                  <a:srgbClr val="1C1B19"/>
-                </a:solidFill>
-                <a:latin typeface="Source Serif 4"/>
-              </a:rPr>
-              <a:t>One step this week, and the take-home link</a:t>
-            </a:r>
-          </a:p>
-          <a:p>
-            <a:pPr algn="l">
-              <a:spcAft>
-                <a:spcPts val="630"/>
-              </a:spcAft>
-            </a:pPr>
-            <a:r>
-              <a:rPr sz="1400" b="0" i="0">
-                <a:solidFill>
-                  <a:srgbClr val="1C1B19"/>
-                </a:solidFill>
-                <a:latin typeface="Source Serif 4"/>
-              </a:rPr>
-              <a:t/>
-            </a:r>
-          </a:p>
-          <a:p>
-            <a:pPr algn="l">
-              <a:spcAft>
-                <a:spcPts val="630"/>
-              </a:spcAft>
-            </a:pPr>
-            <a:r>
-              <a:rPr sz="1100" b="1" i="0">
-                <a:solidFill>
-                  <a:srgbClr val="0B2D5B"/>
-                </a:solidFill>
-                <a:latin typeface="Inter Tight"/>
-              </a:rPr>
               <a:t>SHORT ON TIME (20-MINUTE ADVISORY)</a:t>
             </a:r>
           </a:p>
           <a:p>
             <a:pPr algn="l">
               <a:spcAft>
-                <a:spcPts val="630"/>
-              </a:spcAft>
-            </a:pPr>
-            <a:r>
-              <a:rPr sz="1400" b="0" i="0">
+                <a:spcPts val="810"/>
+              </a:spcAft>
+            </a:pPr>
+            <a:r>
+              <a:rPr sz="1800" b="0" i="0">
                 <a:solidFill>
                   <a:srgbClr val="1C1B19"/>
                 </a:solidFill>
@@ -4891,7 +4716,7 @@
                 </a:solidFill>
                 <a:latin typeface="Inter Tight"/>
               </a:rPr>
-              <a:t>PAIR-SHARE</a:t>
+              <a:t>YOUR PEOPLE MIGHT NOT BE AT SCHOOL</a:t>
             </a:r>
           </a:p>
         </p:txBody>
@@ -5013,7 +4838,7 @@
                 </a:solidFill>
                 <a:latin typeface="Source Serif 4"/>
               </a:rPr>
-              <a:t>Ask your partner one question below small talk.</a:t>
+              <a:t>Who are your people outside school?</a:t>
             </a:r>
           </a:p>
         </p:txBody>
@@ -5052,7 +4877,7 @@
                 </a:solidFill>
                 <a:latin typeface="Inter Tight"/>
               </a:rPr>
-              <a:t>"What made you pick that elective?" or "What's been the hardest part of this year so far?" Then ask one follow-up.</a:t>
+              <a:t>And what are the rules at home, and where is there room? Private. Write it for yourself.</a:t>
             </a:r>
           </a:p>
         </p:txBody>
@@ -5161,7 +4986,7 @@
                 </a:solidFill>
                 <a:latin typeface="Inter Tight"/>
               </a:rPr>
-              <a:t>FIND YOUR RUNG</a:t>
+              <a:t>BEFORE YOU GO</a:t>
             </a:r>
           </a:p>
         </p:txBody>
@@ -5213,7 +5038,7 @@
         </p:nvSpPr>
         <p:spPr>
           <a:xfrm>
-            <a:off x="822960" y="1005840"/>
+            <a:off x="822960" y="1188720"/>
             <a:ext cx="10515600" cy="914400"/>
           </a:xfrm>
           <a:prstGeom prst="rect">
@@ -5229,31 +5054,70 @@
           <a:p>
             <a:pPr algn="l">
               <a:spcAft>
-                <a:spcPts val="1530"/>
-              </a:spcAft>
-            </a:pPr>
-            <a:r>
-              <a:rPr sz="3400" b="1" i="0">
+                <a:spcPts val="1620"/>
+              </a:spcAft>
+            </a:pPr>
+            <a:r>
+              <a:rPr sz="3600" b="1" i="0">
                 <a:solidFill>
                   <a:srgbClr val="1C1B19"/>
                 </a:solidFill>
                 <a:latin typeface="Source Serif 4"/>
               </a:rPr>
-              <a:t>Pick one person. Where are you now?</a:t>
-            </a:r>
-          </a:p>
-        </p:txBody>
-      </p:sp>
-      <p:sp>
-        <p:nvSpPr>
-          <p:cNvPr id="6" name="Rectangle 5"/>
+              <a:t>One step this week</a:t>
+            </a:r>
+          </a:p>
+        </p:txBody>
+      </p:sp>
+      <p:sp>
+        <p:nvSpPr>
+          <p:cNvPr id="6" name="TextBox 5"/>
+          <p:cNvSpPr txBox="1"/>
+          <p:nvPr/>
+        </p:nvSpPr>
+        <p:spPr>
+          <a:xfrm>
+            <a:off x="822960" y="2286000"/>
+            <a:ext cx="10515600" cy="1463040"/>
+          </a:xfrm>
+          <a:prstGeom prst="rect">
+            <a:avLst/>
+          </a:prstGeom>
+          <a:noFill/>
+        </p:spPr>
+        <p:txBody>
+          <a:bodyPr wrap="square" anchor="t" lIns="0" rIns="0" tIns="0" bIns="0">
+            <a:spAutoFit/>
+          </a:bodyPr>
+          <a:lstStyle/>
+          <a:p>
+            <a:pPr algn="l">
+              <a:spcAft>
+                <a:spcPts val="1080"/>
+              </a:spcAft>
+            </a:pPr>
+            <a:r>
+              <a:rPr sz="2400" b="0" i="0">
+                <a:solidFill>
+                  <a:srgbClr val="1C1B19"/>
+                </a:solidFill>
+                <a:latin typeface="Source Serif 4"/>
+              </a:rPr>
+              <a:t>Write one person and one specific move. When will you do it?</a:t>
+            </a:r>
+          </a:p>
+        </p:txBody>
+      </p:sp>
+      <p:sp>
+        <p:nvSpPr>
+          <p:cNvPr id="7" name="Rectangle 6"/>
           <p:cNvSpPr/>
           <p:nvPr/>
         </p:nvSpPr>
         <p:spPr>
           <a:xfrm>
-            <a:off x="822960" y="2103120"/>
-            <a:ext cx="5120640" cy="3931920"/>
+            <a:off x="822960" y="4023360"/>
+            <a:ext cx="10515600" cy="1371600"/>
           </a:xfrm>
           <a:prstGeom prst="rect">
             <a:avLst/>
@@ -5263,7 +5127,7 @@
           </a:solidFill>
           <a:ln w="15875">
             <a:solidFill>
-              <a:srgbClr val="D8D2C6"/>
+              <a:srgbClr val="1C1B19"/>
             </a:solidFill>
           </a:ln>
           <a:effectLst/>
@@ -5292,14 +5156,14 @@
       </p:sp>
       <p:sp>
         <p:nvSpPr>
-          <p:cNvPr id="7" name="TextBox 6"/>
+          <p:cNvPr id="8" name="TextBox 7"/>
           <p:cNvSpPr txBox="1"/>
           <p:nvPr/>
         </p:nvSpPr>
         <p:spPr>
           <a:xfrm>
-            <a:off x="1097280" y="2286000"/>
-            <a:ext cx="4572000" cy="457200"/>
+            <a:off x="1097280" y="4206240"/>
+            <a:ext cx="10058400" cy="365760"/>
           </a:xfrm>
           <a:prstGeom prst="rect">
             <a:avLst/>
@@ -5314,31 +5178,31 @@
           <a:p>
             <a:pPr algn="l">
               <a:spcAft>
-                <a:spcPts val="585"/>
-              </a:spcAft>
-            </a:pPr>
-            <a:r>
-              <a:rPr sz="1300" b="1" i="0">
+                <a:spcPts val="540"/>
+              </a:spcAft>
+            </a:pPr>
+            <a:r>
+              <a:rPr sz="1200" b="1" i="0">
                 <a:solidFill>
                   <a:srgbClr val="0B2D5B"/>
                 </a:solidFill>
                 <a:latin typeface="Inter Tight"/>
               </a:rPr>
-              <a:t>GETTING STARTED</a:t>
-            </a:r>
-          </a:p>
-        </p:txBody>
-      </p:sp>
-      <p:sp>
-        <p:nvSpPr>
-          <p:cNvPr id="8" name="TextBox 7"/>
+              <a:t>ON THE BVR DINER MENU</a:t>
+            </a:r>
+          </a:p>
+        </p:txBody>
+      </p:sp>
+      <p:sp>
+        <p:nvSpPr>
+          <p:cNvPr id="9" name="TextBox 8"/>
           <p:cNvSpPr txBox="1"/>
           <p:nvPr/>
         </p:nvSpPr>
         <p:spPr>
           <a:xfrm>
-            <a:off x="1097280" y="2788920"/>
-            <a:ext cx="4572000" cy="3108960"/>
+            <a:off x="1097280" y="4617720"/>
+            <a:ext cx="10058400" cy="640080"/>
           </a:xfrm>
           <a:prstGeom prst="rect">
             <a:avLst/>
@@ -5353,90 +5217,66 @@
           <a:p>
             <a:pPr algn="l">
               <a:spcAft>
-                <a:spcPts val="855"/>
-              </a:spcAft>
-            </a:pPr>
-            <a:r>
-              <a:rPr sz="1900" b="0" i="0">
+                <a:spcPts val="900"/>
+              </a:spcAft>
+            </a:pPr>
+            <a:r>
+              <a:rPr sz="2000" b="0" i="0">
                 <a:solidFill>
                   <a:srgbClr val="1C1B19"/>
                 </a:solidFill>
-                <a:latin typeface="Source Serif 4"/>
-              </a:rPr>
-              <a:t>Said hi or nodded in passing</a:t>
-            </a:r>
-          </a:p>
-          <a:p>
-            <a:pPr algn="l">
-              <a:spcAft>
-                <a:spcPts val="855"/>
-              </a:spcAft>
-            </a:pPr>
-            <a:r>
-              <a:rPr sz="1900" b="0" i="0">
-                <a:solidFill>
-                  <a:srgbClr val="1C1B19"/>
-                </a:solidFill>
-                <a:latin typeface="Source Serif 4"/>
-              </a:rPr>
-              <a:t>Talked about class or practice</a:t>
-            </a:r>
-          </a:p>
-          <a:p>
-            <a:pPr algn="l">
-              <a:spcAft>
-                <a:spcPts val="855"/>
-              </a:spcAft>
-            </a:pPr>
-            <a:r>
-              <a:rPr sz="1900" b="0" i="0">
-                <a:solidFill>
-                  <a:srgbClr val="1C1B19"/>
-                </a:solidFill>
-                <a:latin typeface="Source Serif 4"/>
-              </a:rPr>
-              <a:t>Asked about something they care about</a:t>
-            </a:r>
-          </a:p>
-          <a:p>
-            <a:pPr algn="l">
-              <a:spcAft>
-                <a:spcPts val="855"/>
-              </a:spcAft>
-            </a:pPr>
-            <a:r>
-              <a:rPr sz="1900" b="0" i="0">
-                <a:solidFill>
-                  <a:srgbClr val="1C1B19"/>
-                </a:solidFill>
-                <a:latin typeface="Source Serif 4"/>
-              </a:rPr>
-              <a:t>Chose to sit or partner with them</a:t>
-            </a:r>
-          </a:p>
-        </p:txBody>
-      </p:sp>
-      <p:sp>
-        <p:nvSpPr>
-          <p:cNvPr id="9" name="Rectangle 8"/>
+                <a:latin typeface="Inter Tight"/>
+              </a:rPr>
+              <a:t>https://rmwtoolkit.github.io/bcds-toolkit/finding-your-people-high-school.html</a:t>
+            </a:r>
+          </a:p>
+        </p:txBody>
+      </p:sp>
+    </p:spTree>
+  </p:cSld>
+  <p:clrMapOvr>
+    <a:masterClrMapping/>
+  </p:clrMapOvr>
+</p:sld>
+</file>
+
+<file path=ppt/slides/slide12.xml><?xml version="1.0" encoding="utf-8"?>
+<p:sld xmlns:a="http://schemas.openxmlformats.org/drawingml/2006/main" xmlns:p="http://schemas.openxmlformats.org/presentationml/2006/main" xmlns:r="http://schemas.openxmlformats.org/officeDocument/2006/relationships" show="0">
+  <p:cSld>
+    <p:bg>
+      <p:bgPr>
+        <a:solidFill>
+          <a:srgbClr val="EEEBE4"/>
+        </a:solidFill>
+        <a:effectLst/>
+      </p:bgPr>
+    </p:bg>
+    <p:spTree>
+      <p:nvGrpSpPr>
+        <p:cNvPr id="1" name=""/>
+        <p:cNvGrpSpPr/>
+        <p:nvPr/>
+      </p:nvGrpSpPr>
+      <p:grpSpPr/>
+      <p:sp>
+        <p:nvSpPr>
+          <p:cNvPr id="2" name="Rectangle 1"/>
           <p:cNvSpPr/>
           <p:nvPr/>
         </p:nvSpPr>
         <p:spPr>
           <a:xfrm>
-            <a:off x="6309360" y="2103120"/>
-            <a:ext cx="5120640" cy="3931920"/>
+            <a:off x="0" y="0"/>
+            <a:ext cx="12191695" cy="384048"/>
           </a:xfrm>
           <a:prstGeom prst="rect">
             <a:avLst/>
           </a:prstGeom>
           <a:solidFill>
-            <a:srgbClr val="FFFFFF"/>
+            <a:srgbClr val="0B2D5B"/>
           </a:solidFill>
-          <a:ln w="15875">
-            <a:solidFill>
-              <a:srgbClr val="D8D2C6"/>
-            </a:solidFill>
+          <a:ln>
+            <a:noFill/>
           </a:ln>
           <a:effectLst/>
         </p:spPr>
@@ -5464,14 +5304,14 @@
       </p:sp>
       <p:sp>
         <p:nvSpPr>
-          <p:cNvPr id="10" name="TextBox 9"/>
+          <p:cNvPr id="3" name="TextBox 2"/>
           <p:cNvSpPr txBox="1"/>
           <p:nvPr/>
         </p:nvSpPr>
         <p:spPr>
           <a:xfrm>
-            <a:off x="6583680" y="2286000"/>
-            <a:ext cx="4572000" cy="457200"/>
+            <a:off x="548640" y="100584"/>
+            <a:ext cx="10972800" cy="274320"/>
           </a:xfrm>
           <a:prstGeom prst="rect">
             <a:avLst/>
@@ -5486,31 +5326,31 @@
           <a:p>
             <a:pPr algn="l">
               <a:spcAft>
-                <a:spcPts val="585"/>
-              </a:spcAft>
-            </a:pPr>
-            <a:r>
-              <a:rPr sz="1300" b="1" i="0">
-                <a:solidFill>
-                  <a:srgbClr val="0B2D5B"/>
+                <a:spcPts val="495"/>
+              </a:spcAft>
+            </a:pPr>
+            <a:r>
+              <a:rPr sz="1100" b="1" i="0">
+                <a:solidFill>
+                  <a:srgbClr val="FFFFFF"/>
                 </a:solidFill>
                 <a:latin typeface="Inter Tight"/>
               </a:rPr>
-              <a:t>MOVING CLOSER</a:t>
-            </a:r>
-          </a:p>
-        </p:txBody>
-      </p:sp>
-      <p:sp>
-        <p:nvSpPr>
-          <p:cNvPr id="11" name="TextBox 10"/>
+              <a:t>TEACHER PAGE  ·  skipped when you present  ·  Lesson plan</a:t>
+            </a:r>
+          </a:p>
+        </p:txBody>
+      </p:sp>
+      <p:sp>
+        <p:nvSpPr>
+          <p:cNvPr id="4" name="TextBox 3"/>
           <p:cNvSpPr txBox="1"/>
           <p:nvPr/>
         </p:nvSpPr>
         <p:spPr>
           <a:xfrm>
-            <a:off x="6583680" y="2788920"/>
-            <a:ext cx="4572000" cy="3108960"/>
+            <a:off x="548640" y="685800"/>
+            <a:ext cx="10972800" cy="731520"/>
           </a:xfrm>
           <a:prstGeom prst="rect">
             <a:avLst/>
@@ -5525,65 +5365,453 @@
           <a:p>
             <a:pPr algn="l">
               <a:spcAft>
-                <a:spcPts val="855"/>
-              </a:spcAft>
-            </a:pPr>
-            <a:r>
-              <a:rPr sz="1900" b="0" i="0">
+                <a:spcPts val="1530"/>
+              </a:spcAft>
+            </a:pPr>
+            <a:r>
+              <a:rPr sz="3400" b="1" i="0">
                 <a:solidFill>
                   <a:srgbClr val="1C1B19"/>
                 </a:solidFill>
                 <a:latin typeface="Source Serif 4"/>
               </a:rPr>
-              <a:t>Got their number or followed them</a:t>
-            </a:r>
-          </a:p>
-          <a:p>
-            <a:pPr algn="l">
-              <a:spcAft>
-                <a:spcPts val="855"/>
-              </a:spcAft>
-            </a:pPr>
-            <a:r>
-              <a:rPr sz="1900" b="0" i="0">
+              <a:t>Finding Your People</a:t>
+            </a:r>
+          </a:p>
+        </p:txBody>
+      </p:sp>
+      <p:sp>
+        <p:nvSpPr>
+          <p:cNvPr id="5" name="TextBox 4"/>
+          <p:cNvSpPr txBox="1"/>
+          <p:nvPr/>
+        </p:nvSpPr>
+        <p:spPr>
+          <a:xfrm>
+            <a:off x="548640" y="1325880"/>
+            <a:ext cx="10972800" cy="365760"/>
+          </a:xfrm>
+          <a:prstGeom prst="rect">
+            <a:avLst/>
+          </a:prstGeom>
+          <a:noFill/>
+        </p:spPr>
+        <p:txBody>
+          <a:bodyPr wrap="square" anchor="t" lIns="0" rIns="0" tIns="0" bIns="0">
+            <a:spAutoFit/>
+          </a:bodyPr>
+          <a:lstStyle/>
+          <a:p>
+            <a:pPr algn="l">
+              <a:spcAft>
+                <a:spcPts val="630"/>
+              </a:spcAft>
+            </a:pPr>
+            <a:r>
+              <a:rPr sz="1400" b="0" i="0">
+                <a:solidFill>
+                  <a:srgbClr val="5D5A54"/>
+                </a:solidFill>
+                <a:latin typeface="Inter Tight"/>
+              </a:rPr>
+              <a:t>Upper School  ·  45 minutes (20-minute advisory version below)  ·  9th grade advisory, health class, or a counselor-led group</a:t>
+            </a:r>
+          </a:p>
+        </p:txBody>
+      </p:sp>
+      <p:sp>
+        <p:nvSpPr>
+          <p:cNvPr id="6" name="TextBox 5"/>
+          <p:cNvSpPr txBox="1"/>
+          <p:nvPr/>
+        </p:nvSpPr>
+        <p:spPr>
+          <a:xfrm>
+            <a:off x="548640" y="1828800"/>
+            <a:ext cx="5120640" cy="4389120"/>
+          </a:xfrm>
+          <a:prstGeom prst="rect">
+            <a:avLst/>
+          </a:prstGeom>
+          <a:noFill/>
+        </p:spPr>
+        <p:txBody>
+          <a:bodyPr wrap="square" anchor="t" lIns="0" rIns="0" tIns="0" bIns="0">
+            <a:spAutoFit/>
+          </a:bodyPr>
+          <a:lstStyle/>
+          <a:p>
+            <a:pPr algn="l">
+              <a:spcAft>
+                <a:spcPts val="675"/>
+              </a:spcAft>
+            </a:pPr>
+            <a:r>
+              <a:rPr sz="1100" b="1" i="0">
+                <a:solidFill>
+                  <a:srgbClr val="0B2D5B"/>
+                </a:solidFill>
+                <a:latin typeface="Inter Tight"/>
+              </a:rPr>
+              <a:t>GOAL</a:t>
+            </a:r>
+          </a:p>
+          <a:p>
+            <a:pPr algn="l">
+              <a:spcAft>
+                <a:spcPts val="675"/>
+              </a:spcAft>
+            </a:pPr>
+            <a:r>
+              <a:rPr sz="1500" b="0" i="0">
                 <a:solidFill>
                   <a:srgbClr val="1C1B19"/>
                 </a:solidFill>
                 <a:latin typeface="Source Serif 4"/>
               </a:rPr>
-              <a:t>Texted about something besides logistics</a:t>
-            </a:r>
-          </a:p>
-          <a:p>
-            <a:pPr algn="l">
-              <a:spcAft>
-                <a:spcPts val="855"/>
-              </a:spcAft>
-            </a:pPr>
-            <a:r>
-              <a:rPr sz="1900" b="0" i="0">
+              <a:t>Students can explain why close friendships take time (the hours estimate and the liking gap), find their next step with one person using the friendship ladder, and leave with one specific move for this week. Nobody should have to say out loud how connected they are.</a:t>
+            </a:r>
+          </a:p>
+          <a:p>
+            <a:pPr algn="l">
+              <a:spcAft>
+                <a:spcPts val="675"/>
+              </a:spcAft>
+            </a:pPr>
+            <a:r>
+              <a:rPr sz="1500" b="0" i="0">
                 <a:solidFill>
                   <a:srgbClr val="1C1B19"/>
                 </a:solidFill>
                 <a:latin typeface="Source Serif 4"/>
               </a:rPr>
-              <a:t>Made a specific plan</a:t>
-            </a:r>
-          </a:p>
-          <a:p>
-            <a:pPr algn="l">
-              <a:spcAft>
-                <a:spcPts val="855"/>
-              </a:spcAft>
-            </a:pPr>
-            <a:r>
-              <a:rPr sz="1900" b="0" i="0">
+              <a:t/>
+            </a:r>
+          </a:p>
+          <a:p>
+            <a:pPr algn="l">
+              <a:spcAft>
+                <a:spcPts val="675"/>
+              </a:spcAft>
+            </a:pPr>
+            <a:r>
+              <a:rPr sz="1100" b="1" i="0">
+                <a:solidFill>
+                  <a:srgbClr val="0B2D5B"/>
+                </a:solidFill>
+                <a:latin typeface="Inter Tight"/>
+              </a:rPr>
+              <a:t>MATERIALS</a:t>
+            </a:r>
+          </a:p>
+          <a:p>
+            <a:pPr algn="l">
+              <a:spcAft>
+                <a:spcPts val="675"/>
+              </a:spcAft>
+            </a:pPr>
+            <a:r>
+              <a:rPr sz="1500" b="0" i="0">
                 <a:solidFill>
                   <a:srgbClr val="1C1B19"/>
                 </a:solidFill>
                 <a:latin typeface="Source Serif 4"/>
               </a:rPr>
-              <a:t>Your step: the next rung up</a:t>
+              <a:t>Index cards for the private ladder and the exit card</a:t>
+            </a:r>
+          </a:p>
+          <a:p>
+            <a:pPr algn="l">
+              <a:spcAft>
+                <a:spcPts val="675"/>
+              </a:spcAft>
+            </a:pPr>
+            <a:r>
+              <a:rPr sz="1500" b="0" i="0">
+                <a:solidFill>
+                  <a:srgbClr val="1C1B19"/>
+                </a:solidFill>
+                <a:latin typeface="Source Serif 4"/>
+              </a:rPr>
+              <a:t>A board to draw the hours scale</a:t>
+            </a:r>
+          </a:p>
+          <a:p>
+            <a:pPr algn="l">
+              <a:spcAft>
+                <a:spcPts val="675"/>
+              </a:spcAft>
+            </a:pPr>
+            <a:r>
+              <a:rPr sz="1500" b="0" i="0">
+                <a:solidFill>
+                  <a:srgbClr val="1C1B19"/>
+                </a:solidFill>
+                <a:latin typeface="Source Serif 4"/>
+              </a:rPr>
+              <a:t>The take-home link (last slide) to share after class</a:t>
+            </a:r>
+          </a:p>
+        </p:txBody>
+      </p:sp>
+      <p:sp>
+        <p:nvSpPr>
+          <p:cNvPr id="7" name="TextBox 6"/>
+          <p:cNvSpPr txBox="1"/>
+          <p:nvPr/>
+        </p:nvSpPr>
+        <p:spPr>
+          <a:xfrm>
+            <a:off x="6126480" y="1828800"/>
+            <a:ext cx="5486400" cy="4389120"/>
+          </a:xfrm>
+          <a:prstGeom prst="rect">
+            <a:avLst/>
+          </a:prstGeom>
+          <a:noFill/>
+        </p:spPr>
+        <p:txBody>
+          <a:bodyPr wrap="square" anchor="t" lIns="0" rIns="0" tIns="0" bIns="0">
+            <a:spAutoFit/>
+          </a:bodyPr>
+          <a:lstStyle/>
+          <a:p>
+            <a:pPr algn="l">
+              <a:spcAft>
+                <a:spcPts val="630"/>
+              </a:spcAft>
+            </a:pPr>
+            <a:r>
+              <a:rPr sz="1100" b="1" i="0">
+                <a:solidFill>
+                  <a:srgbClr val="0B2D5B"/>
+                </a:solidFill>
+                <a:latin typeface="Inter Tight"/>
+              </a:rPr>
+              <a:t>FLOW</a:t>
+            </a:r>
+          </a:p>
+          <a:p>
+            <a:pPr algn="l">
+              <a:spcAft>
+                <a:spcPts val="630"/>
+              </a:spcAft>
+            </a:pPr>
+            <a:r>
+              <a:rPr sz="1300" b="1" i="0">
+                <a:solidFill>
+                  <a:srgbClr val="F47B20"/>
+                </a:solidFill>
+                <a:latin typeface="Inter Tight"/>
+              </a:rPr>
+              <a:t>5 min   </a:t>
+            </a:r>
+            <a:r>
+              <a:rPr sz="1400" b="0" i="0">
+                <a:solidFill>
+                  <a:srgbClr val="1C1B19"/>
+                </a:solidFill>
+                <a:latin typeface="Source Serif 4"/>
+              </a:rPr>
+              <a:t>Myth or fact (stand up, sit down)</a:t>
+            </a:r>
+          </a:p>
+          <a:p>
+            <a:pPr algn="l">
+              <a:spcAft>
+                <a:spcPts val="630"/>
+              </a:spcAft>
+            </a:pPr>
+            <a:r>
+              <a:rPr sz="1300" b="1" i="0">
+                <a:solidFill>
+                  <a:srgbClr val="F47B20"/>
+                </a:solidFill>
+                <a:latin typeface="Inter Tight"/>
+              </a:rPr>
+              <a:t>8 min   </a:t>
+            </a:r>
+            <a:r>
+              <a:rPr sz="1400" b="0" i="0">
+                <a:solidFill>
+                  <a:srgbClr val="1C1B19"/>
+                </a:solidFill>
+                <a:latin typeface="Source Serif 4"/>
+              </a:rPr>
+              <a:t>Friendship runs on a clock</a:t>
+            </a:r>
+          </a:p>
+          <a:p>
+            <a:pPr algn="l">
+              <a:spcAft>
+                <a:spcPts val="630"/>
+              </a:spcAft>
+            </a:pPr>
+            <a:r>
+              <a:rPr sz="1300" b="1" i="0">
+                <a:solidFill>
+                  <a:srgbClr val="F47B20"/>
+                </a:solidFill>
+                <a:latin typeface="Inter Tight"/>
+              </a:rPr>
+              <a:t>7 min   </a:t>
+            </a:r>
+            <a:r>
+              <a:rPr sz="1400" b="0" i="0">
+                <a:solidFill>
+                  <a:srgbClr val="1C1B19"/>
+                </a:solidFill>
+                <a:latin typeface="Source Serif 4"/>
+              </a:rPr>
+              <a:t>The liking gap, then one layer down (pair-share)</a:t>
+            </a:r>
+          </a:p>
+          <a:p>
+            <a:pPr algn="l">
+              <a:spcAft>
+                <a:spcPts val="630"/>
+              </a:spcAft>
+            </a:pPr>
+            <a:r>
+              <a:rPr sz="1300" b="1" i="0">
+                <a:solidFill>
+                  <a:srgbClr val="F47B20"/>
+                </a:solidFill>
+                <a:latin typeface="Inter Tight"/>
+              </a:rPr>
+              <a:t>7 min   </a:t>
+            </a:r>
+            <a:r>
+              <a:rPr sz="1400" b="0" i="0">
+                <a:solidFill>
+                  <a:srgbClr val="1C1B19"/>
+                </a:solidFill>
+                <a:latin typeface="Source Serif 4"/>
+              </a:rPr>
+              <a:t>Find your rung (private card)</a:t>
+            </a:r>
+          </a:p>
+          <a:p>
+            <a:pPr algn="l">
+              <a:spcAft>
+                <a:spcPts val="630"/>
+              </a:spcAft>
+            </a:pPr>
+            <a:r>
+              <a:rPr sz="1300" b="1" i="0">
+                <a:solidFill>
+                  <a:srgbClr val="F47B20"/>
+                </a:solidFill>
+                <a:latin typeface="Inter Tight"/>
+              </a:rPr>
+              <a:t>10 min   </a:t>
+            </a:r>
+            <a:r>
+              <a:rPr sz="1400" b="0" i="0">
+                <a:solidFill>
+                  <a:srgbClr val="1C1B19"/>
+                </a:solidFill>
+                <a:latin typeface="Source Serif 4"/>
+              </a:rPr>
+              <a:t>Three moments (small groups)</a:t>
+            </a:r>
+          </a:p>
+          <a:p>
+            <a:pPr algn="l">
+              <a:spcAft>
+                <a:spcPts val="630"/>
+              </a:spcAft>
+            </a:pPr>
+            <a:r>
+              <a:rPr sz="1300" b="1" i="0">
+                <a:solidFill>
+                  <a:srgbClr val="F47B20"/>
+                </a:solidFill>
+                <a:latin typeface="Inter Tight"/>
+              </a:rPr>
+              <a:t>5 min   </a:t>
+            </a:r>
+            <a:r>
+              <a:rPr sz="1400" b="0" i="0">
+                <a:solidFill>
+                  <a:srgbClr val="1C1B19"/>
+                </a:solidFill>
+                <a:latin typeface="Source Serif 4"/>
+              </a:rPr>
+              <a:t>Your people might not be at school (private reflection)</a:t>
+            </a:r>
+          </a:p>
+          <a:p>
+            <a:pPr algn="l">
+              <a:spcAft>
+                <a:spcPts val="630"/>
+              </a:spcAft>
+            </a:pPr>
+            <a:r>
+              <a:rPr sz="1300" b="1" i="0">
+                <a:solidFill>
+                  <a:srgbClr val="F47B20"/>
+                </a:solidFill>
+                <a:latin typeface="Inter Tight"/>
+              </a:rPr>
+              <a:t>3 min   </a:t>
+            </a:r>
+            <a:r>
+              <a:rPr sz="1400" b="0" i="0">
+                <a:solidFill>
+                  <a:srgbClr val="1C1B19"/>
+                </a:solidFill>
+                <a:latin typeface="Source Serif 4"/>
+              </a:rPr>
+              <a:t>One step this week, and the take-home link</a:t>
+            </a:r>
+          </a:p>
+          <a:p>
+            <a:pPr algn="l">
+              <a:spcAft>
+                <a:spcPts val="630"/>
+              </a:spcAft>
+            </a:pPr>
+            <a:r>
+              <a:rPr sz="1400" b="0" i="0">
+                <a:solidFill>
+                  <a:srgbClr val="1C1B19"/>
+                </a:solidFill>
+                <a:latin typeface="Source Serif 4"/>
+              </a:rPr>
+              <a:t/>
+            </a:r>
+          </a:p>
+          <a:p>
+            <a:pPr algn="l">
+              <a:spcAft>
+                <a:spcPts val="630"/>
+              </a:spcAft>
+            </a:pPr>
+            <a:r>
+              <a:rPr sz="1100" b="1" i="0">
+                <a:solidFill>
+                  <a:srgbClr val="0B2D5B"/>
+                </a:solidFill>
+                <a:latin typeface="Inter Tight"/>
+              </a:rPr>
+              <a:t>SHORT ON TIME (20-MINUTE ADVISORY)</a:t>
+            </a:r>
+          </a:p>
+          <a:p>
+            <a:pPr algn="l">
+              <a:spcAft>
+                <a:spcPts val="630"/>
+              </a:spcAft>
+            </a:pPr>
+            <a:r>
+              <a:rPr sz="1400" b="0" i="0">
+                <a:solidFill>
+                  <a:srgbClr val="1C1B19"/>
+                </a:solidFill>
+                <a:latin typeface="Source Serif 4"/>
+              </a:rPr>
+              <a:t>Myth or fact (5), the clock (5), one of the three moments (7), one step and the link (3). The take-home sheet has the ladder and the openers.</a:t>
             </a:r>
           </a:p>
         </p:txBody>
@@ -5596,7 +5824,1661 @@
 </p:sld>
 </file>
 
-<file path=ppt/slides/slide12.xml><?xml version="1.0" encoding="utf-8"?>
+<file path=ppt/slides/slide13.xml><?xml version="1.0" encoding="utf-8"?>
+<p:sld xmlns:a="http://schemas.openxmlformats.org/drawingml/2006/main" xmlns:p="http://schemas.openxmlformats.org/presentationml/2006/main" xmlns:r="http://schemas.openxmlformats.org/officeDocument/2006/relationships" show="0">
+  <p:cSld>
+    <p:bg>
+      <p:bgPr>
+        <a:solidFill>
+          <a:srgbClr val="EEEBE4"/>
+        </a:solidFill>
+        <a:effectLst/>
+      </p:bgPr>
+    </p:bg>
+    <p:spTree>
+      <p:nvGrpSpPr>
+        <p:cNvPr id="1" name=""/>
+        <p:cNvGrpSpPr/>
+        <p:nvPr/>
+      </p:nvGrpSpPr>
+      <p:grpSpPr/>
+      <p:sp>
+        <p:nvSpPr>
+          <p:cNvPr id="2" name="Rectangle 1"/>
+          <p:cNvSpPr/>
+          <p:nvPr/>
+        </p:nvSpPr>
+        <p:spPr>
+          <a:xfrm>
+            <a:off x="0" y="0"/>
+            <a:ext cx="12191695" cy="384048"/>
+          </a:xfrm>
+          <a:prstGeom prst="rect">
+            <a:avLst/>
+          </a:prstGeom>
+          <a:solidFill>
+            <a:srgbClr val="0B2D5B"/>
+          </a:solidFill>
+          <a:ln>
+            <a:noFill/>
+          </a:ln>
+          <a:effectLst/>
+        </p:spPr>
+        <p:style>
+          <a:lnRef idx="1">
+            <a:schemeClr val="accent1"/>
+          </a:lnRef>
+          <a:fillRef idx="3">
+            <a:schemeClr val="accent1"/>
+          </a:fillRef>
+          <a:effectRef idx="2">
+            <a:schemeClr val="accent1"/>
+          </a:effectRef>
+          <a:fontRef idx="minor">
+            <a:schemeClr val="lt1"/>
+          </a:fontRef>
+        </p:style>
+        <p:txBody>
+          <a:bodyPr rtlCol="0" anchor="ctr"/>
+          <a:lstStyle/>
+          <a:p>
+            <a:pPr algn="ctr"/>
+          </a:p>
+        </p:txBody>
+      </p:sp>
+      <p:sp>
+        <p:nvSpPr>
+          <p:cNvPr id="3" name="TextBox 2"/>
+          <p:cNvSpPr txBox="1"/>
+          <p:nvPr/>
+        </p:nvSpPr>
+        <p:spPr>
+          <a:xfrm>
+            <a:off x="548640" y="100584"/>
+            <a:ext cx="10972800" cy="274320"/>
+          </a:xfrm>
+          <a:prstGeom prst="rect">
+            <a:avLst/>
+          </a:prstGeom>
+          <a:noFill/>
+        </p:spPr>
+        <p:txBody>
+          <a:bodyPr wrap="square" anchor="t" lIns="0" rIns="0" tIns="0" bIns="0">
+            <a:spAutoFit/>
+          </a:bodyPr>
+          <a:lstStyle/>
+          <a:p>
+            <a:pPr algn="l">
+              <a:spcAft>
+                <a:spcPts val="495"/>
+              </a:spcAft>
+            </a:pPr>
+            <a:r>
+              <a:rPr sz="1100" b="1" i="0">
+                <a:solidFill>
+                  <a:srgbClr val="FFFFFF"/>
+                </a:solidFill>
+                <a:latin typeface="Inter Tight"/>
+              </a:rPr>
+              <a:t>TEACHER PAGE  ·  skipped when you present  ·  Before you teach</a:t>
+            </a:r>
+          </a:p>
+        </p:txBody>
+      </p:sp>
+      <p:sp>
+        <p:nvSpPr>
+          <p:cNvPr id="4" name="TextBox 3"/>
+          <p:cNvSpPr txBox="1"/>
+          <p:nvPr/>
+        </p:nvSpPr>
+        <p:spPr>
+          <a:xfrm>
+            <a:off x="548640" y="685800"/>
+            <a:ext cx="10972800" cy="640080"/>
+          </a:xfrm>
+          <a:prstGeom prst="rect">
+            <a:avLst/>
+          </a:prstGeom>
+          <a:noFill/>
+        </p:spPr>
+        <p:txBody>
+          <a:bodyPr wrap="square" anchor="t" lIns="0" rIns="0" tIns="0" bIns="0">
+            <a:spAutoFit/>
+          </a:bodyPr>
+          <a:lstStyle/>
+          <a:p>
+            <a:pPr algn="l">
+              <a:spcAft>
+                <a:spcPts val="1350"/>
+              </a:spcAft>
+            </a:pPr>
+            <a:r>
+              <a:rPr sz="3000" b="1" i="0">
+                <a:solidFill>
+                  <a:srgbClr val="1C1B19"/>
+                </a:solidFill>
+                <a:latin typeface="Source Serif 4"/>
+              </a:rPr>
+              <a:t>Before you teach</a:t>
+            </a:r>
+          </a:p>
+        </p:txBody>
+      </p:sp>
+      <p:sp>
+        <p:nvSpPr>
+          <p:cNvPr id="5" name="TextBox 4"/>
+          <p:cNvSpPr txBox="1"/>
+          <p:nvPr/>
+        </p:nvSpPr>
+        <p:spPr>
+          <a:xfrm>
+            <a:off x="548640" y="1463040"/>
+            <a:ext cx="5394960" cy="4937760"/>
+          </a:xfrm>
+          <a:prstGeom prst="rect">
+            <a:avLst/>
+          </a:prstGeom>
+          <a:noFill/>
+        </p:spPr>
+        <p:txBody>
+          <a:bodyPr wrap="square" anchor="t" lIns="0" rIns="0" tIns="0" bIns="0">
+            <a:spAutoFit/>
+          </a:bodyPr>
+          <a:lstStyle/>
+          <a:p>
+            <a:pPr algn="l">
+              <a:spcAft>
+                <a:spcPts val="585"/>
+              </a:spcAft>
+            </a:pPr>
+            <a:r>
+              <a:rPr sz="1500" b="1" i="0">
+                <a:solidFill>
+                  <a:srgbClr val="1C1B19"/>
+                </a:solidFill>
+                <a:latin typeface="Source Serif 4"/>
+              </a:rPr>
+              <a:t>Assume lonely students are in the room.</a:t>
+            </a:r>
+          </a:p>
+          <a:p>
+            <a:pPr algn="l">
+              <a:spcAft>
+                <a:spcPts val="585"/>
+              </a:spcAft>
+            </a:pPr>
+            <a:r>
+              <a:rPr sz="1300" b="0" i="0">
+                <a:solidFill>
+                  <a:srgbClr val="1C1B19"/>
+                </a:solidFill>
+                <a:latin typeface="Source Serif 4"/>
+              </a:rPr>
+              <a:t>Some 9th graders arrived knowing nobody, and some lost their middle school group over the summer. Never ask for a show of hands about who has friends, who sits alone, or who feels left out. Every personal question in this lesson is private.</a:t>
+            </a:r>
+          </a:p>
+          <a:p>
+            <a:pPr algn="l">
+              <a:spcAft>
+                <a:spcPts val="585"/>
+              </a:spcAft>
+            </a:pPr>
+            <a:r>
+              <a:rPr sz="1300" b="0" i="0">
+                <a:solidFill>
+                  <a:srgbClr val="1C1B19"/>
+                </a:solidFill>
+                <a:latin typeface="Source Serif 4"/>
+              </a:rPr>
+              <a:t/>
+            </a:r>
+          </a:p>
+          <a:p>
+            <a:pPr algn="l">
+              <a:spcAft>
+                <a:spcPts val="585"/>
+              </a:spcAft>
+            </a:pPr>
+            <a:r>
+              <a:rPr sz="1500" b="1" i="0">
+                <a:solidFill>
+                  <a:srgbClr val="1C1B19"/>
+                </a:solidFill>
+                <a:latin typeface="Source Serif 4"/>
+              </a:rPr>
+              <a:t>Set up the pair-share so nobody gets picked last.</a:t>
+            </a:r>
+          </a:p>
+          <a:p>
+            <a:pPr algn="l">
+              <a:spcAft>
+                <a:spcPts val="585"/>
+              </a:spcAft>
+            </a:pPr>
+            <a:r>
+              <a:rPr sz="1300" b="0" i="0">
+                <a:solidFill>
+                  <a:srgbClr val="1C1B19"/>
+                </a:solidFill>
+                <a:latin typeface="Source Serif 4"/>
+              </a:rPr>
+              <a:t>Assign partners (count off, or pair by seat) so nobody has to find one. Give everyone a pass option and an easier question. A student who stays quiet is still taking part.</a:t>
+            </a:r>
+          </a:p>
+          <a:p>
+            <a:pPr algn="l">
+              <a:spcAft>
+                <a:spcPts val="585"/>
+              </a:spcAft>
+            </a:pPr>
+            <a:r>
+              <a:rPr sz="1300" b="0" i="0">
+                <a:solidFill>
+                  <a:srgbClr val="1C1B19"/>
+                </a:solidFill>
+                <a:latin typeface="Source Serif 4"/>
+              </a:rPr>
+              <a:t/>
+            </a:r>
+          </a:p>
+          <a:p>
+            <a:pPr algn="l">
+              <a:spcAft>
+                <a:spcPts val="585"/>
+              </a:spcAft>
+            </a:pPr>
+            <a:r>
+              <a:rPr sz="1500" b="1" i="0">
+                <a:solidFill>
+                  <a:srgbClr val="1C1B19"/>
+                </a:solidFill>
+                <a:latin typeface="Source Serif 4"/>
+              </a:rPr>
+              <a:t>Being left out on purpose is a different conversation.</a:t>
+            </a:r>
+          </a:p>
+          <a:p>
+            <a:pPr algn="l">
+              <a:spcAft>
+                <a:spcPts val="585"/>
+              </a:spcAft>
+            </a:pPr>
+            <a:r>
+              <a:rPr sz="1300" b="0" i="0">
+                <a:solidFill>
+                  <a:srgbClr val="1C1B19"/>
+                </a:solidFill>
+                <a:latin typeface="Source Serif 4"/>
+              </a:rPr>
+              <a:t>If a student describes being excluded, picked on, or targeted, thank them and connect them with a counselor that day. Don't problem-solve it in front of the class.</a:t>
+            </a:r>
+          </a:p>
+          <a:p>
+            <a:pPr algn="l">
+              <a:spcAft>
+                <a:spcPts val="585"/>
+              </a:spcAft>
+            </a:pPr>
+            <a:r>
+              <a:rPr sz="1300" b="0" i="0">
+                <a:solidFill>
+                  <a:srgbClr val="1C1B19"/>
+                </a:solidFill>
+                <a:latin typeface="Source Serif 4"/>
+              </a:rPr>
+              <a:t/>
+            </a:r>
+          </a:p>
+        </p:txBody>
+      </p:sp>
+      <p:sp>
+        <p:nvSpPr>
+          <p:cNvPr id="6" name="TextBox 5"/>
+          <p:cNvSpPr txBox="1"/>
+          <p:nvPr/>
+        </p:nvSpPr>
+        <p:spPr>
+          <a:xfrm>
+            <a:off x="6217920" y="1463040"/>
+            <a:ext cx="5394960" cy="4937760"/>
+          </a:xfrm>
+          <a:prstGeom prst="rect">
+            <a:avLst/>
+          </a:prstGeom>
+          <a:noFill/>
+        </p:spPr>
+        <p:txBody>
+          <a:bodyPr wrap="square" anchor="t" lIns="0" rIns="0" tIns="0" bIns="0">
+            <a:spAutoFit/>
+          </a:bodyPr>
+          <a:lstStyle/>
+          <a:p>
+            <a:pPr algn="l">
+              <a:spcAft>
+                <a:spcPts val="585"/>
+              </a:spcAft>
+            </a:pPr>
+            <a:r>
+              <a:rPr sz="1500" b="1" i="0">
+                <a:solidFill>
+                  <a:srgbClr val="1C1B19"/>
+                </a:solidFill>
+                <a:latin typeface="Source Serif 4"/>
+              </a:rPr>
+              <a:t>Know the signs that loneliness needs more than a lesson.</a:t>
+            </a:r>
+          </a:p>
+          <a:p>
+            <a:pPr algn="l">
+              <a:spcAft>
+                <a:spcPts val="585"/>
+              </a:spcAft>
+            </a:pPr>
+            <a:r>
+              <a:rPr sz="1300" b="0" i="0">
+                <a:solidFill>
+                  <a:srgbClr val="1C1B19"/>
+                </a:solidFill>
+                <a:latin typeface="Source Serif 4"/>
+              </a:rPr>
+              <a:t>Feeling alone most days for a long time, skipping school or practice because of it, or seeming hopeless or down most of the time. Don't ask about any of this in class. If a student tells you something like this, or writes it on a card, follow up privately and bring in a counselor.</a:t>
+            </a:r>
+          </a:p>
+          <a:p>
+            <a:pPr algn="l">
+              <a:spcAft>
+                <a:spcPts val="585"/>
+              </a:spcAft>
+            </a:pPr>
+            <a:r>
+              <a:rPr sz="1300" b="0" i="0">
+                <a:solidFill>
+                  <a:srgbClr val="1C1B19"/>
+                </a:solidFill>
+                <a:latin typeface="Source Serif 4"/>
+              </a:rPr>
+              <a:t/>
+            </a:r>
+          </a:p>
+          <a:p>
+            <a:pPr algn="l">
+              <a:spcAft>
+                <a:spcPts val="585"/>
+              </a:spcAft>
+            </a:pPr>
+            <a:r>
+              <a:rPr sz="1500" b="1" i="0">
+                <a:solidFill>
+                  <a:srgbClr val="1C1B19"/>
+                </a:solidFill>
+                <a:latin typeface="Source Serif 4"/>
+              </a:rPr>
+              <a:t>Online friends come up. Respect them.</a:t>
+            </a:r>
+          </a:p>
+          <a:p>
+            <a:pPr algn="l">
+              <a:spcAft>
+                <a:spcPts val="585"/>
+              </a:spcAft>
+            </a:pPr>
+            <a:r>
+              <a:rPr sz="1300" b="0" i="0">
+                <a:solidFill>
+                  <a:srgbClr val="1C1B19"/>
+                </a:solidFill>
+                <a:latin typeface="Source Serif 4"/>
+              </a:rPr>
+              <a:t>Online friendships are real, especially for students who don't see themselves at school. Add the safety piece calmly: meet in public, tell someone you trust, bring a friend. An adult who wants a friendship kept secret is a red flag and a counselor conversation.</a:t>
+            </a:r>
+          </a:p>
+          <a:p>
+            <a:pPr algn="l">
+              <a:spcAft>
+                <a:spcPts val="585"/>
+              </a:spcAft>
+            </a:pPr>
+            <a:r>
+              <a:rPr sz="1300" b="0" i="0">
+                <a:solidFill>
+                  <a:srgbClr val="1C1B19"/>
+                </a:solidFill>
+                <a:latin typeface="Source Serif 4"/>
+              </a:rPr>
+              <a:t/>
+            </a:r>
+          </a:p>
+          <a:p>
+            <a:pPr algn="l">
+              <a:spcAft>
+                <a:spcPts val="585"/>
+              </a:spcAft>
+            </a:pPr>
+            <a:r>
+              <a:rPr sz="1500" b="1" i="0">
+                <a:solidFill>
+                  <a:srgbClr val="1C1B19"/>
+                </a:solidFill>
+                <a:latin typeface="Source Serif 4"/>
+              </a:rPr>
+              <a:t>Keep the hours estimate honest.</a:t>
+            </a:r>
+          </a:p>
+          <a:p>
+            <a:pPr algn="l">
+              <a:spcAft>
+                <a:spcPts val="585"/>
+              </a:spcAft>
+            </a:pPr>
+            <a:r>
+              <a:rPr sz="1300" b="0" i="0">
+                <a:solidFill>
+                  <a:srgbClr val="1C1B19"/>
+                </a:solidFill>
+                <a:latin typeface="Source Serif 4"/>
+              </a:rPr>
+              <a:t>The 50, 90 and 200 hour numbers are one researcher's estimates and vary a lot by person. Present them as a rough map. The point is patience, so don't turn it into a quota.</a:t>
+            </a:r>
+          </a:p>
+          <a:p>
+            <a:pPr algn="l">
+              <a:spcAft>
+                <a:spcPts val="585"/>
+              </a:spcAft>
+            </a:pPr>
+            <a:r>
+              <a:rPr sz="1300" b="0" i="0">
+                <a:solidFill>
+                  <a:srgbClr val="1C1B19"/>
+                </a:solidFill>
+                <a:latin typeface="Source Serif 4"/>
+              </a:rPr>
+              <a:t/>
+            </a:r>
+          </a:p>
+        </p:txBody>
+      </p:sp>
+    </p:spTree>
+  </p:cSld>
+  <p:clrMapOvr>
+    <a:masterClrMapping/>
+  </p:clrMapOvr>
+</p:sld>
+</file>
+
+<file path=ppt/slides/slide14.xml><?xml version="1.0" encoding="utf-8"?>
+<p:sld xmlns:a="http://schemas.openxmlformats.org/drawingml/2006/main" xmlns:p="http://schemas.openxmlformats.org/presentationml/2006/main" xmlns:r="http://schemas.openxmlformats.org/officeDocument/2006/relationships" show="0">
+  <p:cSld>
+    <p:bg>
+      <p:bgPr>
+        <a:solidFill>
+          <a:srgbClr val="EEEBE4"/>
+        </a:solidFill>
+        <a:effectLst/>
+      </p:bgPr>
+    </p:bg>
+    <p:spTree>
+      <p:nvGrpSpPr>
+        <p:cNvPr id="1" name=""/>
+        <p:cNvGrpSpPr/>
+        <p:nvPr/>
+      </p:nvGrpSpPr>
+      <p:grpSpPr/>
+      <p:sp>
+        <p:nvSpPr>
+          <p:cNvPr id="2" name="Rectangle 1"/>
+          <p:cNvSpPr/>
+          <p:nvPr/>
+        </p:nvSpPr>
+        <p:spPr>
+          <a:xfrm>
+            <a:off x="0" y="0"/>
+            <a:ext cx="12191695" cy="384048"/>
+          </a:xfrm>
+          <a:prstGeom prst="rect">
+            <a:avLst/>
+          </a:prstGeom>
+          <a:solidFill>
+            <a:srgbClr val="0B2D5B"/>
+          </a:solidFill>
+          <a:ln>
+            <a:noFill/>
+          </a:ln>
+          <a:effectLst/>
+        </p:spPr>
+        <p:style>
+          <a:lnRef idx="1">
+            <a:schemeClr val="accent1"/>
+          </a:lnRef>
+          <a:fillRef idx="3">
+            <a:schemeClr val="accent1"/>
+          </a:fillRef>
+          <a:effectRef idx="2">
+            <a:schemeClr val="accent1"/>
+          </a:effectRef>
+          <a:fontRef idx="minor">
+            <a:schemeClr val="lt1"/>
+          </a:fontRef>
+        </p:style>
+        <p:txBody>
+          <a:bodyPr rtlCol="0" anchor="ctr"/>
+          <a:lstStyle/>
+          <a:p>
+            <a:pPr algn="ctr"/>
+          </a:p>
+        </p:txBody>
+      </p:sp>
+      <p:sp>
+        <p:nvSpPr>
+          <p:cNvPr id="3" name="TextBox 2"/>
+          <p:cNvSpPr txBox="1"/>
+          <p:nvPr/>
+        </p:nvSpPr>
+        <p:spPr>
+          <a:xfrm>
+            <a:off x="548640" y="100584"/>
+            <a:ext cx="10972800" cy="274320"/>
+          </a:xfrm>
+          <a:prstGeom prst="rect">
+            <a:avLst/>
+          </a:prstGeom>
+          <a:noFill/>
+        </p:spPr>
+        <p:txBody>
+          <a:bodyPr wrap="square" anchor="t" lIns="0" rIns="0" tIns="0" bIns="0">
+            <a:spAutoFit/>
+          </a:bodyPr>
+          <a:lstStyle/>
+          <a:p>
+            <a:pPr algn="l">
+              <a:spcAft>
+                <a:spcPts val="495"/>
+              </a:spcAft>
+            </a:pPr>
+            <a:r>
+              <a:rPr sz="1100" b="1" i="0">
+                <a:solidFill>
+                  <a:srgbClr val="FFFFFF"/>
+                </a:solidFill>
+                <a:latin typeface="Inter Tight"/>
+              </a:rPr>
+              <a:t>TEACHER PAGE  ·  skipped when you present  ·  Every student in the room</a:t>
+            </a:r>
+          </a:p>
+        </p:txBody>
+      </p:sp>
+      <p:sp>
+        <p:nvSpPr>
+          <p:cNvPr id="4" name="TextBox 3"/>
+          <p:cNvSpPr txBox="1"/>
+          <p:nvPr/>
+        </p:nvSpPr>
+        <p:spPr>
+          <a:xfrm>
+            <a:off x="548640" y="685800"/>
+            <a:ext cx="10972800" cy="640080"/>
+          </a:xfrm>
+          <a:prstGeom prst="rect">
+            <a:avLst/>
+          </a:prstGeom>
+          <a:noFill/>
+        </p:spPr>
+        <p:txBody>
+          <a:bodyPr wrap="square" anchor="t" lIns="0" rIns="0" tIns="0" bIns="0">
+            <a:spAutoFit/>
+          </a:bodyPr>
+          <a:lstStyle/>
+          <a:p>
+            <a:pPr algn="l">
+              <a:spcAft>
+                <a:spcPts val="1350"/>
+              </a:spcAft>
+            </a:pPr>
+            <a:r>
+              <a:rPr sz="3000" b="1" i="0">
+                <a:solidFill>
+                  <a:srgbClr val="1C1B19"/>
+                </a:solidFill>
+                <a:latin typeface="Source Serif 4"/>
+              </a:rPr>
+              <a:t>Every student in the room</a:t>
+            </a:r>
+          </a:p>
+        </p:txBody>
+      </p:sp>
+      <p:sp>
+        <p:nvSpPr>
+          <p:cNvPr id="5" name="TextBox 4"/>
+          <p:cNvSpPr txBox="1"/>
+          <p:nvPr/>
+        </p:nvSpPr>
+        <p:spPr>
+          <a:xfrm>
+            <a:off x="548640" y="1325880"/>
+            <a:ext cx="10972800" cy="365760"/>
+          </a:xfrm>
+          <a:prstGeom prst="rect">
+            <a:avLst/>
+          </a:prstGeom>
+          <a:noFill/>
+        </p:spPr>
+        <p:txBody>
+          <a:bodyPr wrap="square" anchor="t" lIns="0" rIns="0" tIns="0" bIns="0">
+            <a:spAutoFit/>
+          </a:bodyPr>
+          <a:lstStyle/>
+          <a:p>
+            <a:pPr algn="l">
+              <a:spcAft>
+                <a:spcPts val="630"/>
+              </a:spcAft>
+            </a:pPr>
+            <a:r>
+              <a:rPr sz="1400" b="0" i="0">
+                <a:solidFill>
+                  <a:srgbClr val="5D5A54"/>
+                </a:solidFill>
+                <a:latin typeface="Inter Tight"/>
+              </a:rPr>
+              <a:t>Culture, family, identity, ability and money: what to keep in mind for this topic.</a:t>
+            </a:r>
+          </a:p>
+        </p:txBody>
+      </p:sp>
+      <p:sp>
+        <p:nvSpPr>
+          <p:cNvPr id="6" name="TextBox 5"/>
+          <p:cNvSpPr txBox="1"/>
+          <p:nvPr/>
+        </p:nvSpPr>
+        <p:spPr>
+          <a:xfrm>
+            <a:off x="548640" y="1828800"/>
+            <a:ext cx="5394960" cy="4572000"/>
+          </a:xfrm>
+          <a:prstGeom prst="rect">
+            <a:avLst/>
+          </a:prstGeom>
+          <a:noFill/>
+        </p:spPr>
+        <p:txBody>
+          <a:bodyPr wrap="square" anchor="t" lIns="0" rIns="0" tIns="0" bIns="0">
+            <a:spAutoFit/>
+          </a:bodyPr>
+          <a:lstStyle/>
+          <a:p>
+            <a:pPr algn="l">
+              <a:spcAft>
+                <a:spcPts val="585"/>
+              </a:spcAft>
+            </a:pPr>
+            <a:r>
+              <a:rPr sz="1500" b="1" i="0">
+                <a:solidFill>
+                  <a:srgbClr val="1C1B19"/>
+                </a:solidFill>
+                <a:latin typeface="Source Serif 4"/>
+              </a:rPr>
+              <a:t>Families set different rules.</a:t>
+            </a:r>
+          </a:p>
+          <a:p>
+            <a:pPr algn="l">
+              <a:spcAft>
+                <a:spcPts val="585"/>
+              </a:spcAft>
+            </a:pPr>
+            <a:r>
+              <a:rPr sz="1300" b="0" i="0">
+                <a:solidFill>
+                  <a:srgbClr val="1C1B19"/>
+                </a:solidFill>
+                <a:latin typeface="Source Serif 4"/>
+              </a:rPr>
+              <a:t>Rides, curfews, sleepovers, and who students may spend time with vary from home to home. Name that openly and point to friendships that fit inside the rules: lunch, study groups, a program the family already trusts. "Make a specific plan" can be a plan at school.</a:t>
+            </a:r>
+          </a:p>
+          <a:p>
+            <a:pPr algn="l">
+              <a:spcAft>
+                <a:spcPts val="585"/>
+              </a:spcAft>
+            </a:pPr>
+            <a:r>
+              <a:rPr sz="1300" b="0" i="0">
+                <a:solidFill>
+                  <a:srgbClr val="1C1B19"/>
+                </a:solidFill>
+                <a:latin typeface="Source Serif 4"/>
+              </a:rPr>
+              <a:t/>
+            </a:r>
+          </a:p>
+          <a:p>
+            <a:pPr algn="l">
+              <a:spcAft>
+                <a:spcPts val="585"/>
+              </a:spcAft>
+            </a:pPr>
+            <a:r>
+              <a:rPr sz="1500" b="1" i="0">
+                <a:solidFill>
+                  <a:srgbClr val="1C1B19"/>
+                </a:solidFill>
+                <a:latin typeface="Source Serif 4"/>
+              </a:rPr>
+              <a:t>The adults at home vary too.</a:t>
+            </a:r>
+          </a:p>
+          <a:p>
+            <a:pPr algn="l">
+              <a:spcAft>
+                <a:spcPts val="585"/>
+              </a:spcAft>
+            </a:pPr>
+            <a:r>
+              <a:rPr sz="1300" b="0" i="0">
+                <a:solidFill>
+                  <a:srgbClr val="1C1B19"/>
+                </a:solidFill>
+                <a:latin typeface="Source Serif 4"/>
+              </a:rPr>
+              <a:t>Some students live with one parent, a grandparent, a foster family, or split weeks between two homes, which can cut into weekend time. Say "the adults at home" and let a plan be a lunch table or a study hall.</a:t>
+            </a:r>
+          </a:p>
+          <a:p>
+            <a:pPr algn="l">
+              <a:spcAft>
+                <a:spcPts val="585"/>
+              </a:spcAft>
+            </a:pPr>
+            <a:r>
+              <a:rPr sz="1300" b="0" i="0">
+                <a:solidFill>
+                  <a:srgbClr val="1C1B19"/>
+                </a:solidFill>
+                <a:latin typeface="Source Serif 4"/>
+              </a:rPr>
+              <a:t/>
+            </a:r>
+          </a:p>
+          <a:p>
+            <a:pPr algn="l">
+              <a:spcAft>
+                <a:spcPts val="585"/>
+              </a:spcAft>
+            </a:pPr>
+            <a:r>
+              <a:rPr sz="1500" b="1" i="0">
+                <a:solidFill>
+                  <a:srgbClr val="1C1B19"/>
+                </a:solidFill>
+                <a:latin typeface="Source Serif 4"/>
+              </a:rPr>
+              <a:t>LGBTQ+ students may find their people elsewhere.</a:t>
+            </a:r>
+          </a:p>
+          <a:p>
+            <a:pPr algn="l">
+              <a:spcAft>
+                <a:spcPts val="585"/>
+              </a:spcAft>
+            </a:pPr>
+            <a:r>
+              <a:rPr sz="1300" b="0" i="0">
+                <a:solidFill>
+                  <a:srgbClr val="1C1B19"/>
+                </a:solidFill>
+                <a:latin typeface="Source Serif 4"/>
+              </a:rPr>
+              <a:t>Some students don't see themselves reflected at school and build their closest friendships online or through outside groups. Treat those as real friendships, and keep the safety steps the same for everyone.</a:t>
+            </a:r>
+          </a:p>
+          <a:p>
+            <a:pPr algn="l">
+              <a:spcAft>
+                <a:spcPts val="585"/>
+              </a:spcAft>
+            </a:pPr>
+            <a:r>
+              <a:rPr sz="1300" b="0" i="0">
+                <a:solidFill>
+                  <a:srgbClr val="1C1B19"/>
+                </a:solidFill>
+                <a:latin typeface="Source Serif 4"/>
+              </a:rPr>
+              <a:t/>
+            </a:r>
+          </a:p>
+        </p:txBody>
+      </p:sp>
+      <p:sp>
+        <p:nvSpPr>
+          <p:cNvPr id="7" name="TextBox 6"/>
+          <p:cNvSpPr txBox="1"/>
+          <p:nvPr/>
+        </p:nvSpPr>
+        <p:spPr>
+          <a:xfrm>
+            <a:off x="6217920" y="1828800"/>
+            <a:ext cx="5394960" cy="4572000"/>
+          </a:xfrm>
+          <a:prstGeom prst="rect">
+            <a:avLst/>
+          </a:prstGeom>
+          <a:noFill/>
+        </p:spPr>
+        <p:txBody>
+          <a:bodyPr wrap="square" anchor="t" lIns="0" rIns="0" tIns="0" bIns="0">
+            <a:spAutoFit/>
+          </a:bodyPr>
+          <a:lstStyle/>
+          <a:p>
+            <a:pPr algn="l">
+              <a:spcAft>
+                <a:spcPts val="585"/>
+              </a:spcAft>
+            </a:pPr>
+            <a:r>
+              <a:rPr sz="1500" b="1" i="0">
+                <a:solidFill>
+                  <a:srgbClr val="1C1B19"/>
+                </a:solidFill>
+                <a:latin typeface="Source Serif 4"/>
+              </a:rPr>
+              <a:t>Small talk and eye contact come harder for some students.</a:t>
+            </a:r>
+          </a:p>
+          <a:p>
+            <a:pPr algn="l">
+              <a:spcAft>
+                <a:spcPts val="585"/>
+              </a:spcAft>
+            </a:pPr>
+            <a:r>
+              <a:rPr sz="1300" b="0" i="0">
+                <a:solidFill>
+                  <a:srgbClr val="1C1B19"/>
+                </a:solidFill>
+                <a:latin typeface="Source Serif 4"/>
+              </a:rPr>
+              <a:t>Autistic students and students with social anxiety may find the pair-share draining. Let them write their answer instead of saying it. Never treat speaking up or eye contact as the sign of a good friend. Social anxiety that keeps a student from things they want to do is worth a counselor's time.</a:t>
+            </a:r>
+          </a:p>
+          <a:p>
+            <a:pPr algn="l">
+              <a:spcAft>
+                <a:spcPts val="585"/>
+              </a:spcAft>
+            </a:pPr>
+            <a:r>
+              <a:rPr sz="1300" b="0" i="0">
+                <a:solidFill>
+                  <a:srgbClr val="1C1B19"/>
+                </a:solidFill>
+                <a:latin typeface="Source Serif 4"/>
+              </a:rPr>
+              <a:t/>
+            </a:r>
+          </a:p>
+          <a:p>
+            <a:pPr algn="l">
+              <a:spcAft>
+                <a:spcPts val="585"/>
+              </a:spcAft>
+            </a:pPr>
+            <a:r>
+              <a:rPr sz="1500" b="1" i="0">
+                <a:solidFill>
+                  <a:srgbClr val="1C1B19"/>
+                </a:solidFill>
+                <a:latin typeface="Source Serif 4"/>
+              </a:rPr>
+              <a:t>A repeat place doesn't have to cost money.</a:t>
+            </a:r>
+          </a:p>
+          <a:p>
+            <a:pPr algn="l">
+              <a:spcAft>
+                <a:spcPts val="585"/>
+              </a:spcAft>
+            </a:pPr>
+            <a:r>
+              <a:rPr sz="1300" b="0" i="0">
+                <a:solidFill>
+                  <a:srgbClr val="1C1B19"/>
+                </a:solidFill>
+                <a:latin typeface="Source Serif 4"/>
+              </a:rPr>
+              <a:t>Teams with fees, rides to practice, and food after the game assume money and time some students don't have. Point to free repeat places: a free club, the library, a volunteer shift, a youth group, a study group. Students who work or care for siblings at home are logging hours too.</a:t>
+            </a:r>
+          </a:p>
+          <a:p>
+            <a:pPr algn="l">
+              <a:spcAft>
+                <a:spcPts val="585"/>
+              </a:spcAft>
+            </a:pPr>
+            <a:r>
+              <a:rPr sz="1300" b="0" i="0">
+                <a:solidFill>
+                  <a:srgbClr val="1C1B19"/>
+                </a:solidFill>
+                <a:latin typeface="Source Serif 4"/>
+              </a:rPr>
+              <a:t/>
+            </a:r>
+          </a:p>
+          <a:p>
+            <a:pPr algn="l">
+              <a:spcAft>
+                <a:spcPts val="585"/>
+              </a:spcAft>
+            </a:pPr>
+            <a:r>
+              <a:rPr sz="1500" b="1" i="0">
+                <a:solidFill>
+                  <a:srgbClr val="1C1B19"/>
+                </a:solidFill>
+                <a:latin typeface="Source Serif 4"/>
+              </a:rPr>
+              <a:t>Faith and language communities count.</a:t>
+            </a:r>
+          </a:p>
+          <a:p>
+            <a:pPr algn="l">
+              <a:spcAft>
+                <a:spcPts val="585"/>
+              </a:spcAft>
+            </a:pPr>
+            <a:r>
+              <a:rPr sz="1300" b="0" i="0">
+                <a:solidFill>
+                  <a:srgbClr val="1C1B19"/>
+                </a:solidFill>
+                <a:latin typeface="Source Serif 4"/>
+              </a:rPr>
+              <a:t>For some students the people who matter most are at a mosque, church, temple, or other faith community; for others there are none. Some students new to the country keep their closest friends online in their first language. All of those count as their people.</a:t>
+            </a:r>
+          </a:p>
+          <a:p>
+            <a:pPr algn="l">
+              <a:spcAft>
+                <a:spcPts val="585"/>
+              </a:spcAft>
+            </a:pPr>
+            <a:r>
+              <a:rPr sz="1300" b="0" i="0">
+                <a:solidFill>
+                  <a:srgbClr val="1C1B19"/>
+                </a:solidFill>
+                <a:latin typeface="Source Serif 4"/>
+              </a:rPr>
+              <a:t/>
+            </a:r>
+          </a:p>
+        </p:txBody>
+      </p:sp>
+    </p:spTree>
+  </p:cSld>
+  <p:clrMapOvr>
+    <a:masterClrMapping/>
+  </p:clrMapOvr>
+</p:sld>
+</file>
+
+<file path=ppt/slides/slide15.xml><?xml version="1.0" encoding="utf-8"?>
+<p:sld xmlns:a="http://schemas.openxmlformats.org/drawingml/2006/main" xmlns:p="http://schemas.openxmlformats.org/presentationml/2006/main" xmlns:r="http://schemas.openxmlformats.org/officeDocument/2006/relationships" show="0">
+  <p:cSld>
+    <p:bg>
+      <p:bgPr>
+        <a:solidFill>
+          <a:srgbClr val="EEEBE4"/>
+        </a:solidFill>
+        <a:effectLst/>
+      </p:bgPr>
+    </p:bg>
+    <p:spTree>
+      <p:nvGrpSpPr>
+        <p:cNvPr id="1" name=""/>
+        <p:cNvGrpSpPr/>
+        <p:nvPr/>
+      </p:nvGrpSpPr>
+      <p:grpSpPr/>
+      <p:sp>
+        <p:nvSpPr>
+          <p:cNvPr id="2" name="Rectangle 1"/>
+          <p:cNvSpPr/>
+          <p:nvPr/>
+        </p:nvSpPr>
+        <p:spPr>
+          <a:xfrm>
+            <a:off x="0" y="0"/>
+            <a:ext cx="12191695" cy="384048"/>
+          </a:xfrm>
+          <a:prstGeom prst="rect">
+            <a:avLst/>
+          </a:prstGeom>
+          <a:solidFill>
+            <a:srgbClr val="0B2D5B"/>
+          </a:solidFill>
+          <a:ln>
+            <a:noFill/>
+          </a:ln>
+          <a:effectLst/>
+        </p:spPr>
+        <p:style>
+          <a:lnRef idx="1">
+            <a:schemeClr val="accent1"/>
+          </a:lnRef>
+          <a:fillRef idx="3">
+            <a:schemeClr val="accent1"/>
+          </a:fillRef>
+          <a:effectRef idx="2">
+            <a:schemeClr val="accent1"/>
+          </a:effectRef>
+          <a:fontRef idx="minor">
+            <a:schemeClr val="lt1"/>
+          </a:fontRef>
+        </p:style>
+        <p:txBody>
+          <a:bodyPr rtlCol="0" anchor="ctr"/>
+          <a:lstStyle/>
+          <a:p>
+            <a:pPr algn="ctr"/>
+          </a:p>
+        </p:txBody>
+      </p:sp>
+      <p:sp>
+        <p:nvSpPr>
+          <p:cNvPr id="3" name="TextBox 2"/>
+          <p:cNvSpPr txBox="1"/>
+          <p:nvPr/>
+        </p:nvSpPr>
+        <p:spPr>
+          <a:xfrm>
+            <a:off x="548640" y="100584"/>
+            <a:ext cx="10972800" cy="274320"/>
+          </a:xfrm>
+          <a:prstGeom prst="rect">
+            <a:avLst/>
+          </a:prstGeom>
+          <a:noFill/>
+        </p:spPr>
+        <p:txBody>
+          <a:bodyPr wrap="square" anchor="t" lIns="0" rIns="0" tIns="0" bIns="0">
+            <a:spAutoFit/>
+          </a:bodyPr>
+          <a:lstStyle/>
+          <a:p>
+            <a:pPr algn="l">
+              <a:spcAft>
+                <a:spcPts val="495"/>
+              </a:spcAft>
+            </a:pPr>
+            <a:r>
+              <a:rPr sz="1100" b="1" i="0">
+                <a:solidFill>
+                  <a:srgbClr val="FFFFFF"/>
+                </a:solidFill>
+                <a:latin typeface="Inter Tight"/>
+              </a:rPr>
+              <a:t>TEACHER PAGE  ·  skipped when you present  ·  Background</a:t>
+            </a:r>
+          </a:p>
+        </p:txBody>
+      </p:sp>
+      <p:sp>
+        <p:nvSpPr>
+          <p:cNvPr id="4" name="TextBox 3"/>
+          <p:cNvSpPr txBox="1"/>
+          <p:nvPr/>
+        </p:nvSpPr>
+        <p:spPr>
+          <a:xfrm>
+            <a:off x="548640" y="685800"/>
+            <a:ext cx="10972800" cy="640080"/>
+          </a:xfrm>
+          <a:prstGeom prst="rect">
+            <a:avLst/>
+          </a:prstGeom>
+          <a:noFill/>
+        </p:spPr>
+        <p:txBody>
+          <a:bodyPr wrap="square" anchor="t" lIns="0" rIns="0" tIns="0" bIns="0">
+            <a:spAutoFit/>
+          </a:bodyPr>
+          <a:lstStyle/>
+          <a:p>
+            <a:pPr algn="l">
+              <a:spcAft>
+                <a:spcPts val="1350"/>
+              </a:spcAft>
+            </a:pPr>
+            <a:r>
+              <a:rPr sz="3000" b="1" i="0">
+                <a:solidFill>
+                  <a:srgbClr val="1C1B19"/>
+                </a:solidFill>
+                <a:latin typeface="Source Serif 4"/>
+              </a:rPr>
+              <a:t>What the research says</a:t>
+            </a:r>
+          </a:p>
+        </p:txBody>
+      </p:sp>
+      <p:sp>
+        <p:nvSpPr>
+          <p:cNvPr id="5" name="TextBox 4"/>
+          <p:cNvSpPr txBox="1"/>
+          <p:nvPr/>
+        </p:nvSpPr>
+        <p:spPr>
+          <a:xfrm>
+            <a:off x="548640" y="1463040"/>
+            <a:ext cx="5394960" cy="4937760"/>
+          </a:xfrm>
+          <a:prstGeom prst="rect">
+            <a:avLst/>
+          </a:prstGeom>
+          <a:noFill/>
+        </p:spPr>
+        <p:txBody>
+          <a:bodyPr wrap="square" anchor="t" lIns="0" rIns="0" tIns="0" bIns="0">
+            <a:spAutoFit/>
+          </a:bodyPr>
+          <a:lstStyle/>
+          <a:p>
+            <a:pPr algn="l">
+              <a:spcAft>
+                <a:spcPts val="585"/>
+              </a:spcAft>
+            </a:pPr>
+            <a:r>
+              <a:rPr sz="1300" b="0" i="0">
+                <a:solidFill>
+                  <a:srgbClr val="1C1B19"/>
+                </a:solidFill>
+                <a:latin typeface="Source Serif 4"/>
+              </a:rPr>
+              <a:t>Adults who had just moved and college first-years took about 50 hours together to become casual friends, about 90 to become friends, and over 200 to become close friends. Estimates vary a lot by person.</a:t>
+            </a:r>
+          </a:p>
+          <a:p>
+            <a:pPr algn="l">
+              <a:spcAft>
+                <a:spcPts val="585"/>
+              </a:spcAft>
+            </a:pPr>
+            <a:r>
+              <a:rPr sz="1050" b="0" i="0">
+                <a:solidFill>
+                  <a:srgbClr val="5D5A54"/>
+                </a:solidFill>
+                <a:latin typeface="Inter Tight"/>
+              </a:rPr>
+              <a:t>Hall, Journal of Social and Personal Relationships, 2019</a:t>
+            </a:r>
+          </a:p>
+          <a:p>
+            <a:pPr algn="l">
+              <a:spcAft>
+                <a:spcPts val="585"/>
+              </a:spcAft>
+            </a:pPr>
+            <a:r>
+              <a:rPr sz="1300" b="0" i="0">
+                <a:solidFill>
+                  <a:srgbClr val="1C1B19"/>
+                </a:solidFill>
+                <a:latin typeface="Source Serif 4"/>
+              </a:rPr>
+              <a:t>University students randomly assigned seats on the first day were more likely to be friends a year later with the people who sat next to them or in the same row.</a:t>
+            </a:r>
+          </a:p>
+          <a:p>
+            <a:pPr algn="l">
+              <a:spcAft>
+                <a:spcPts val="585"/>
+              </a:spcAft>
+            </a:pPr>
+            <a:r>
+              <a:rPr sz="1050" b="0" i="0">
+                <a:solidFill>
+                  <a:srgbClr val="5D5A54"/>
+                </a:solidFill>
+                <a:latin typeface="Inter Tight"/>
+              </a:rPr>
+              <a:t>Back, Schmukle and Egloff, Psychological Science, 2008</a:t>
+            </a:r>
+          </a:p>
+          <a:p>
+            <a:pPr algn="l">
+              <a:spcAft>
+                <a:spcPts val="585"/>
+              </a:spcAft>
+            </a:pPr>
+            <a:r>
+              <a:rPr sz="1300" b="0" i="0">
+                <a:solidFill>
+                  <a:srgbClr val="1C1B19"/>
+                </a:solidFill>
+                <a:latin typeface="Source Serif 4"/>
+              </a:rPr>
+              <a:t>Across five studies, people who had just talked with someone new underestimated how much the other person liked them. Among college roommates, the gap lasted most of the school year.</a:t>
+            </a:r>
+          </a:p>
+          <a:p>
+            <a:pPr algn="l">
+              <a:spcAft>
+                <a:spcPts val="585"/>
+              </a:spcAft>
+            </a:pPr>
+            <a:r>
+              <a:rPr sz="1050" b="0" i="0">
+                <a:solidFill>
+                  <a:srgbClr val="5D5A54"/>
+                </a:solidFill>
+                <a:latin typeface="Inter Tight"/>
+              </a:rPr>
+              <a:t>Boothby et al., Psychological Science, 2018</a:t>
+            </a:r>
+          </a:p>
+        </p:txBody>
+      </p:sp>
+      <p:sp>
+        <p:nvSpPr>
+          <p:cNvPr id="6" name="TextBox 5"/>
+          <p:cNvSpPr txBox="1"/>
+          <p:nvPr/>
+        </p:nvSpPr>
+        <p:spPr>
+          <a:xfrm>
+            <a:off x="6217920" y="1463040"/>
+            <a:ext cx="5394960" cy="4937760"/>
+          </a:xfrm>
+          <a:prstGeom prst="rect">
+            <a:avLst/>
+          </a:prstGeom>
+          <a:noFill/>
+        </p:spPr>
+        <p:txBody>
+          <a:bodyPr wrap="square" anchor="t" lIns="0" rIns="0" tIns="0" bIns="0">
+            <a:spAutoFit/>
+          </a:bodyPr>
+          <a:lstStyle/>
+          <a:p>
+            <a:pPr algn="l">
+              <a:spcAft>
+                <a:spcPts val="585"/>
+              </a:spcAft>
+            </a:pPr>
+            <a:r>
+              <a:rPr sz="1300" b="0" i="0">
+                <a:solidFill>
+                  <a:srgbClr val="1C1B19"/>
+                </a:solidFill>
+                <a:latin typeface="Source Serif 4"/>
+              </a:rPr>
+              <a:t>Strangers asked to talk about meaningful things found it less awkward and more connecting than they expected. People assume others only want small talk.</a:t>
+            </a:r>
+          </a:p>
+          <a:p>
+            <a:pPr algn="l">
+              <a:spcAft>
+                <a:spcPts val="585"/>
+              </a:spcAft>
+            </a:pPr>
+            <a:r>
+              <a:rPr sz="1050" b="0" i="0">
+                <a:solidFill>
+                  <a:srgbClr val="5D5A54"/>
+                </a:solidFill>
+                <a:latin typeface="Inter Tight"/>
+              </a:rPr>
+              <a:t>Kardas, Kumar and Epley, Journal of Personality and Social Psychology, 2022</a:t>
+            </a:r>
+          </a:p>
+          <a:p>
+            <a:pPr algn="l">
+              <a:spcAft>
+                <a:spcPts val="585"/>
+              </a:spcAft>
+            </a:pPr>
+            <a:r>
+              <a:rPr sz="1300" b="0" i="0">
+                <a:solidFill>
+                  <a:srgbClr val="1C1B19"/>
+                </a:solidFill>
+                <a:latin typeface="Source Serif 4"/>
+              </a:rPr>
+              <a:t>169 teens followed from 15 to 25: a strong close friendship at 15 predicted more self-worth and less anxiety and depression by the mid-20s. Being popular with the broader group did not, and went with more social anxiety later. One study, a link and not proof of cause.</a:t>
+            </a:r>
+          </a:p>
+          <a:p>
+            <a:pPr algn="l">
+              <a:spcAft>
+                <a:spcPts val="585"/>
+              </a:spcAft>
+            </a:pPr>
+            <a:r>
+              <a:rPr sz="1050" b="0" i="0">
+                <a:solidFill>
+                  <a:srgbClr val="5D5A54"/>
+                </a:solidFill>
+                <a:latin typeface="Inter Tight"/>
+              </a:rPr>
+              <a:t>Narr et al., Child Development, 2019 (University of Virginia)</a:t>
+            </a:r>
+          </a:p>
+          <a:p>
+            <a:pPr algn="l">
+              <a:spcAft>
+                <a:spcPts val="585"/>
+              </a:spcAft>
+            </a:pPr>
+            <a:r>
+              <a:rPr sz="1300" b="0" i="0">
+                <a:solidFill>
+                  <a:srgbClr val="1C1B19"/>
+                </a:solidFill>
+                <a:latin typeface="Source Serif 4"/>
+              </a:rPr>
+              <a:t>Young people's time spent in person with friends dropped by nearly 70% over about two decades.</a:t>
+            </a:r>
+          </a:p>
+          <a:p>
+            <a:pPr algn="l">
+              <a:spcAft>
+                <a:spcPts val="585"/>
+              </a:spcAft>
+            </a:pPr>
+            <a:r>
+              <a:rPr sz="1050" b="0" i="0">
+                <a:solidFill>
+                  <a:srgbClr val="5D5A54"/>
+                </a:solidFill>
+                <a:latin typeface="Inter Tight"/>
+              </a:rPr>
+              <a:t>U.S. Surgeon General's Advisory on Loneliness and Isolation, 2023</a:t>
+            </a:r>
+          </a:p>
+        </p:txBody>
+      </p:sp>
+    </p:spTree>
+  </p:cSld>
+  <p:clrMapOvr>
+    <a:masterClrMapping/>
+  </p:clrMapOvr>
+</p:sld>
+</file>
+
+<file path=ppt/slides/slide2.xml><?xml version="1.0" encoding="utf-8"?>
+<p:sld xmlns:a="http://schemas.openxmlformats.org/drawingml/2006/main" xmlns:p="http://schemas.openxmlformats.org/presentationml/2006/main" xmlns:r="http://schemas.openxmlformats.org/officeDocument/2006/relationships">
+  <p:cSld>
+    <p:bg>
+      <p:bgPr>
+        <a:solidFill>
+          <a:srgbClr val="0B2D5B"/>
+        </a:solidFill>
+        <a:effectLst/>
+      </p:bgPr>
+    </p:bg>
+    <p:spTree>
+      <p:nvGrpSpPr>
+        <p:cNvPr id="1" name=""/>
+        <p:cNvGrpSpPr/>
+        <p:nvPr/>
+      </p:nvGrpSpPr>
+      <p:grpSpPr/>
+      <p:sp>
+        <p:nvSpPr>
+          <p:cNvPr id="2" name="Rectangle 1"/>
+          <p:cNvSpPr/>
+          <p:nvPr/>
+        </p:nvSpPr>
+        <p:spPr>
+          <a:xfrm>
+            <a:off x="548640" y="502920"/>
+            <a:ext cx="457200" cy="54864"/>
+          </a:xfrm>
+          <a:prstGeom prst="rect">
+            <a:avLst/>
+          </a:prstGeom>
+          <a:solidFill>
+            <a:srgbClr val="F47B20"/>
+          </a:solidFill>
+          <a:ln>
+            <a:noFill/>
+          </a:ln>
+          <a:effectLst/>
+        </p:spPr>
+        <p:style>
+          <a:lnRef idx="1">
+            <a:schemeClr val="accent1"/>
+          </a:lnRef>
+          <a:fillRef idx="3">
+            <a:schemeClr val="accent1"/>
+          </a:fillRef>
+          <a:effectRef idx="2">
+            <a:schemeClr val="accent1"/>
+          </a:effectRef>
+          <a:fontRef idx="minor">
+            <a:schemeClr val="lt1"/>
+          </a:fontRef>
+        </p:style>
+        <p:txBody>
+          <a:bodyPr rtlCol="0" anchor="ctr"/>
+          <a:lstStyle/>
+          <a:p>
+            <a:pPr algn="ctr"/>
+          </a:p>
+        </p:txBody>
+      </p:sp>
+      <p:sp>
+        <p:nvSpPr>
+          <p:cNvPr id="3" name="TextBox 2"/>
+          <p:cNvSpPr txBox="1"/>
+          <p:nvPr/>
+        </p:nvSpPr>
+        <p:spPr>
+          <a:xfrm>
+            <a:off x="1143000" y="393192"/>
+            <a:ext cx="8229600" cy="274320"/>
+          </a:xfrm>
+          <a:prstGeom prst="rect">
+            <a:avLst/>
+          </a:prstGeom>
+          <a:noFill/>
+        </p:spPr>
+        <p:txBody>
+          <a:bodyPr wrap="square" anchor="t" lIns="0" rIns="0" tIns="0" bIns="0">
+            <a:spAutoFit/>
+          </a:bodyPr>
+          <a:lstStyle/>
+          <a:p>
+            <a:pPr algn="l">
+              <a:spcAft>
+                <a:spcPts val="540"/>
+              </a:spcAft>
+            </a:pPr>
+            <a:r>
+              <a:rPr sz="1200" b="1" i="0">
+                <a:solidFill>
+                  <a:srgbClr val="5D5A54"/>
+                </a:solidFill>
+                <a:latin typeface="Inter Tight"/>
+              </a:rPr>
+              <a:t>FINDING YOUR PEOPLE</a:t>
+            </a:r>
+          </a:p>
+        </p:txBody>
+      </p:sp>
+      <p:sp>
+        <p:nvSpPr>
+          <p:cNvPr id="4" name="TextBox 3"/>
+          <p:cNvSpPr txBox="1"/>
+          <p:nvPr/>
+        </p:nvSpPr>
+        <p:spPr>
+          <a:xfrm>
+            <a:off x="8229600" y="6400800"/>
+            <a:ext cx="3410712" cy="274320"/>
+          </a:xfrm>
+          <a:prstGeom prst="rect">
+            <a:avLst/>
+          </a:prstGeom>
+          <a:noFill/>
+        </p:spPr>
+        <p:txBody>
+          <a:bodyPr wrap="square" anchor="t" lIns="0" rIns="0" tIns="0" bIns="0">
+            <a:spAutoFit/>
+          </a:bodyPr>
+          <a:lstStyle/>
+          <a:p>
+            <a:pPr algn="r">
+              <a:spcAft>
+                <a:spcPts val="450"/>
+              </a:spcAft>
+            </a:pPr>
+            <a:r>
+              <a:rPr sz="1000" b="0" i="0">
+                <a:solidFill>
+                  <a:srgbClr val="5D5A54"/>
+                </a:solidFill>
+                <a:latin typeface="Inter Tight"/>
+              </a:rPr>
+              <a:t>Beaver Counseling</a:t>
+            </a:r>
+          </a:p>
+        </p:txBody>
+      </p:sp>
+      <p:sp>
+        <p:nvSpPr>
+          <p:cNvPr id="5" name="TextBox 4"/>
+          <p:cNvSpPr txBox="1"/>
+          <p:nvPr/>
+        </p:nvSpPr>
+        <p:spPr>
+          <a:xfrm>
+            <a:off x="822960" y="2011680"/>
+            <a:ext cx="10515600" cy="1463040"/>
+          </a:xfrm>
+          <a:prstGeom prst="rect">
+            <a:avLst/>
+          </a:prstGeom>
+          <a:noFill/>
+        </p:spPr>
+        <p:txBody>
+          <a:bodyPr wrap="square" anchor="b" lIns="0" rIns="0" tIns="0" bIns="0">
+            <a:spAutoFit/>
+          </a:bodyPr>
+          <a:lstStyle/>
+          <a:p>
+            <a:pPr algn="l">
+              <a:spcAft>
+                <a:spcPts val="2700"/>
+              </a:spcAft>
+            </a:pPr>
+            <a:r>
+              <a:rPr sz="6000" b="1" i="0">
+                <a:solidFill>
+                  <a:srgbClr val="FFFFFF"/>
+                </a:solidFill>
+                <a:latin typeface="Source Serif 4"/>
+              </a:rPr>
+              <a:t>Finding Your People</a:t>
+            </a:r>
+          </a:p>
+        </p:txBody>
+      </p:sp>
+      <p:sp>
+        <p:nvSpPr>
+          <p:cNvPr id="6" name="TextBox 5"/>
+          <p:cNvSpPr txBox="1"/>
+          <p:nvPr/>
+        </p:nvSpPr>
+        <p:spPr>
+          <a:xfrm>
+            <a:off x="822960" y="3611880"/>
+            <a:ext cx="10515600" cy="914400"/>
+          </a:xfrm>
+          <a:prstGeom prst="rect">
+            <a:avLst/>
+          </a:prstGeom>
+          <a:noFill/>
+        </p:spPr>
+        <p:txBody>
+          <a:bodyPr wrap="square" anchor="t" lIns="0" rIns="0" tIns="0" bIns="0">
+            <a:spAutoFit/>
+          </a:bodyPr>
+          <a:lstStyle/>
+          <a:p>
+            <a:pPr algn="l">
+              <a:spcAft>
+                <a:spcPts val="1080"/>
+              </a:spcAft>
+            </a:pPr>
+            <a:r>
+              <a:rPr sz="2400" b="0" i="1">
+                <a:solidFill>
+                  <a:srgbClr val="E8E4DA"/>
+                </a:solidFill>
+                <a:latin typeface="Source Serif 4"/>
+              </a:rPr>
+              <a:t>Where you fit, and how long it takes.</a:t>
+            </a:r>
+          </a:p>
+        </p:txBody>
+      </p:sp>
+      <p:sp>
+        <p:nvSpPr>
+          <p:cNvPr id="7" name="TextBox 6"/>
+          <p:cNvSpPr txBox="1"/>
+          <p:nvPr/>
+        </p:nvSpPr>
+        <p:spPr>
+          <a:xfrm>
+            <a:off x="822960" y="6035040"/>
+            <a:ext cx="7315200" cy="365760"/>
+          </a:xfrm>
+          <a:prstGeom prst="rect">
+            <a:avLst/>
+          </a:prstGeom>
+          <a:noFill/>
+        </p:spPr>
+        <p:txBody>
+          <a:bodyPr wrap="square" anchor="t" lIns="0" rIns="0" tIns="0" bIns="0">
+            <a:spAutoFit/>
+          </a:bodyPr>
+          <a:lstStyle/>
+          <a:p>
+            <a:pPr algn="l">
+              <a:spcAft>
+                <a:spcPts val="585"/>
+              </a:spcAft>
+            </a:pPr>
+            <a:r>
+              <a:rPr sz="1300" b="0" i="0">
+                <a:solidFill>
+                  <a:srgbClr val="E8E4DA"/>
+                </a:solidFill>
+                <a:latin typeface="Inter Tight"/>
+              </a:rPr>
+              <a:t>Beaver Upper School · Counseling</a:t>
+            </a:r>
+          </a:p>
+        </p:txBody>
+      </p:sp>
+    </p:spTree>
+  </p:cSld>
+  <p:clrMapOvr>
+    <a:masterClrMapping/>
+  </p:clrMapOvr>
+</p:sld>
+</file>
+
+<file path=ppt/slides/slide3.xml><?xml version="1.0" encoding="utf-8"?>
 <p:sld xmlns:a="http://schemas.openxmlformats.org/drawingml/2006/main" xmlns:p="http://schemas.openxmlformats.org/presentationml/2006/main" xmlns:r="http://schemas.openxmlformats.org/officeDocument/2006/relationships">
   <p:cSld>
     <p:bg>
@@ -5692,7 +7574,7 @@
                 </a:solidFill>
                 <a:latin typeface="Inter Tight"/>
               </a:rPr>
-              <a:t>THREE MOMENTS</a:t>
+              <a:t>MYTH OR FACT?</a:t>
             </a:r>
           </a:p>
         </p:txBody>
@@ -5745,7 +7627,7 @@
         <p:spPr>
           <a:xfrm>
             <a:off x="822960" y="1005840"/>
-            <a:ext cx="10515600" cy="914400"/>
+            <a:ext cx="10515600" cy="1097280"/>
           </a:xfrm>
           <a:prstGeom prst="rect">
             <a:avLst/>
@@ -5760,77 +7642,31 @@
           <a:p>
             <a:pPr algn="l">
               <a:spcAft>
-                <a:spcPts val="1530"/>
-              </a:spcAft>
-            </a:pPr>
-            <a:r>
-              <a:rPr sz="3400" b="1" i="0">
+                <a:spcPts val="1620"/>
+              </a:spcAft>
+            </a:pPr>
+            <a:r>
+              <a:rPr sz="3600" b="1" i="0">
                 <a:solidFill>
                   <a:srgbClr val="1C1B19"/>
                 </a:solidFill>
                 <a:latin typeface="Source Serif 4"/>
               </a:rPr>
-              <a:t>What's the next move?</a:t>
-            </a:r>
-          </a:p>
-        </p:txBody>
-      </p:sp>
-      <p:sp>
-        <p:nvSpPr>
-          <p:cNvPr id="6" name="Rectangle 5"/>
-          <p:cNvSpPr/>
-          <p:nvPr/>
-        </p:nvSpPr>
-        <p:spPr>
-          <a:xfrm>
-            <a:off x="822960" y="2103120"/>
-            <a:ext cx="3322320" cy="3840480"/>
-          </a:xfrm>
-          <a:prstGeom prst="rect">
-            <a:avLst/>
-          </a:prstGeom>
-          <a:solidFill>
-            <a:srgbClr val="FFFFFF"/>
-          </a:solidFill>
-          <a:ln w="15875">
-            <a:solidFill>
-              <a:srgbClr val="D8D2C6"/>
-            </a:solidFill>
-          </a:ln>
-          <a:effectLst/>
-        </p:spPr>
-        <p:style>
-          <a:lnRef idx="1">
-            <a:schemeClr val="accent1"/>
-          </a:lnRef>
-          <a:fillRef idx="3">
-            <a:schemeClr val="accent1"/>
-          </a:fillRef>
-          <a:effectRef idx="2">
-            <a:schemeClr val="accent1"/>
-          </a:effectRef>
-          <a:fontRef idx="minor">
-            <a:schemeClr val="lt1"/>
-          </a:fontRef>
-        </p:style>
-        <p:txBody>
-          <a:bodyPr rtlCol="0" anchor="ctr"/>
-          <a:lstStyle/>
-          <a:p>
-            <a:pPr algn="ctr"/>
-          </a:p>
-        </p:txBody>
-      </p:sp>
-      <p:sp>
-        <p:nvSpPr>
-          <p:cNvPr id="7" name="TextBox 6"/>
+              <a:t>Stand up if you think it's a fact.</a:t>
+            </a:r>
+          </a:p>
+        </p:txBody>
+      </p:sp>
+      <p:sp>
+        <p:nvSpPr>
+          <p:cNvPr id="6" name="TextBox 5"/>
           <p:cNvSpPr txBox="1"/>
           <p:nvPr/>
         </p:nvSpPr>
         <p:spPr>
           <a:xfrm>
-            <a:off x="1051560" y="2286000"/>
-            <a:ext cx="2865120" cy="365760"/>
+            <a:off x="822960" y="2057400"/>
+            <a:ext cx="548640" cy="804672"/>
           </a:xfrm>
           <a:prstGeom prst="rect">
             <a:avLst/>
@@ -5845,31 +7681,31 @@
           <a:p>
             <a:pPr algn="l">
               <a:spcAft>
-                <a:spcPts val="585"/>
-              </a:spcAft>
-            </a:pPr>
-            <a:r>
-              <a:rPr sz="1300" b="1" i="0">
-                <a:solidFill>
-                  <a:srgbClr val="0B2D5B"/>
-                </a:solidFill>
-                <a:latin typeface="Inter Tight"/>
-              </a:rPr>
-              <a:t>AMARA</a:t>
-            </a:r>
-          </a:p>
-        </p:txBody>
-      </p:sp>
-      <p:sp>
-        <p:nvSpPr>
-          <p:cNvPr id="8" name="TextBox 7"/>
+                <a:spcPts val="1170"/>
+              </a:spcAft>
+            </a:pPr>
+            <a:r>
+              <a:rPr sz="2600" b="1" i="0">
+                <a:solidFill>
+                  <a:srgbClr val="F47B20"/>
+                </a:solidFill>
+                <a:latin typeface="Source Serif 4"/>
+              </a:rPr>
+              <a:t>1</a:t>
+            </a:r>
+          </a:p>
+        </p:txBody>
+      </p:sp>
+      <p:sp>
+        <p:nvSpPr>
+          <p:cNvPr id="7" name="TextBox 6"/>
           <p:cNvSpPr txBox="1"/>
           <p:nvPr/>
         </p:nvSpPr>
         <p:spPr>
           <a:xfrm>
-            <a:off x="1051560" y="2743200"/>
-            <a:ext cx="2865120" cy="3017520"/>
+            <a:off x="1463040" y="2093976"/>
+            <a:ext cx="9875520" cy="804672"/>
           </a:xfrm>
           <a:prstGeom prst="rect">
             <a:avLst/>
@@ -5884,77 +7720,31 @@
           <a:p>
             <a:pPr algn="l">
               <a:spcAft>
-                <a:spcPts val="810"/>
-              </a:spcAft>
-            </a:pPr>
-            <a:r>
-              <a:rPr sz="1800" b="0" i="0">
+                <a:spcPts val="945"/>
+              </a:spcAft>
+            </a:pPr>
+            <a:r>
+              <a:rPr sz="2100" b="1" i="0">
                 <a:solidFill>
                   <a:srgbClr val="1C1B19"/>
                 </a:solidFill>
                 <a:latin typeface="Source Serif 4"/>
               </a:rPr>
-              <a:t>Moved here this summer with her grandmother. She and her lab partner Diego joke every class, and that's it.</a:t>
-            </a:r>
-          </a:p>
-        </p:txBody>
-      </p:sp>
-      <p:sp>
-        <p:nvSpPr>
-          <p:cNvPr id="9" name="Rectangle 8"/>
-          <p:cNvSpPr/>
-          <p:nvPr/>
-        </p:nvSpPr>
-        <p:spPr>
-          <a:xfrm>
-            <a:off x="4419600" y="2103120"/>
-            <a:ext cx="3322320" cy="3840480"/>
-          </a:xfrm>
-          <a:prstGeom prst="rect">
-            <a:avLst/>
-          </a:prstGeom>
-          <a:solidFill>
-            <a:srgbClr val="FFFFFF"/>
-          </a:solidFill>
-          <a:ln w="15875">
-            <a:solidFill>
-              <a:srgbClr val="D8D2C6"/>
-            </a:solidFill>
-          </a:ln>
-          <a:effectLst/>
-        </p:spPr>
-        <p:style>
-          <a:lnRef idx="1">
-            <a:schemeClr val="accent1"/>
-          </a:lnRef>
-          <a:fillRef idx="3">
-            <a:schemeClr val="accent1"/>
-          </a:fillRef>
-          <a:effectRef idx="2">
-            <a:schemeClr val="accent1"/>
-          </a:effectRef>
-          <a:fontRef idx="minor">
-            <a:schemeClr val="lt1"/>
-          </a:fontRef>
-        </p:style>
-        <p:txBody>
-          <a:bodyPr rtlCol="0" anchor="ctr"/>
-          <a:lstStyle/>
-          <a:p>
-            <a:pPr algn="ctr"/>
-          </a:p>
-        </p:txBody>
-      </p:sp>
-      <p:sp>
-        <p:nvSpPr>
-          <p:cNvPr id="10" name="TextBox 9"/>
+              <a:t>Friendship either clicks or it doesn't.</a:t>
+            </a:r>
+          </a:p>
+        </p:txBody>
+      </p:sp>
+      <p:sp>
+        <p:nvSpPr>
+          <p:cNvPr id="8" name="TextBox 7"/>
           <p:cNvSpPr txBox="1"/>
           <p:nvPr/>
         </p:nvSpPr>
         <p:spPr>
           <a:xfrm>
-            <a:off x="4648200" y="2286000"/>
-            <a:ext cx="2865120" cy="365760"/>
+            <a:off x="822960" y="2862072"/>
+            <a:ext cx="548640" cy="804672"/>
           </a:xfrm>
           <a:prstGeom prst="rect">
             <a:avLst/>
@@ -5969,31 +7759,31 @@
           <a:p>
             <a:pPr algn="l">
               <a:spcAft>
-                <a:spcPts val="585"/>
-              </a:spcAft>
-            </a:pPr>
-            <a:r>
-              <a:rPr sz="1300" b="1" i="0">
-                <a:solidFill>
-                  <a:srgbClr val="0B2D5B"/>
-                </a:solidFill>
-                <a:latin typeface="Inter Tight"/>
-              </a:rPr>
-              <a:t>KENJI</a:t>
-            </a:r>
-          </a:p>
-        </p:txBody>
-      </p:sp>
-      <p:sp>
-        <p:nvSpPr>
-          <p:cNvPr id="11" name="TextBox 10"/>
+                <a:spcPts val="1170"/>
+              </a:spcAft>
+            </a:pPr>
+            <a:r>
+              <a:rPr sz="2600" b="1" i="0">
+                <a:solidFill>
+                  <a:srgbClr val="F47B20"/>
+                </a:solidFill>
+                <a:latin typeface="Source Serif 4"/>
+              </a:rPr>
+              <a:t>2</a:t>
+            </a:r>
+          </a:p>
+        </p:txBody>
+      </p:sp>
+      <p:sp>
+        <p:nvSpPr>
+          <p:cNvPr id="9" name="TextBox 8"/>
           <p:cNvSpPr txBox="1"/>
           <p:nvPr/>
         </p:nvSpPr>
         <p:spPr>
           <a:xfrm>
-            <a:off x="4648200" y="2743200"/>
-            <a:ext cx="2865120" cy="3017520"/>
+            <a:off x="1463040" y="2898648"/>
+            <a:ext cx="9875520" cy="804672"/>
           </a:xfrm>
           <a:prstGeom prst="rect">
             <a:avLst/>
@@ -6008,77 +7798,31 @@
           <a:p>
             <a:pPr algn="l">
               <a:spcAft>
-                <a:spcPts val="810"/>
-              </a:spcAft>
-            </a:pPr>
-            <a:r>
-              <a:rPr sz="1800" b="0" i="0">
+                <a:spcPts val="945"/>
+              </a:spcAft>
+            </a:pPr>
+            <a:r>
+              <a:rPr sz="2100" b="1" i="0">
                 <a:solidFill>
                   <a:srgbClr val="1C1B19"/>
                 </a:solidFill>
                 <a:latin typeface="Source Serif 4"/>
               </a:rPr>
-              <a:t>Volunteers Saturdays at a food pantry with three kids his age. They're funny on shift and gone when it ends.</a:t>
-            </a:r>
-          </a:p>
-        </p:txBody>
-      </p:sp>
-      <p:sp>
-        <p:nvSpPr>
-          <p:cNvPr id="12" name="Rectangle 11"/>
-          <p:cNvSpPr/>
-          <p:nvPr/>
-        </p:nvSpPr>
-        <p:spPr>
-          <a:xfrm>
-            <a:off x="8016239" y="2103120"/>
-            <a:ext cx="3322320" cy="3840480"/>
-          </a:xfrm>
-          <a:prstGeom prst="rect">
-            <a:avLst/>
-          </a:prstGeom>
-          <a:solidFill>
-            <a:srgbClr val="FFFFFF"/>
-          </a:solidFill>
-          <a:ln w="15875">
-            <a:solidFill>
-              <a:srgbClr val="D8D2C6"/>
-            </a:solidFill>
-          </a:ln>
-          <a:effectLst/>
-        </p:spPr>
-        <p:style>
-          <a:lnRef idx="1">
-            <a:schemeClr val="accent1"/>
-          </a:lnRef>
-          <a:fillRef idx="3">
-            <a:schemeClr val="accent1"/>
-          </a:fillRef>
-          <a:effectRef idx="2">
-            <a:schemeClr val="accent1"/>
-          </a:effectRef>
-          <a:fontRef idx="minor">
-            <a:schemeClr val="lt1"/>
-          </a:fontRef>
-        </p:style>
-        <p:txBody>
-          <a:bodyPr rtlCol="0" anchor="ctr"/>
-          <a:lstStyle/>
-          <a:p>
-            <a:pPr algn="ctr"/>
-          </a:p>
-        </p:txBody>
-      </p:sp>
-      <p:sp>
-        <p:nvSpPr>
-          <p:cNvPr id="13" name="TextBox 12"/>
+              <a:t>If they wanted to hang out, they'd ask.</a:t>
+            </a:r>
+          </a:p>
+        </p:txBody>
+      </p:sp>
+      <p:sp>
+        <p:nvSpPr>
+          <p:cNvPr id="10" name="TextBox 9"/>
           <p:cNvSpPr txBox="1"/>
           <p:nvPr/>
         </p:nvSpPr>
         <p:spPr>
           <a:xfrm>
-            <a:off x="8244839" y="2286000"/>
-            <a:ext cx="2865120" cy="365760"/>
+            <a:off x="822960" y="3666744"/>
+            <a:ext cx="548640" cy="804672"/>
           </a:xfrm>
           <a:prstGeom prst="rect">
             <a:avLst/>
@@ -6093,31 +7837,31 @@
           <a:p>
             <a:pPr algn="l">
               <a:spcAft>
-                <a:spcPts val="585"/>
-              </a:spcAft>
-            </a:pPr>
-            <a:r>
-              <a:rPr sz="1300" b="1" i="0">
-                <a:solidFill>
-                  <a:srgbClr val="0B2D5B"/>
-                </a:solidFill>
-                <a:latin typeface="Inter Tight"/>
-              </a:rPr>
-              <a:t>SOFIA</a:t>
-            </a:r>
-          </a:p>
-        </p:txBody>
-      </p:sp>
-      <p:sp>
-        <p:nvSpPr>
-          <p:cNvPr id="14" name="TextBox 13"/>
+                <a:spcPts val="1170"/>
+              </a:spcAft>
+            </a:pPr>
+            <a:r>
+              <a:rPr sz="2600" b="1" i="0">
+                <a:solidFill>
+                  <a:srgbClr val="F47B20"/>
+                </a:solidFill>
+                <a:latin typeface="Source Serif 4"/>
+              </a:rPr>
+              <a:t>3</a:t>
+            </a:r>
+          </a:p>
+        </p:txBody>
+      </p:sp>
+      <p:sp>
+        <p:nvSpPr>
+          <p:cNvPr id="11" name="TextBox 10"/>
           <p:cNvSpPr txBox="1"/>
           <p:nvPr/>
         </p:nvSpPr>
         <p:spPr>
           <a:xfrm>
-            <a:off x="8244839" y="2743200"/>
-            <a:ext cx="2865120" cy="3017520"/>
+            <a:off x="1463040" y="3703320"/>
+            <a:ext cx="9875520" cy="804672"/>
           </a:xfrm>
           <a:prstGeom prst="rect">
             <a:avLst/>
@@ -6132,17 +7876,173 @@
           <a:p>
             <a:pPr algn="l">
               <a:spcAft>
-                <a:spcPts val="810"/>
-              </a:spcAft>
-            </a:pPr>
-            <a:r>
-              <a:rPr sz="1800" b="0" i="0">
+                <a:spcPts val="945"/>
+              </a:spcAft>
+            </a:pPr>
+            <a:r>
+              <a:rPr sz="2100" b="1" i="0">
                 <a:solidFill>
                   <a:srgbClr val="1C1B19"/>
                 </a:solidFill>
                 <a:latin typeface="Source Serif 4"/>
               </a:rPr>
-              <a:t>Her middle school friends all joined the fall play. She runs cross-country and feels like a guest at their lunch table.</a:t>
+              <a:t>Where you sit can shape who your friends are.</a:t>
+            </a:r>
+          </a:p>
+        </p:txBody>
+      </p:sp>
+      <p:sp>
+        <p:nvSpPr>
+          <p:cNvPr id="12" name="TextBox 11"/>
+          <p:cNvSpPr txBox="1"/>
+          <p:nvPr/>
+        </p:nvSpPr>
+        <p:spPr>
+          <a:xfrm>
+            <a:off x="822960" y="4471416"/>
+            <a:ext cx="548640" cy="804672"/>
+          </a:xfrm>
+          <a:prstGeom prst="rect">
+            <a:avLst/>
+          </a:prstGeom>
+          <a:noFill/>
+        </p:spPr>
+        <p:txBody>
+          <a:bodyPr wrap="square" anchor="t" lIns="0" rIns="0" tIns="0" bIns="0">
+            <a:spAutoFit/>
+          </a:bodyPr>
+          <a:lstStyle/>
+          <a:p>
+            <a:pPr algn="l">
+              <a:spcAft>
+                <a:spcPts val="1170"/>
+              </a:spcAft>
+            </a:pPr>
+            <a:r>
+              <a:rPr sz="2600" b="1" i="0">
+                <a:solidFill>
+                  <a:srgbClr val="F47B20"/>
+                </a:solidFill>
+                <a:latin typeface="Source Serif 4"/>
+              </a:rPr>
+              <a:t>4</a:t>
+            </a:r>
+          </a:p>
+        </p:txBody>
+      </p:sp>
+      <p:sp>
+        <p:nvSpPr>
+          <p:cNvPr id="13" name="TextBox 12"/>
+          <p:cNvSpPr txBox="1"/>
+          <p:nvPr/>
+        </p:nvSpPr>
+        <p:spPr>
+          <a:xfrm>
+            <a:off x="1463040" y="4507992"/>
+            <a:ext cx="9875520" cy="804672"/>
+          </a:xfrm>
+          <a:prstGeom prst="rect">
+            <a:avLst/>
+          </a:prstGeom>
+          <a:noFill/>
+        </p:spPr>
+        <p:txBody>
+          <a:bodyPr wrap="square" anchor="t" lIns="0" rIns="0" tIns="0" bIns="0">
+            <a:spAutoFit/>
+          </a:bodyPr>
+          <a:lstStyle/>
+          <a:p>
+            <a:pPr algn="l">
+              <a:spcAft>
+                <a:spcPts val="945"/>
+              </a:spcAft>
+            </a:pPr>
+            <a:r>
+              <a:rPr sz="2100" b="1" i="0">
+                <a:solidFill>
+                  <a:srgbClr val="1C1B19"/>
+                </a:solidFill>
+                <a:latin typeface="Source Serif 4"/>
+              </a:rPr>
+              <a:t>More followers means more friends.</a:t>
+            </a:r>
+          </a:p>
+        </p:txBody>
+      </p:sp>
+      <p:sp>
+        <p:nvSpPr>
+          <p:cNvPr id="14" name="TextBox 13"/>
+          <p:cNvSpPr txBox="1"/>
+          <p:nvPr/>
+        </p:nvSpPr>
+        <p:spPr>
+          <a:xfrm>
+            <a:off x="822960" y="5276088"/>
+            <a:ext cx="548640" cy="804672"/>
+          </a:xfrm>
+          <a:prstGeom prst="rect">
+            <a:avLst/>
+          </a:prstGeom>
+          <a:noFill/>
+        </p:spPr>
+        <p:txBody>
+          <a:bodyPr wrap="square" anchor="t" lIns="0" rIns="0" tIns="0" bIns="0">
+            <a:spAutoFit/>
+          </a:bodyPr>
+          <a:lstStyle/>
+          <a:p>
+            <a:pPr algn="l">
+              <a:spcAft>
+                <a:spcPts val="1170"/>
+              </a:spcAft>
+            </a:pPr>
+            <a:r>
+              <a:rPr sz="2600" b="1" i="0">
+                <a:solidFill>
+                  <a:srgbClr val="F47B20"/>
+                </a:solidFill>
+                <a:latin typeface="Source Serif 4"/>
+              </a:rPr>
+              <a:t>5</a:t>
+            </a:r>
+          </a:p>
+        </p:txBody>
+      </p:sp>
+      <p:sp>
+        <p:nvSpPr>
+          <p:cNvPr id="15" name="TextBox 14"/>
+          <p:cNvSpPr txBox="1"/>
+          <p:nvPr/>
+        </p:nvSpPr>
+        <p:spPr>
+          <a:xfrm>
+            <a:off x="1463040" y="5312664"/>
+            <a:ext cx="9875520" cy="804672"/>
+          </a:xfrm>
+          <a:prstGeom prst="rect">
+            <a:avLst/>
+          </a:prstGeom>
+          <a:noFill/>
+        </p:spPr>
+        <p:txBody>
+          <a:bodyPr wrap="square" anchor="t" lIns="0" rIns="0" tIns="0" bIns="0">
+            <a:spAutoFit/>
+          </a:bodyPr>
+          <a:lstStyle/>
+          <a:p>
+            <a:pPr algn="l">
+              <a:spcAft>
+                <a:spcPts val="945"/>
+              </a:spcAft>
+            </a:pPr>
+            <a:r>
+              <a:rPr sz="2100" b="1" i="0">
+                <a:solidFill>
+                  <a:srgbClr val="1C1B19"/>
+                </a:solidFill>
+                <a:latin typeface="Source Serif 4"/>
+              </a:rPr>
+              <a:t>Most people would rather stick to small talk.</a:t>
             </a:r>
           </a:p>
         </p:txBody>
@@ -6155,7 +8055,7 @@
 </p:sld>
 </file>
 
-<file path=ppt/slides/slide13.xml><?xml version="1.0" encoding="utf-8"?>
+<file path=ppt/slides/slide4.xml><?xml version="1.0" encoding="utf-8"?>
 <p:sld xmlns:a="http://schemas.openxmlformats.org/drawingml/2006/main" xmlns:p="http://schemas.openxmlformats.org/presentationml/2006/main" xmlns:r="http://schemas.openxmlformats.org/officeDocument/2006/relationships">
   <p:cSld>
     <p:bg>
@@ -6251,7 +8151,7 @@
                 </a:solidFill>
                 <a:latin typeface="Inter Tight"/>
               </a:rPr>
-              <a:t>YOUR PEOPLE MIGHT NOT BE AT SCHOOL</a:t>
+              <a:t>MYTH OR FACT?</a:t>
             </a:r>
           </a:p>
         </p:txBody>
@@ -6297,97 +8197,14 @@
       </p:sp>
       <p:sp>
         <p:nvSpPr>
-          <p:cNvPr id="5" name="Rectangle 4"/>
-          <p:cNvSpPr/>
-          <p:nvPr/>
-        </p:nvSpPr>
-        <p:spPr>
-          <a:xfrm>
-            <a:off x="822960" y="1371600"/>
-            <a:ext cx="73152" cy="3566160"/>
-          </a:xfrm>
-          <a:prstGeom prst="rect">
-            <a:avLst/>
-          </a:prstGeom>
-          <a:solidFill>
-            <a:srgbClr val="F47B20"/>
-          </a:solidFill>
-          <a:ln>
-            <a:noFill/>
-          </a:ln>
-          <a:effectLst/>
-        </p:spPr>
-        <p:style>
-          <a:lnRef idx="1">
-            <a:schemeClr val="accent1"/>
-          </a:lnRef>
-          <a:fillRef idx="3">
-            <a:schemeClr val="accent1"/>
-          </a:fillRef>
-          <a:effectRef idx="2">
-            <a:schemeClr val="accent1"/>
-          </a:effectRef>
-          <a:fontRef idx="minor">
-            <a:schemeClr val="lt1"/>
-          </a:fontRef>
-        </p:style>
-        <p:txBody>
-          <a:bodyPr rtlCol="0" anchor="ctr"/>
-          <a:lstStyle/>
-          <a:p>
-            <a:pPr algn="ctr"/>
-          </a:p>
-        </p:txBody>
-      </p:sp>
-      <p:sp>
-        <p:nvSpPr>
-          <p:cNvPr id="6" name="TextBox 5"/>
+          <p:cNvPr id="5" name="TextBox 4"/>
           <p:cNvSpPr txBox="1"/>
           <p:nvPr/>
         </p:nvSpPr>
         <p:spPr>
           <a:xfrm>
-            <a:off x="1188720" y="1371600"/>
-            <a:ext cx="10058400" cy="3566160"/>
-          </a:xfrm>
-          <a:prstGeom prst="rect">
-            <a:avLst/>
-          </a:prstGeom>
-          <a:noFill/>
-        </p:spPr>
-        <p:txBody>
-          <a:bodyPr wrap="square" anchor="ctr" lIns="0" rIns="0" tIns="0" bIns="0">
-            <a:spAutoFit/>
-          </a:bodyPr>
-          <a:lstStyle/>
-          <a:p>
-            <a:pPr algn="l">
-              <a:spcAft>
-                <a:spcPts val="1800"/>
-              </a:spcAft>
-            </a:pPr>
-            <a:r>
-              <a:rPr sz="4000" b="0" i="1">
-                <a:solidFill>
-                  <a:srgbClr val="1C1B19"/>
-                </a:solidFill>
-                <a:latin typeface="Source Serif 4"/>
-              </a:rPr>
-              <a:t>Who are your people outside school?</a:t>
-            </a:r>
-          </a:p>
-        </p:txBody>
-      </p:sp>
-      <p:sp>
-        <p:nvSpPr>
-          <p:cNvPr id="7" name="TextBox 6"/>
-          <p:cNvSpPr txBox="1"/>
-          <p:nvPr/>
-        </p:nvSpPr>
-        <p:spPr>
-          <a:xfrm>
-            <a:off x="1188720" y="5120640"/>
-            <a:ext cx="10058400" cy="914400"/>
+            <a:off x="822960" y="1005840"/>
+            <a:ext cx="10515600" cy="1097280"/>
           </a:xfrm>
           <a:prstGeom prst="rect">
             <a:avLst/>
@@ -6402,17 +8219,487 @@
           <a:p>
             <a:pPr algn="l">
               <a:spcAft>
-                <a:spcPts val="810"/>
-              </a:spcAft>
-            </a:pPr>
-            <a:r>
-              <a:rPr sz="1800" b="0" i="0">
+                <a:spcPts val="1620"/>
+              </a:spcAft>
+            </a:pPr>
+            <a:r>
+              <a:rPr sz="3600" b="1" i="0">
+                <a:solidFill>
+                  <a:srgbClr val="1C1B19"/>
+                </a:solidFill>
+                <a:latin typeface="Source Serif 4"/>
+              </a:rPr>
+              <a:t>The answers</a:t>
+            </a:r>
+          </a:p>
+        </p:txBody>
+      </p:sp>
+      <p:sp>
+        <p:nvSpPr>
+          <p:cNvPr id="6" name="TextBox 5"/>
+          <p:cNvSpPr txBox="1"/>
+          <p:nvPr/>
+        </p:nvSpPr>
+        <p:spPr>
+          <a:xfrm>
+            <a:off x="822960" y="2057400"/>
+            <a:ext cx="548640" cy="804672"/>
+          </a:xfrm>
+          <a:prstGeom prst="rect">
+            <a:avLst/>
+          </a:prstGeom>
+          <a:noFill/>
+        </p:spPr>
+        <p:txBody>
+          <a:bodyPr wrap="square" anchor="t" lIns="0" rIns="0" tIns="0" bIns="0">
+            <a:spAutoFit/>
+          </a:bodyPr>
+          <a:lstStyle/>
+          <a:p>
+            <a:pPr algn="l">
+              <a:spcAft>
+                <a:spcPts val="1170"/>
+              </a:spcAft>
+            </a:pPr>
+            <a:r>
+              <a:rPr sz="2600" b="1" i="0">
+                <a:solidFill>
+                  <a:srgbClr val="F47B20"/>
+                </a:solidFill>
+                <a:latin typeface="Source Serif 4"/>
+              </a:rPr>
+              <a:t>1</a:t>
+            </a:r>
+          </a:p>
+        </p:txBody>
+      </p:sp>
+      <p:sp>
+        <p:nvSpPr>
+          <p:cNvPr id="7" name="TextBox 6"/>
+          <p:cNvSpPr txBox="1"/>
+          <p:nvPr/>
+        </p:nvSpPr>
+        <p:spPr>
+          <a:xfrm>
+            <a:off x="1463040" y="2093976"/>
+            <a:ext cx="9875520" cy="804672"/>
+          </a:xfrm>
+          <a:prstGeom prst="rect">
+            <a:avLst/>
+          </a:prstGeom>
+          <a:noFill/>
+        </p:spPr>
+        <p:txBody>
+          <a:bodyPr wrap="square" anchor="t" lIns="0" rIns="0" tIns="0" bIns="0">
+            <a:spAutoFit/>
+          </a:bodyPr>
+          <a:lstStyle/>
+          <a:p>
+            <a:pPr algn="l">
+              <a:spcAft>
+                <a:spcPts val="945"/>
+              </a:spcAft>
+            </a:pPr>
+            <a:r>
+              <a:rPr sz="2100" b="1" i="0">
+                <a:solidFill>
+                  <a:srgbClr val="1C1B19"/>
+                </a:solidFill>
+                <a:latin typeface="Source Serif 4"/>
+              </a:rPr>
+              <a:t>Myth.</a:t>
+            </a:r>
+          </a:p>
+          <a:p>
+            <a:pPr algn="l">
+              <a:spcAft>
+                <a:spcPts val="945"/>
+              </a:spcAft>
+            </a:pPr>
+            <a:r>
+              <a:rPr sz="1600" b="0" i="0">
                 <a:solidFill>
                   <a:srgbClr val="5D5A54"/>
                 </a:solidFill>
-                <a:latin typeface="Inter Tight"/>
-              </a:rPr>
-              <a:t>And what are the rules at home, and where is there room? Private. Write it for yourself.</a:t>
+                <a:latin typeface="Source Serif 4"/>
+              </a:rPr>
+              <a:t>Instant chemistry happens. Most close friendships are built over many hours.</a:t>
+            </a:r>
+          </a:p>
+        </p:txBody>
+      </p:sp>
+      <p:sp>
+        <p:nvSpPr>
+          <p:cNvPr id="8" name="TextBox 7"/>
+          <p:cNvSpPr txBox="1"/>
+          <p:nvPr/>
+        </p:nvSpPr>
+        <p:spPr>
+          <a:xfrm>
+            <a:off x="822960" y="2862072"/>
+            <a:ext cx="548640" cy="804672"/>
+          </a:xfrm>
+          <a:prstGeom prst="rect">
+            <a:avLst/>
+          </a:prstGeom>
+          <a:noFill/>
+        </p:spPr>
+        <p:txBody>
+          <a:bodyPr wrap="square" anchor="t" lIns="0" rIns="0" tIns="0" bIns="0">
+            <a:spAutoFit/>
+          </a:bodyPr>
+          <a:lstStyle/>
+          <a:p>
+            <a:pPr algn="l">
+              <a:spcAft>
+                <a:spcPts val="1170"/>
+              </a:spcAft>
+            </a:pPr>
+            <a:r>
+              <a:rPr sz="2600" b="1" i="0">
+                <a:solidFill>
+                  <a:srgbClr val="F47B20"/>
+                </a:solidFill>
+                <a:latin typeface="Source Serif 4"/>
+              </a:rPr>
+              <a:t>2</a:t>
+            </a:r>
+          </a:p>
+        </p:txBody>
+      </p:sp>
+      <p:sp>
+        <p:nvSpPr>
+          <p:cNvPr id="9" name="TextBox 8"/>
+          <p:cNvSpPr txBox="1"/>
+          <p:nvPr/>
+        </p:nvSpPr>
+        <p:spPr>
+          <a:xfrm>
+            <a:off x="1463040" y="2898648"/>
+            <a:ext cx="9875520" cy="804672"/>
+          </a:xfrm>
+          <a:prstGeom prst="rect">
+            <a:avLst/>
+          </a:prstGeom>
+          <a:noFill/>
+        </p:spPr>
+        <p:txBody>
+          <a:bodyPr wrap="square" anchor="t" lIns="0" rIns="0" tIns="0" bIns="0">
+            <a:spAutoFit/>
+          </a:bodyPr>
+          <a:lstStyle/>
+          <a:p>
+            <a:pPr algn="l">
+              <a:spcAft>
+                <a:spcPts val="945"/>
+              </a:spcAft>
+            </a:pPr>
+            <a:r>
+              <a:rPr sz="2100" b="1" i="0">
+                <a:solidFill>
+                  <a:srgbClr val="1C1B19"/>
+                </a:solidFill>
+                <a:latin typeface="Source Serif 4"/>
+              </a:rPr>
+              <a:t>Myth.</a:t>
+            </a:r>
+          </a:p>
+          <a:p>
+            <a:pPr algn="l">
+              <a:spcAft>
+                <a:spcPts val="945"/>
+              </a:spcAft>
+            </a:pPr>
+            <a:r>
+              <a:rPr sz="1600" b="0" i="0">
+                <a:solidFill>
+                  <a:srgbClr val="5D5A54"/>
+                </a:solidFill>
+                <a:latin typeface="Source Serif 4"/>
+              </a:rPr>
+              <a:t>They're probably waiting on you. Someone has to go first.</a:t>
+            </a:r>
+          </a:p>
+        </p:txBody>
+      </p:sp>
+      <p:sp>
+        <p:nvSpPr>
+          <p:cNvPr id="10" name="TextBox 9"/>
+          <p:cNvSpPr txBox="1"/>
+          <p:nvPr/>
+        </p:nvSpPr>
+        <p:spPr>
+          <a:xfrm>
+            <a:off x="822960" y="3666744"/>
+            <a:ext cx="548640" cy="804672"/>
+          </a:xfrm>
+          <a:prstGeom prst="rect">
+            <a:avLst/>
+          </a:prstGeom>
+          <a:noFill/>
+        </p:spPr>
+        <p:txBody>
+          <a:bodyPr wrap="square" anchor="t" lIns="0" rIns="0" tIns="0" bIns="0">
+            <a:spAutoFit/>
+          </a:bodyPr>
+          <a:lstStyle/>
+          <a:p>
+            <a:pPr algn="l">
+              <a:spcAft>
+                <a:spcPts val="1170"/>
+              </a:spcAft>
+            </a:pPr>
+            <a:r>
+              <a:rPr sz="2600" b="1" i="0">
+                <a:solidFill>
+                  <a:srgbClr val="F47B20"/>
+                </a:solidFill>
+                <a:latin typeface="Source Serif 4"/>
+              </a:rPr>
+              <a:t>3</a:t>
+            </a:r>
+          </a:p>
+        </p:txBody>
+      </p:sp>
+      <p:sp>
+        <p:nvSpPr>
+          <p:cNvPr id="11" name="TextBox 10"/>
+          <p:cNvSpPr txBox="1"/>
+          <p:nvPr/>
+        </p:nvSpPr>
+        <p:spPr>
+          <a:xfrm>
+            <a:off x="1463040" y="3703320"/>
+            <a:ext cx="9875520" cy="804672"/>
+          </a:xfrm>
+          <a:prstGeom prst="rect">
+            <a:avLst/>
+          </a:prstGeom>
+          <a:noFill/>
+        </p:spPr>
+        <p:txBody>
+          <a:bodyPr wrap="square" anchor="t" lIns="0" rIns="0" tIns="0" bIns="0">
+            <a:spAutoFit/>
+          </a:bodyPr>
+          <a:lstStyle/>
+          <a:p>
+            <a:pPr algn="l">
+              <a:spcAft>
+                <a:spcPts val="945"/>
+              </a:spcAft>
+            </a:pPr>
+            <a:r>
+              <a:rPr sz="2100" b="1" i="0">
+                <a:solidFill>
+                  <a:srgbClr val="1C1B19"/>
+                </a:solidFill>
+                <a:latin typeface="Source Serif 4"/>
+              </a:rPr>
+              <a:t>Fact.</a:t>
+            </a:r>
+          </a:p>
+          <a:p>
+            <a:pPr algn="l">
+              <a:spcAft>
+                <a:spcPts val="945"/>
+              </a:spcAft>
+            </a:pPr>
+            <a:r>
+              <a:rPr sz="1600" b="0" i="0">
+                <a:solidFill>
+                  <a:srgbClr val="5D5A54"/>
+                </a:solidFill>
+                <a:latin typeface="Source Serif 4"/>
+              </a:rPr>
+              <a:t>Random seat assignments predicted friendships a year later.</a:t>
+            </a:r>
+          </a:p>
+        </p:txBody>
+      </p:sp>
+      <p:sp>
+        <p:nvSpPr>
+          <p:cNvPr id="12" name="TextBox 11"/>
+          <p:cNvSpPr txBox="1"/>
+          <p:nvPr/>
+        </p:nvSpPr>
+        <p:spPr>
+          <a:xfrm>
+            <a:off x="822960" y="4471416"/>
+            <a:ext cx="548640" cy="804672"/>
+          </a:xfrm>
+          <a:prstGeom prst="rect">
+            <a:avLst/>
+          </a:prstGeom>
+          <a:noFill/>
+        </p:spPr>
+        <p:txBody>
+          <a:bodyPr wrap="square" anchor="t" lIns="0" rIns="0" tIns="0" bIns="0">
+            <a:spAutoFit/>
+          </a:bodyPr>
+          <a:lstStyle/>
+          <a:p>
+            <a:pPr algn="l">
+              <a:spcAft>
+                <a:spcPts val="1170"/>
+              </a:spcAft>
+            </a:pPr>
+            <a:r>
+              <a:rPr sz="2600" b="1" i="0">
+                <a:solidFill>
+                  <a:srgbClr val="F47B20"/>
+                </a:solidFill>
+                <a:latin typeface="Source Serif 4"/>
+              </a:rPr>
+              <a:t>4</a:t>
+            </a:r>
+          </a:p>
+        </p:txBody>
+      </p:sp>
+      <p:sp>
+        <p:nvSpPr>
+          <p:cNvPr id="13" name="TextBox 12"/>
+          <p:cNvSpPr txBox="1"/>
+          <p:nvPr/>
+        </p:nvSpPr>
+        <p:spPr>
+          <a:xfrm>
+            <a:off x="1463040" y="4507992"/>
+            <a:ext cx="9875520" cy="804672"/>
+          </a:xfrm>
+          <a:prstGeom prst="rect">
+            <a:avLst/>
+          </a:prstGeom>
+          <a:noFill/>
+        </p:spPr>
+        <p:txBody>
+          <a:bodyPr wrap="square" anchor="t" lIns="0" rIns="0" tIns="0" bIns="0">
+            <a:spAutoFit/>
+          </a:bodyPr>
+          <a:lstStyle/>
+          <a:p>
+            <a:pPr algn="l">
+              <a:spcAft>
+                <a:spcPts val="945"/>
+              </a:spcAft>
+            </a:pPr>
+            <a:r>
+              <a:rPr sz="2100" b="1" i="0">
+                <a:solidFill>
+                  <a:srgbClr val="1C1B19"/>
+                </a:solidFill>
+                <a:latin typeface="Source Serif 4"/>
+              </a:rPr>
+              <a:t>Myth.</a:t>
+            </a:r>
+          </a:p>
+          <a:p>
+            <a:pPr algn="l">
+              <a:spcAft>
+                <a:spcPts val="945"/>
+              </a:spcAft>
+            </a:pPr>
+            <a:r>
+              <a:rPr sz="1600" b="0" i="0">
+                <a:solidFill>
+                  <a:srgbClr val="5D5A54"/>
+                </a:solidFill>
+                <a:latin typeface="Source Serif 4"/>
+              </a:rPr>
+              <a:t>Popular and close are different things, with different effects.</a:t>
+            </a:r>
+          </a:p>
+        </p:txBody>
+      </p:sp>
+      <p:sp>
+        <p:nvSpPr>
+          <p:cNvPr id="14" name="TextBox 13"/>
+          <p:cNvSpPr txBox="1"/>
+          <p:nvPr/>
+        </p:nvSpPr>
+        <p:spPr>
+          <a:xfrm>
+            <a:off x="822960" y="5276088"/>
+            <a:ext cx="548640" cy="804672"/>
+          </a:xfrm>
+          <a:prstGeom prst="rect">
+            <a:avLst/>
+          </a:prstGeom>
+          <a:noFill/>
+        </p:spPr>
+        <p:txBody>
+          <a:bodyPr wrap="square" anchor="t" lIns="0" rIns="0" tIns="0" bIns="0">
+            <a:spAutoFit/>
+          </a:bodyPr>
+          <a:lstStyle/>
+          <a:p>
+            <a:pPr algn="l">
+              <a:spcAft>
+                <a:spcPts val="1170"/>
+              </a:spcAft>
+            </a:pPr>
+            <a:r>
+              <a:rPr sz="2600" b="1" i="0">
+                <a:solidFill>
+                  <a:srgbClr val="F47B20"/>
+                </a:solidFill>
+                <a:latin typeface="Source Serif 4"/>
+              </a:rPr>
+              <a:t>5</a:t>
+            </a:r>
+          </a:p>
+        </p:txBody>
+      </p:sp>
+      <p:sp>
+        <p:nvSpPr>
+          <p:cNvPr id="15" name="TextBox 14"/>
+          <p:cNvSpPr txBox="1"/>
+          <p:nvPr/>
+        </p:nvSpPr>
+        <p:spPr>
+          <a:xfrm>
+            <a:off x="1463040" y="5312664"/>
+            <a:ext cx="9875520" cy="804672"/>
+          </a:xfrm>
+          <a:prstGeom prst="rect">
+            <a:avLst/>
+          </a:prstGeom>
+          <a:noFill/>
+        </p:spPr>
+        <p:txBody>
+          <a:bodyPr wrap="square" anchor="t" lIns="0" rIns="0" tIns="0" bIns="0">
+            <a:spAutoFit/>
+          </a:bodyPr>
+          <a:lstStyle/>
+          <a:p>
+            <a:pPr algn="l">
+              <a:spcAft>
+                <a:spcPts val="945"/>
+              </a:spcAft>
+            </a:pPr>
+            <a:r>
+              <a:rPr sz="2100" b="1" i="0">
+                <a:solidFill>
+                  <a:srgbClr val="1C1B19"/>
+                </a:solidFill>
+                <a:latin typeface="Source Serif 4"/>
+              </a:rPr>
+              <a:t>Myth.</a:t>
+            </a:r>
+          </a:p>
+          <a:p>
+            <a:pPr algn="l">
+              <a:spcAft>
+                <a:spcPts val="945"/>
+              </a:spcAft>
+            </a:pPr>
+            <a:r>
+              <a:rPr sz="1600" b="0" i="0">
+                <a:solidFill>
+                  <a:srgbClr val="5D5A54"/>
+                </a:solidFill>
+                <a:latin typeface="Source Serif 4"/>
+              </a:rPr>
+              <a:t>People want to go deeper than they expect.</a:t>
             </a:r>
           </a:p>
         </p:txBody>
@@ -6425,7 +8712,7 @@
 </p:sld>
 </file>
 
-<file path=ppt/slides/slide14.xml><?xml version="1.0" encoding="utf-8"?>
+<file path=ppt/slides/slide5.xml><?xml version="1.0" encoding="utf-8"?>
 <p:sld xmlns:a="http://schemas.openxmlformats.org/drawingml/2006/main" xmlns:p="http://schemas.openxmlformats.org/presentationml/2006/main" xmlns:r="http://schemas.openxmlformats.org/officeDocument/2006/relationships">
   <p:cSld>
     <p:bg>
@@ -6521,7 +8808,7 @@
                 </a:solidFill>
                 <a:latin typeface="Inter Tight"/>
               </a:rPr>
-              <a:t>BEFORE YOU GO</a:t>
+              <a:t>FRIENDSHIP RUNS ON A CLOCK</a:t>
             </a:r>
           </a:p>
         </p:txBody>
@@ -6573,8 +8860,8 @@
         </p:nvSpPr>
         <p:spPr>
           <a:xfrm>
-            <a:off x="822960" y="1188720"/>
-            <a:ext cx="10515600" cy="914400"/>
+            <a:off x="822960" y="1005840"/>
+            <a:ext cx="10515600" cy="1097280"/>
           </a:xfrm>
           <a:prstGeom prst="rect">
             <a:avLst/>
@@ -6599,7 +8886,7 @@
                 </a:solidFill>
                 <a:latin typeface="Source Serif 4"/>
               </a:rPr>
-              <a:t>One step this week</a:t>
+              <a:t>Rough hours it takes</a:t>
             </a:r>
           </a:p>
         </p:txBody>
@@ -6612,8 +8899,8 @@
         </p:nvSpPr>
         <p:spPr>
           <a:xfrm>
-            <a:off x="822960" y="2286000"/>
-            <a:ext cx="10515600" cy="1463040"/>
+            <a:off x="822960" y="2194560"/>
+            <a:ext cx="548640" cy="1051560"/>
           </a:xfrm>
           <a:prstGeom prst="rect">
             <a:avLst/>
@@ -6628,77 +8915,31 @@
           <a:p>
             <a:pPr algn="l">
               <a:spcAft>
-                <a:spcPts val="1080"/>
-              </a:spcAft>
-            </a:pPr>
-            <a:r>
-              <a:rPr sz="2400" b="0" i="0">
-                <a:solidFill>
-                  <a:srgbClr val="1C1B19"/>
-                </a:solidFill>
-                <a:latin typeface="Source Serif 4"/>
-              </a:rPr>
-              <a:t>Write one person and one specific move. When will you do it?</a:t>
-            </a:r>
-          </a:p>
-        </p:txBody>
-      </p:sp>
-      <p:sp>
-        <p:nvSpPr>
-          <p:cNvPr id="7" name="Rectangle 6"/>
-          <p:cNvSpPr/>
-          <p:nvPr/>
-        </p:nvSpPr>
-        <p:spPr>
-          <a:xfrm>
-            <a:off x="822960" y="4023360"/>
-            <a:ext cx="10515600" cy="1371600"/>
-          </a:xfrm>
-          <a:prstGeom prst="rect">
-            <a:avLst/>
-          </a:prstGeom>
-          <a:solidFill>
-            <a:srgbClr val="FFFFFF"/>
-          </a:solidFill>
-          <a:ln w="15875">
-            <a:solidFill>
-              <a:srgbClr val="1C1B19"/>
-            </a:solidFill>
-          </a:ln>
-          <a:effectLst/>
-        </p:spPr>
-        <p:style>
-          <a:lnRef idx="1">
-            <a:schemeClr val="accent1"/>
-          </a:lnRef>
-          <a:fillRef idx="3">
-            <a:schemeClr val="accent1"/>
-          </a:fillRef>
-          <a:effectRef idx="2">
-            <a:schemeClr val="accent1"/>
-          </a:effectRef>
-          <a:fontRef idx="minor">
-            <a:schemeClr val="lt1"/>
-          </a:fontRef>
-        </p:style>
-        <p:txBody>
-          <a:bodyPr rtlCol="0" anchor="ctr"/>
-          <a:lstStyle/>
-          <a:p>
-            <a:pPr algn="ctr"/>
-          </a:p>
-        </p:txBody>
-      </p:sp>
-      <p:sp>
-        <p:nvSpPr>
-          <p:cNvPr id="8" name="TextBox 7"/>
+                <a:spcPts val="1170"/>
+              </a:spcAft>
+            </a:pPr>
+            <a:r>
+              <a:rPr sz="2600" b="1" i="0">
+                <a:solidFill>
+                  <a:srgbClr val="F47B20"/>
+                </a:solidFill>
+                <a:latin typeface="Source Serif 4"/>
+              </a:rPr>
+              <a:t>1</a:t>
+            </a:r>
+          </a:p>
+        </p:txBody>
+      </p:sp>
+      <p:sp>
+        <p:nvSpPr>
+          <p:cNvPr id="7" name="TextBox 6"/>
           <p:cNvSpPr txBox="1"/>
           <p:nvPr/>
         </p:nvSpPr>
         <p:spPr>
           <a:xfrm>
-            <a:off x="1097280" y="4206240"/>
-            <a:ext cx="10058400" cy="365760"/>
+            <a:off x="1463040" y="2231136"/>
+            <a:ext cx="9875520" cy="1051560"/>
           </a:xfrm>
           <a:prstGeom prst="rect">
             <a:avLst/>
@@ -6713,31 +8954,47 @@
           <a:p>
             <a:pPr algn="l">
               <a:spcAft>
-                <a:spcPts val="540"/>
-              </a:spcAft>
-            </a:pPr>
-            <a:r>
-              <a:rPr sz="1200" b="1" i="0">
-                <a:solidFill>
-                  <a:srgbClr val="0B2D5B"/>
-                </a:solidFill>
-                <a:latin typeface="Inter Tight"/>
-              </a:rPr>
-              <a:t>ON THE BVR DINER MENU</a:t>
-            </a:r>
-          </a:p>
-        </p:txBody>
-      </p:sp>
-      <p:sp>
-        <p:nvSpPr>
-          <p:cNvPr id="9" name="TextBox 8"/>
+                <a:spcPts val="945"/>
+              </a:spcAft>
+            </a:pPr>
+            <a:r>
+              <a:rPr sz="2100" b="1" i="0">
+                <a:solidFill>
+                  <a:srgbClr val="1C1B19"/>
+                </a:solidFill>
+                <a:latin typeface="Source Serif 4"/>
+              </a:rPr>
+              <a:t>About 50 hours: casual friend.</a:t>
+            </a:r>
+          </a:p>
+          <a:p>
+            <a:pPr algn="l">
+              <a:spcAft>
+                <a:spcPts val="945"/>
+              </a:spcAft>
+            </a:pPr>
+            <a:r>
+              <a:rPr sz="1600" b="0" i="0">
+                <a:solidFill>
+                  <a:srgbClr val="5D5A54"/>
+                </a:solidFill>
+                <a:latin typeface="Source Serif 4"/>
+              </a:rPr>
+              <a:t>You'd sit together without a reason.</a:t>
+            </a:r>
+          </a:p>
+        </p:txBody>
+      </p:sp>
+      <p:sp>
+        <p:nvSpPr>
+          <p:cNvPr id="8" name="TextBox 7"/>
           <p:cNvSpPr txBox="1"/>
           <p:nvPr/>
         </p:nvSpPr>
         <p:spPr>
           <a:xfrm>
-            <a:off x="1097280" y="4617720"/>
-            <a:ext cx="10058400" cy="640080"/>
+            <a:off x="822960" y="3246120"/>
+            <a:ext cx="548640" cy="1051560"/>
           </a:xfrm>
           <a:prstGeom prst="rect">
             <a:avLst/>
@@ -6752,101 +9009,31 @@
           <a:p>
             <a:pPr algn="l">
               <a:spcAft>
-                <a:spcPts val="900"/>
-              </a:spcAft>
-            </a:pPr>
-            <a:r>
-              <a:rPr sz="2000" b="0" i="0">
-                <a:solidFill>
-                  <a:srgbClr val="1C1B19"/>
-                </a:solidFill>
-                <a:latin typeface="Inter Tight"/>
-              </a:rPr>
-              <a:t>https://rmwtoolkit.github.io/bcds-toolkit/finding-your-people-high-school.html</a:t>
-            </a:r>
-          </a:p>
-        </p:txBody>
-      </p:sp>
-    </p:spTree>
-  </p:cSld>
-  <p:clrMapOvr>
-    <a:masterClrMapping/>
-  </p:clrMapOvr>
-</p:sld>
-</file>
-
-<file path=ppt/slides/slide2.xml><?xml version="1.0" encoding="utf-8"?>
-<p:sld xmlns:a="http://schemas.openxmlformats.org/drawingml/2006/main" xmlns:p="http://schemas.openxmlformats.org/presentationml/2006/main" xmlns:r="http://schemas.openxmlformats.org/officeDocument/2006/relationships" show="0">
-  <p:cSld>
-    <p:bg>
-      <p:bgPr>
-        <a:solidFill>
-          <a:srgbClr val="EEEBE4"/>
-        </a:solidFill>
-        <a:effectLst/>
-      </p:bgPr>
-    </p:bg>
-    <p:spTree>
-      <p:nvGrpSpPr>
-        <p:cNvPr id="1" name=""/>
-        <p:cNvGrpSpPr/>
-        <p:nvPr/>
-      </p:nvGrpSpPr>
-      <p:grpSpPr/>
-      <p:sp>
-        <p:nvSpPr>
-          <p:cNvPr id="2" name="Rectangle 1"/>
-          <p:cNvSpPr/>
-          <p:nvPr/>
-        </p:nvSpPr>
-        <p:spPr>
-          <a:xfrm>
-            <a:off x="0" y="0"/>
-            <a:ext cx="12191695" cy="384048"/>
-          </a:xfrm>
-          <a:prstGeom prst="rect">
-            <a:avLst/>
-          </a:prstGeom>
-          <a:solidFill>
-            <a:srgbClr val="0B2D5B"/>
-          </a:solidFill>
-          <a:ln>
-            <a:noFill/>
-          </a:ln>
-          <a:effectLst/>
-        </p:spPr>
-        <p:style>
-          <a:lnRef idx="1">
-            <a:schemeClr val="accent1"/>
-          </a:lnRef>
-          <a:fillRef idx="3">
-            <a:schemeClr val="accent1"/>
-          </a:fillRef>
-          <a:effectRef idx="2">
-            <a:schemeClr val="accent1"/>
-          </a:effectRef>
-          <a:fontRef idx="minor">
-            <a:schemeClr val="lt1"/>
-          </a:fontRef>
-        </p:style>
-        <p:txBody>
-          <a:bodyPr rtlCol="0" anchor="ctr"/>
-          <a:lstStyle/>
-          <a:p>
-            <a:pPr algn="ctr"/>
-          </a:p>
-        </p:txBody>
-      </p:sp>
-      <p:sp>
-        <p:nvSpPr>
-          <p:cNvPr id="3" name="TextBox 2"/>
+                <a:spcPts val="1170"/>
+              </a:spcAft>
+            </a:pPr>
+            <a:r>
+              <a:rPr sz="2600" b="1" i="0">
+                <a:solidFill>
+                  <a:srgbClr val="F47B20"/>
+                </a:solidFill>
+                <a:latin typeface="Source Serif 4"/>
+              </a:rPr>
+              <a:t>2</a:t>
+            </a:r>
+          </a:p>
+        </p:txBody>
+      </p:sp>
+      <p:sp>
+        <p:nvSpPr>
+          <p:cNvPr id="9" name="TextBox 8"/>
           <p:cNvSpPr txBox="1"/>
           <p:nvPr/>
         </p:nvSpPr>
         <p:spPr>
           <a:xfrm>
-            <a:off x="548640" y="100584"/>
-            <a:ext cx="10972800" cy="274320"/>
+            <a:off x="1463040" y="3282696"/>
+            <a:ext cx="9875520" cy="1051560"/>
           </a:xfrm>
           <a:prstGeom prst="rect">
             <a:avLst/>
@@ -6861,31 +9048,47 @@
           <a:p>
             <a:pPr algn="l">
               <a:spcAft>
-                <a:spcPts val="495"/>
-              </a:spcAft>
-            </a:pPr>
-            <a:r>
-              <a:rPr sz="1100" b="1" i="0">
-                <a:solidFill>
-                  <a:srgbClr val="FFFFFF"/>
-                </a:solidFill>
-                <a:latin typeface="Inter Tight"/>
-              </a:rPr>
-              <a:t>TEACHER PAGE  ·  skipped when you present  ·  Before you teach</a:t>
-            </a:r>
-          </a:p>
-        </p:txBody>
-      </p:sp>
-      <p:sp>
-        <p:nvSpPr>
-          <p:cNvPr id="4" name="TextBox 3"/>
+                <a:spcPts val="945"/>
+              </a:spcAft>
+            </a:pPr>
+            <a:r>
+              <a:rPr sz="2100" b="1" i="0">
+                <a:solidFill>
+                  <a:srgbClr val="1C1B19"/>
+                </a:solidFill>
+                <a:latin typeface="Source Serif 4"/>
+              </a:rPr>
+              <a:t>About 90 hours: friend.</a:t>
+            </a:r>
+          </a:p>
+          <a:p>
+            <a:pPr algn="l">
+              <a:spcAft>
+                <a:spcPts val="945"/>
+              </a:spcAft>
+            </a:pPr>
+            <a:r>
+              <a:rPr sz="1600" b="0" i="0">
+                <a:solidFill>
+                  <a:srgbClr val="5D5A54"/>
+                </a:solidFill>
+                <a:latin typeface="Source Serif 4"/>
+              </a:rPr>
+              <a:t>You make plans on purpose.</a:t>
+            </a:r>
+          </a:p>
+        </p:txBody>
+      </p:sp>
+      <p:sp>
+        <p:nvSpPr>
+          <p:cNvPr id="10" name="TextBox 9"/>
           <p:cNvSpPr txBox="1"/>
           <p:nvPr/>
         </p:nvSpPr>
         <p:spPr>
           <a:xfrm>
-            <a:off x="548640" y="685800"/>
-            <a:ext cx="10972800" cy="640080"/>
+            <a:off x="822960" y="4297679"/>
+            <a:ext cx="548640" cy="1051560"/>
           </a:xfrm>
           <a:prstGeom prst="rect">
             <a:avLst/>
@@ -6900,31 +9103,31 @@
           <a:p>
             <a:pPr algn="l">
               <a:spcAft>
-                <a:spcPts val="1350"/>
-              </a:spcAft>
-            </a:pPr>
-            <a:r>
-              <a:rPr sz="3000" b="1" i="0">
-                <a:solidFill>
-                  <a:srgbClr val="1C1B19"/>
-                </a:solidFill>
-                <a:latin typeface="Source Serif 4"/>
-              </a:rPr>
-              <a:t>Before you teach</a:t>
-            </a:r>
-          </a:p>
-        </p:txBody>
-      </p:sp>
-      <p:sp>
-        <p:nvSpPr>
-          <p:cNvPr id="5" name="TextBox 4"/>
+                <a:spcPts val="1170"/>
+              </a:spcAft>
+            </a:pPr>
+            <a:r>
+              <a:rPr sz="2600" b="1" i="0">
+                <a:solidFill>
+                  <a:srgbClr val="F47B20"/>
+                </a:solidFill>
+                <a:latin typeface="Source Serif 4"/>
+              </a:rPr>
+              <a:t>3</a:t>
+            </a:r>
+          </a:p>
+        </p:txBody>
+      </p:sp>
+      <p:sp>
+        <p:nvSpPr>
+          <p:cNvPr id="11" name="TextBox 10"/>
           <p:cNvSpPr txBox="1"/>
           <p:nvPr/>
         </p:nvSpPr>
         <p:spPr>
           <a:xfrm>
-            <a:off x="548640" y="1463040"/>
-            <a:ext cx="5394960" cy="4937760"/>
+            <a:off x="1463040" y="4334255"/>
+            <a:ext cx="9875520" cy="1051560"/>
           </a:xfrm>
           <a:prstGeom prst="rect">
             <a:avLst/>
@@ -6939,1484 +9142,33 @@
           <a:p>
             <a:pPr algn="l">
               <a:spcAft>
-                <a:spcPts val="585"/>
-              </a:spcAft>
-            </a:pPr>
-            <a:r>
-              <a:rPr sz="1500" b="1" i="0">
+                <a:spcPts val="945"/>
+              </a:spcAft>
+            </a:pPr>
+            <a:r>
+              <a:rPr sz="2100" b="1" i="0">
                 <a:solidFill>
                   <a:srgbClr val="1C1B19"/>
                 </a:solidFill>
                 <a:latin typeface="Source Serif 4"/>
               </a:rPr>
-              <a:t>Assume lonely students are in the room.</a:t>
-            </a:r>
-          </a:p>
-          <a:p>
-            <a:pPr algn="l">
-              <a:spcAft>
-                <a:spcPts val="585"/>
-              </a:spcAft>
-            </a:pPr>
-            <a:r>
-              <a:rPr sz="1300" b="0" i="0">
-                <a:solidFill>
-                  <a:srgbClr val="1C1B19"/>
-                </a:solidFill>
-                <a:latin typeface="Source Serif 4"/>
-              </a:rPr>
-              <a:t>Some 9th graders arrived knowing nobody, and some lost their middle school group over the summer. Never ask for a show of hands about who has friends, who sits alone, or who feels left out. Every personal question in this lesson is private.</a:t>
-            </a:r>
-          </a:p>
-          <a:p>
-            <a:pPr algn="l">
-              <a:spcAft>
-                <a:spcPts val="585"/>
-              </a:spcAft>
-            </a:pPr>
-            <a:r>
-              <a:rPr sz="1300" b="0" i="0">
-                <a:solidFill>
-                  <a:srgbClr val="1C1B19"/>
-                </a:solidFill>
-                <a:latin typeface="Source Serif 4"/>
-              </a:rPr>
-              <a:t/>
-            </a:r>
-          </a:p>
-          <a:p>
-            <a:pPr algn="l">
-              <a:spcAft>
-                <a:spcPts val="585"/>
-              </a:spcAft>
-            </a:pPr>
-            <a:r>
-              <a:rPr sz="1500" b="1" i="0">
-                <a:solidFill>
-                  <a:srgbClr val="1C1B19"/>
-                </a:solidFill>
-                <a:latin typeface="Source Serif 4"/>
-              </a:rPr>
-              <a:t>Set up the pair-share so nobody gets picked last.</a:t>
-            </a:r>
-          </a:p>
-          <a:p>
-            <a:pPr algn="l">
-              <a:spcAft>
-                <a:spcPts val="585"/>
-              </a:spcAft>
-            </a:pPr>
-            <a:r>
-              <a:rPr sz="1300" b="0" i="0">
-                <a:solidFill>
-                  <a:srgbClr val="1C1B19"/>
-                </a:solidFill>
-                <a:latin typeface="Source Serif 4"/>
-              </a:rPr>
-              <a:t>Assign partners (count off, or pair by seat) so nobody has to find one. Give everyone a pass option and an easier question. A student who stays quiet is still taking part.</a:t>
-            </a:r>
-          </a:p>
-          <a:p>
-            <a:pPr algn="l">
-              <a:spcAft>
-                <a:spcPts val="585"/>
-              </a:spcAft>
-            </a:pPr>
-            <a:r>
-              <a:rPr sz="1300" b="0" i="0">
-                <a:solidFill>
-                  <a:srgbClr val="1C1B19"/>
-                </a:solidFill>
-                <a:latin typeface="Source Serif 4"/>
-              </a:rPr>
-              <a:t/>
-            </a:r>
-          </a:p>
-          <a:p>
-            <a:pPr algn="l">
-              <a:spcAft>
-                <a:spcPts val="585"/>
-              </a:spcAft>
-            </a:pPr>
-            <a:r>
-              <a:rPr sz="1500" b="1" i="0">
-                <a:solidFill>
-                  <a:srgbClr val="1C1B19"/>
-                </a:solidFill>
-                <a:latin typeface="Source Serif 4"/>
-              </a:rPr>
-              <a:t>Being left out on purpose is a different conversation.</a:t>
-            </a:r>
-          </a:p>
-          <a:p>
-            <a:pPr algn="l">
-              <a:spcAft>
-                <a:spcPts val="585"/>
-              </a:spcAft>
-            </a:pPr>
-            <a:r>
-              <a:rPr sz="1300" b="0" i="0">
-                <a:solidFill>
-                  <a:srgbClr val="1C1B19"/>
-                </a:solidFill>
-                <a:latin typeface="Source Serif 4"/>
-              </a:rPr>
-              <a:t>If a student describes being excluded, picked on, or targeted, thank them and connect them with a counselor that day. Don't problem-solve it in front of the class.</a:t>
-            </a:r>
-          </a:p>
-          <a:p>
-            <a:pPr algn="l">
-              <a:spcAft>
-                <a:spcPts val="585"/>
-              </a:spcAft>
-            </a:pPr>
-            <a:r>
-              <a:rPr sz="1300" b="0" i="0">
-                <a:solidFill>
-                  <a:srgbClr val="1C1B19"/>
-                </a:solidFill>
-                <a:latin typeface="Source Serif 4"/>
-              </a:rPr>
-              <a:t/>
-            </a:r>
-          </a:p>
-        </p:txBody>
-      </p:sp>
-      <p:sp>
-        <p:nvSpPr>
-          <p:cNvPr id="6" name="TextBox 5"/>
-          <p:cNvSpPr txBox="1"/>
-          <p:nvPr/>
-        </p:nvSpPr>
-        <p:spPr>
-          <a:xfrm>
-            <a:off x="6217920" y="1463040"/>
-            <a:ext cx="5394960" cy="4937760"/>
-          </a:xfrm>
-          <a:prstGeom prst="rect">
-            <a:avLst/>
-          </a:prstGeom>
-          <a:noFill/>
-        </p:spPr>
-        <p:txBody>
-          <a:bodyPr wrap="square" anchor="t" lIns="0" rIns="0" tIns="0" bIns="0">
-            <a:spAutoFit/>
-          </a:bodyPr>
-          <a:lstStyle/>
-          <a:p>
-            <a:pPr algn="l">
-              <a:spcAft>
-                <a:spcPts val="585"/>
-              </a:spcAft>
-            </a:pPr>
-            <a:r>
-              <a:rPr sz="1500" b="1" i="0">
-                <a:solidFill>
-                  <a:srgbClr val="1C1B19"/>
-                </a:solidFill>
-                <a:latin typeface="Source Serif 4"/>
-              </a:rPr>
-              <a:t>Know the signs that loneliness needs more than a lesson.</a:t>
-            </a:r>
-          </a:p>
-          <a:p>
-            <a:pPr algn="l">
-              <a:spcAft>
-                <a:spcPts val="585"/>
-              </a:spcAft>
-            </a:pPr>
-            <a:r>
-              <a:rPr sz="1300" b="0" i="0">
-                <a:solidFill>
-                  <a:srgbClr val="1C1B19"/>
-                </a:solidFill>
-                <a:latin typeface="Source Serif 4"/>
-              </a:rPr>
-              <a:t>Feeling alone most days for a long time, skipping school or practice because of it, or seeming hopeless or down most of the time. Don't ask about any of this in class. If a student tells you something like this, or writes it on a card, follow up privately and bring in a counselor.</a:t>
-            </a:r>
-          </a:p>
-          <a:p>
-            <a:pPr algn="l">
-              <a:spcAft>
-                <a:spcPts val="585"/>
-              </a:spcAft>
-            </a:pPr>
-            <a:r>
-              <a:rPr sz="1300" b="0" i="0">
-                <a:solidFill>
-                  <a:srgbClr val="1C1B19"/>
-                </a:solidFill>
-                <a:latin typeface="Source Serif 4"/>
-              </a:rPr>
-              <a:t/>
-            </a:r>
-          </a:p>
-          <a:p>
-            <a:pPr algn="l">
-              <a:spcAft>
-                <a:spcPts val="585"/>
-              </a:spcAft>
-            </a:pPr>
-            <a:r>
-              <a:rPr sz="1500" b="1" i="0">
-                <a:solidFill>
-                  <a:srgbClr val="1C1B19"/>
-                </a:solidFill>
-                <a:latin typeface="Source Serif 4"/>
-              </a:rPr>
-              <a:t>Online friends come up. Respect them.</a:t>
-            </a:r>
-          </a:p>
-          <a:p>
-            <a:pPr algn="l">
-              <a:spcAft>
-                <a:spcPts val="585"/>
-              </a:spcAft>
-            </a:pPr>
-            <a:r>
-              <a:rPr sz="1300" b="0" i="0">
-                <a:solidFill>
-                  <a:srgbClr val="1C1B19"/>
-                </a:solidFill>
-                <a:latin typeface="Source Serif 4"/>
-              </a:rPr>
-              <a:t>Online friendships are real, especially for students who don't see themselves at school. Add the safety piece calmly: meet in public, tell someone you trust, bring a friend. An adult who wants a friendship kept secret is a red flag and a counselor conversation.</a:t>
-            </a:r>
-          </a:p>
-          <a:p>
-            <a:pPr algn="l">
-              <a:spcAft>
-                <a:spcPts val="585"/>
-              </a:spcAft>
-            </a:pPr>
-            <a:r>
-              <a:rPr sz="1300" b="0" i="0">
-                <a:solidFill>
-                  <a:srgbClr val="1C1B19"/>
-                </a:solidFill>
-                <a:latin typeface="Source Serif 4"/>
-              </a:rPr>
-              <a:t/>
-            </a:r>
-          </a:p>
-          <a:p>
-            <a:pPr algn="l">
-              <a:spcAft>
-                <a:spcPts val="585"/>
-              </a:spcAft>
-            </a:pPr>
-            <a:r>
-              <a:rPr sz="1500" b="1" i="0">
-                <a:solidFill>
-                  <a:srgbClr val="1C1B19"/>
-                </a:solidFill>
-                <a:latin typeface="Source Serif 4"/>
-              </a:rPr>
-              <a:t>Keep the hours estimate honest.</a:t>
-            </a:r>
-          </a:p>
-          <a:p>
-            <a:pPr algn="l">
-              <a:spcAft>
-                <a:spcPts val="585"/>
-              </a:spcAft>
-            </a:pPr>
-            <a:r>
-              <a:rPr sz="1300" b="0" i="0">
-                <a:solidFill>
-                  <a:srgbClr val="1C1B19"/>
-                </a:solidFill>
-                <a:latin typeface="Source Serif 4"/>
-              </a:rPr>
-              <a:t>The 50, 90 and 200 hour numbers are one researcher's estimates and vary a lot by person. Present them as a rough map. The point is patience, so don't turn it into a quota.</a:t>
-            </a:r>
-          </a:p>
-          <a:p>
-            <a:pPr algn="l">
-              <a:spcAft>
-                <a:spcPts val="585"/>
-              </a:spcAft>
-            </a:pPr>
-            <a:r>
-              <a:rPr sz="1300" b="0" i="0">
-                <a:solidFill>
-                  <a:srgbClr val="1C1B19"/>
-                </a:solidFill>
-                <a:latin typeface="Source Serif 4"/>
-              </a:rPr>
-              <a:t/>
-            </a:r>
-          </a:p>
-        </p:txBody>
-      </p:sp>
-    </p:spTree>
-  </p:cSld>
-  <p:clrMapOvr>
-    <a:masterClrMapping/>
-  </p:clrMapOvr>
-</p:sld>
-</file>
-
-<file path=ppt/slides/slide3.xml><?xml version="1.0" encoding="utf-8"?>
-<p:sld xmlns:a="http://schemas.openxmlformats.org/drawingml/2006/main" xmlns:p="http://schemas.openxmlformats.org/presentationml/2006/main" xmlns:r="http://schemas.openxmlformats.org/officeDocument/2006/relationships" show="0">
-  <p:cSld>
-    <p:bg>
-      <p:bgPr>
-        <a:solidFill>
-          <a:srgbClr val="EEEBE4"/>
-        </a:solidFill>
-        <a:effectLst/>
-      </p:bgPr>
-    </p:bg>
-    <p:spTree>
-      <p:nvGrpSpPr>
-        <p:cNvPr id="1" name=""/>
-        <p:cNvGrpSpPr/>
-        <p:nvPr/>
-      </p:nvGrpSpPr>
-      <p:grpSpPr/>
-      <p:sp>
-        <p:nvSpPr>
-          <p:cNvPr id="2" name="Rectangle 1"/>
-          <p:cNvSpPr/>
-          <p:nvPr/>
-        </p:nvSpPr>
-        <p:spPr>
-          <a:xfrm>
-            <a:off x="0" y="0"/>
-            <a:ext cx="12191695" cy="384048"/>
-          </a:xfrm>
-          <a:prstGeom prst="rect">
-            <a:avLst/>
-          </a:prstGeom>
-          <a:solidFill>
-            <a:srgbClr val="0B2D5B"/>
-          </a:solidFill>
-          <a:ln>
-            <a:noFill/>
-          </a:ln>
-          <a:effectLst/>
-        </p:spPr>
-        <p:style>
-          <a:lnRef idx="1">
-            <a:schemeClr val="accent1"/>
-          </a:lnRef>
-          <a:fillRef idx="3">
-            <a:schemeClr val="accent1"/>
-          </a:fillRef>
-          <a:effectRef idx="2">
-            <a:schemeClr val="accent1"/>
-          </a:effectRef>
-          <a:fontRef idx="minor">
-            <a:schemeClr val="lt1"/>
-          </a:fontRef>
-        </p:style>
-        <p:txBody>
-          <a:bodyPr rtlCol="0" anchor="ctr"/>
-          <a:lstStyle/>
-          <a:p>
-            <a:pPr algn="ctr"/>
-          </a:p>
-        </p:txBody>
-      </p:sp>
-      <p:sp>
-        <p:nvSpPr>
-          <p:cNvPr id="3" name="TextBox 2"/>
-          <p:cNvSpPr txBox="1"/>
-          <p:nvPr/>
-        </p:nvSpPr>
-        <p:spPr>
-          <a:xfrm>
-            <a:off x="548640" y="100584"/>
-            <a:ext cx="10972800" cy="274320"/>
-          </a:xfrm>
-          <a:prstGeom prst="rect">
-            <a:avLst/>
-          </a:prstGeom>
-          <a:noFill/>
-        </p:spPr>
-        <p:txBody>
-          <a:bodyPr wrap="square" anchor="t" lIns="0" rIns="0" tIns="0" bIns="0">
-            <a:spAutoFit/>
-          </a:bodyPr>
-          <a:lstStyle/>
-          <a:p>
-            <a:pPr algn="l">
-              <a:spcAft>
-                <a:spcPts val="495"/>
-              </a:spcAft>
-            </a:pPr>
-            <a:r>
-              <a:rPr sz="1100" b="1" i="0">
-                <a:solidFill>
-                  <a:srgbClr val="FFFFFF"/>
-                </a:solidFill>
-                <a:latin typeface="Inter Tight"/>
-              </a:rPr>
-              <a:t>TEACHER PAGE  ·  skipped when you present  ·  Every student in the room</a:t>
-            </a:r>
-          </a:p>
-        </p:txBody>
-      </p:sp>
-      <p:sp>
-        <p:nvSpPr>
-          <p:cNvPr id="4" name="TextBox 3"/>
-          <p:cNvSpPr txBox="1"/>
-          <p:nvPr/>
-        </p:nvSpPr>
-        <p:spPr>
-          <a:xfrm>
-            <a:off x="548640" y="685800"/>
-            <a:ext cx="10972800" cy="640080"/>
-          </a:xfrm>
-          <a:prstGeom prst="rect">
-            <a:avLst/>
-          </a:prstGeom>
-          <a:noFill/>
-        </p:spPr>
-        <p:txBody>
-          <a:bodyPr wrap="square" anchor="t" lIns="0" rIns="0" tIns="0" bIns="0">
-            <a:spAutoFit/>
-          </a:bodyPr>
-          <a:lstStyle/>
-          <a:p>
-            <a:pPr algn="l">
-              <a:spcAft>
-                <a:spcPts val="1350"/>
-              </a:spcAft>
-            </a:pPr>
-            <a:r>
-              <a:rPr sz="3000" b="1" i="0">
-                <a:solidFill>
-                  <a:srgbClr val="1C1B19"/>
-                </a:solidFill>
-                <a:latin typeface="Source Serif 4"/>
-              </a:rPr>
-              <a:t>Every student in the room</a:t>
-            </a:r>
-          </a:p>
-        </p:txBody>
-      </p:sp>
-      <p:sp>
-        <p:nvSpPr>
-          <p:cNvPr id="5" name="TextBox 4"/>
-          <p:cNvSpPr txBox="1"/>
-          <p:nvPr/>
-        </p:nvSpPr>
-        <p:spPr>
-          <a:xfrm>
-            <a:off x="548640" y="1325880"/>
-            <a:ext cx="10972800" cy="365760"/>
-          </a:xfrm>
-          <a:prstGeom prst="rect">
-            <a:avLst/>
-          </a:prstGeom>
-          <a:noFill/>
-        </p:spPr>
-        <p:txBody>
-          <a:bodyPr wrap="square" anchor="t" lIns="0" rIns="0" tIns="0" bIns="0">
-            <a:spAutoFit/>
-          </a:bodyPr>
-          <a:lstStyle/>
-          <a:p>
-            <a:pPr algn="l">
-              <a:spcAft>
-                <a:spcPts val="630"/>
-              </a:spcAft>
-            </a:pPr>
-            <a:r>
-              <a:rPr sz="1400" b="0" i="0">
+              <a:t>Over 200 hours: close friend.</a:t>
+            </a:r>
+          </a:p>
+          <a:p>
+            <a:pPr algn="l">
+              <a:spcAft>
+                <a:spcPts val="945"/>
+              </a:spcAft>
+            </a:pPr>
+            <a:r>
+              <a:rPr sz="1600" b="0" i="0">
                 <a:solidFill>
                   <a:srgbClr val="5D5A54"/>
                 </a:solidFill>
-                <a:latin typeface="Inter Tight"/>
-              </a:rPr>
-              <a:t>Culture, family, identity, ability and money: what to keep in mind for this topic.</a:t>
-            </a:r>
-          </a:p>
-        </p:txBody>
-      </p:sp>
-      <p:sp>
-        <p:nvSpPr>
-          <p:cNvPr id="6" name="TextBox 5"/>
-          <p:cNvSpPr txBox="1"/>
-          <p:nvPr/>
-        </p:nvSpPr>
-        <p:spPr>
-          <a:xfrm>
-            <a:off x="548640" y="1828800"/>
-            <a:ext cx="5394960" cy="4572000"/>
-          </a:xfrm>
-          <a:prstGeom prst="rect">
-            <a:avLst/>
-          </a:prstGeom>
-          <a:noFill/>
-        </p:spPr>
-        <p:txBody>
-          <a:bodyPr wrap="square" anchor="t" lIns="0" rIns="0" tIns="0" bIns="0">
-            <a:spAutoFit/>
-          </a:bodyPr>
-          <a:lstStyle/>
-          <a:p>
-            <a:pPr algn="l">
-              <a:spcAft>
-                <a:spcPts val="585"/>
-              </a:spcAft>
-            </a:pPr>
-            <a:r>
-              <a:rPr sz="1500" b="1" i="0">
-                <a:solidFill>
-                  <a:srgbClr val="1C1B19"/>
-                </a:solidFill>
-                <a:latin typeface="Source Serif 4"/>
-              </a:rPr>
-              <a:t>Families set different rules.</a:t>
-            </a:r>
-          </a:p>
-          <a:p>
-            <a:pPr algn="l">
-              <a:spcAft>
-                <a:spcPts val="585"/>
-              </a:spcAft>
-            </a:pPr>
-            <a:r>
-              <a:rPr sz="1300" b="0" i="0">
-                <a:solidFill>
-                  <a:srgbClr val="1C1B19"/>
-                </a:solidFill>
-                <a:latin typeface="Source Serif 4"/>
-              </a:rPr>
-              <a:t>Rides, curfews, sleepovers, and who students may spend time with vary from home to home. Name that openly and point to friendships that fit inside the rules: lunch, study groups, a program the family already trusts. "Make a specific plan" can be a plan at school.</a:t>
-            </a:r>
-          </a:p>
-          <a:p>
-            <a:pPr algn="l">
-              <a:spcAft>
-                <a:spcPts val="585"/>
-              </a:spcAft>
-            </a:pPr>
-            <a:r>
-              <a:rPr sz="1300" b="0" i="0">
-                <a:solidFill>
-                  <a:srgbClr val="1C1B19"/>
-                </a:solidFill>
-                <a:latin typeface="Source Serif 4"/>
-              </a:rPr>
-              <a:t/>
-            </a:r>
-          </a:p>
-          <a:p>
-            <a:pPr algn="l">
-              <a:spcAft>
-                <a:spcPts val="585"/>
-              </a:spcAft>
-            </a:pPr>
-            <a:r>
-              <a:rPr sz="1500" b="1" i="0">
-                <a:solidFill>
-                  <a:srgbClr val="1C1B19"/>
-                </a:solidFill>
-                <a:latin typeface="Source Serif 4"/>
-              </a:rPr>
-              <a:t>The adults at home vary too.</a:t>
-            </a:r>
-          </a:p>
-          <a:p>
-            <a:pPr algn="l">
-              <a:spcAft>
-                <a:spcPts val="585"/>
-              </a:spcAft>
-            </a:pPr>
-            <a:r>
-              <a:rPr sz="1300" b="0" i="0">
-                <a:solidFill>
-                  <a:srgbClr val="1C1B19"/>
-                </a:solidFill>
-                <a:latin typeface="Source Serif 4"/>
-              </a:rPr>
-              <a:t>Some students live with one parent, a grandparent, a foster family, or split weeks between two homes, which can cut into weekend time. Say "the adults at home" and let a plan be a lunch table or a study hall.</a:t>
-            </a:r>
-          </a:p>
-          <a:p>
-            <a:pPr algn="l">
-              <a:spcAft>
-                <a:spcPts val="585"/>
-              </a:spcAft>
-            </a:pPr>
-            <a:r>
-              <a:rPr sz="1300" b="0" i="0">
-                <a:solidFill>
-                  <a:srgbClr val="1C1B19"/>
-                </a:solidFill>
-                <a:latin typeface="Source Serif 4"/>
-              </a:rPr>
-              <a:t/>
-            </a:r>
-          </a:p>
-          <a:p>
-            <a:pPr algn="l">
-              <a:spcAft>
-                <a:spcPts val="585"/>
-              </a:spcAft>
-            </a:pPr>
-            <a:r>
-              <a:rPr sz="1500" b="1" i="0">
-                <a:solidFill>
-                  <a:srgbClr val="1C1B19"/>
-                </a:solidFill>
-                <a:latin typeface="Source Serif 4"/>
-              </a:rPr>
-              <a:t>LGBTQ+ students may find their people elsewhere.</a:t>
-            </a:r>
-          </a:p>
-          <a:p>
-            <a:pPr algn="l">
-              <a:spcAft>
-                <a:spcPts val="585"/>
-              </a:spcAft>
-            </a:pPr>
-            <a:r>
-              <a:rPr sz="1300" b="0" i="0">
-                <a:solidFill>
-                  <a:srgbClr val="1C1B19"/>
-                </a:solidFill>
-                <a:latin typeface="Source Serif 4"/>
-              </a:rPr>
-              <a:t>Some students don't see themselves reflected at school and build their closest friendships online or through outside groups. Treat those as real friendships, and keep the safety steps the same for everyone.</a:t>
-            </a:r>
-          </a:p>
-          <a:p>
-            <a:pPr algn="l">
-              <a:spcAft>
-                <a:spcPts val="585"/>
-              </a:spcAft>
-            </a:pPr>
-            <a:r>
-              <a:rPr sz="1300" b="0" i="0">
-                <a:solidFill>
-                  <a:srgbClr val="1C1B19"/>
-                </a:solidFill>
-                <a:latin typeface="Source Serif 4"/>
-              </a:rPr>
-              <a:t/>
-            </a:r>
-          </a:p>
-        </p:txBody>
-      </p:sp>
-      <p:sp>
-        <p:nvSpPr>
-          <p:cNvPr id="7" name="TextBox 6"/>
-          <p:cNvSpPr txBox="1"/>
-          <p:nvPr/>
-        </p:nvSpPr>
-        <p:spPr>
-          <a:xfrm>
-            <a:off x="6217920" y="1828800"/>
-            <a:ext cx="5394960" cy="4572000"/>
-          </a:xfrm>
-          <a:prstGeom prst="rect">
-            <a:avLst/>
-          </a:prstGeom>
-          <a:noFill/>
-        </p:spPr>
-        <p:txBody>
-          <a:bodyPr wrap="square" anchor="t" lIns="0" rIns="0" tIns="0" bIns="0">
-            <a:spAutoFit/>
-          </a:bodyPr>
-          <a:lstStyle/>
-          <a:p>
-            <a:pPr algn="l">
-              <a:spcAft>
-                <a:spcPts val="585"/>
-              </a:spcAft>
-            </a:pPr>
-            <a:r>
-              <a:rPr sz="1500" b="1" i="0">
-                <a:solidFill>
-                  <a:srgbClr val="1C1B19"/>
-                </a:solidFill>
-                <a:latin typeface="Source Serif 4"/>
-              </a:rPr>
-              <a:t>Small talk and eye contact come harder for some students.</a:t>
-            </a:r>
-          </a:p>
-          <a:p>
-            <a:pPr algn="l">
-              <a:spcAft>
-                <a:spcPts val="585"/>
-              </a:spcAft>
-            </a:pPr>
-            <a:r>
-              <a:rPr sz="1300" b="0" i="0">
-                <a:solidFill>
-                  <a:srgbClr val="1C1B19"/>
-                </a:solidFill>
-                <a:latin typeface="Source Serif 4"/>
-              </a:rPr>
-              <a:t>Autistic students and students with social anxiety may find the pair-share draining. Let them write their answer instead of saying it. Never treat speaking up or eye contact as the sign of a good friend. Social anxiety that keeps a student from things they want to do is worth a counselor's time.</a:t>
-            </a:r>
-          </a:p>
-          <a:p>
-            <a:pPr algn="l">
-              <a:spcAft>
-                <a:spcPts val="585"/>
-              </a:spcAft>
-            </a:pPr>
-            <a:r>
-              <a:rPr sz="1300" b="0" i="0">
-                <a:solidFill>
-                  <a:srgbClr val="1C1B19"/>
-                </a:solidFill>
-                <a:latin typeface="Source Serif 4"/>
-              </a:rPr>
-              <a:t/>
-            </a:r>
-          </a:p>
-          <a:p>
-            <a:pPr algn="l">
-              <a:spcAft>
-                <a:spcPts val="585"/>
-              </a:spcAft>
-            </a:pPr>
-            <a:r>
-              <a:rPr sz="1500" b="1" i="0">
-                <a:solidFill>
-                  <a:srgbClr val="1C1B19"/>
-                </a:solidFill>
-                <a:latin typeface="Source Serif 4"/>
-              </a:rPr>
-              <a:t>A repeat place doesn't have to cost money.</a:t>
-            </a:r>
-          </a:p>
-          <a:p>
-            <a:pPr algn="l">
-              <a:spcAft>
-                <a:spcPts val="585"/>
-              </a:spcAft>
-            </a:pPr>
-            <a:r>
-              <a:rPr sz="1300" b="0" i="0">
-                <a:solidFill>
-                  <a:srgbClr val="1C1B19"/>
-                </a:solidFill>
-                <a:latin typeface="Source Serif 4"/>
-              </a:rPr>
-              <a:t>Teams with fees, rides to practice, and food after the game assume money and time some students don't have. Point to free repeat places: a free club, the library, a volunteer shift, a youth group, a study group. Students who work or care for siblings at home are logging hours too.</a:t>
-            </a:r>
-          </a:p>
-          <a:p>
-            <a:pPr algn="l">
-              <a:spcAft>
-                <a:spcPts val="585"/>
-              </a:spcAft>
-            </a:pPr>
-            <a:r>
-              <a:rPr sz="1300" b="0" i="0">
-                <a:solidFill>
-                  <a:srgbClr val="1C1B19"/>
-                </a:solidFill>
-                <a:latin typeface="Source Serif 4"/>
-              </a:rPr>
-              <a:t/>
-            </a:r>
-          </a:p>
-          <a:p>
-            <a:pPr algn="l">
-              <a:spcAft>
-                <a:spcPts val="585"/>
-              </a:spcAft>
-            </a:pPr>
-            <a:r>
-              <a:rPr sz="1500" b="1" i="0">
-                <a:solidFill>
-                  <a:srgbClr val="1C1B19"/>
-                </a:solidFill>
-                <a:latin typeface="Source Serif 4"/>
-              </a:rPr>
-              <a:t>Faith and language communities count.</a:t>
-            </a:r>
-          </a:p>
-          <a:p>
-            <a:pPr algn="l">
-              <a:spcAft>
-                <a:spcPts val="585"/>
-              </a:spcAft>
-            </a:pPr>
-            <a:r>
-              <a:rPr sz="1300" b="0" i="0">
-                <a:solidFill>
-                  <a:srgbClr val="1C1B19"/>
-                </a:solidFill>
-                <a:latin typeface="Source Serif 4"/>
-              </a:rPr>
-              <a:t>For some students the people who matter most are at a mosque, church, temple, or other faith community; for others there are none. Some students new to the country keep their closest friends online in their first language. All of those count as their people.</a:t>
-            </a:r>
-          </a:p>
-          <a:p>
-            <a:pPr algn="l">
-              <a:spcAft>
-                <a:spcPts val="585"/>
-              </a:spcAft>
-            </a:pPr>
-            <a:r>
-              <a:rPr sz="1300" b="0" i="0">
-                <a:solidFill>
-                  <a:srgbClr val="1C1B19"/>
-                </a:solidFill>
-                <a:latin typeface="Source Serif 4"/>
-              </a:rPr>
-              <a:t/>
-            </a:r>
-          </a:p>
-        </p:txBody>
-      </p:sp>
-    </p:spTree>
-  </p:cSld>
-  <p:clrMapOvr>
-    <a:masterClrMapping/>
-  </p:clrMapOvr>
-</p:sld>
-</file>
-
-<file path=ppt/slides/slide4.xml><?xml version="1.0" encoding="utf-8"?>
-<p:sld xmlns:a="http://schemas.openxmlformats.org/drawingml/2006/main" xmlns:p="http://schemas.openxmlformats.org/presentationml/2006/main" xmlns:r="http://schemas.openxmlformats.org/officeDocument/2006/relationships" show="0">
-  <p:cSld>
-    <p:bg>
-      <p:bgPr>
-        <a:solidFill>
-          <a:srgbClr val="EEEBE4"/>
-        </a:solidFill>
-        <a:effectLst/>
-      </p:bgPr>
-    </p:bg>
-    <p:spTree>
-      <p:nvGrpSpPr>
-        <p:cNvPr id="1" name=""/>
-        <p:cNvGrpSpPr/>
-        <p:nvPr/>
-      </p:nvGrpSpPr>
-      <p:grpSpPr/>
-      <p:sp>
-        <p:nvSpPr>
-          <p:cNvPr id="2" name="Rectangle 1"/>
-          <p:cNvSpPr/>
-          <p:nvPr/>
-        </p:nvSpPr>
-        <p:spPr>
-          <a:xfrm>
-            <a:off x="0" y="0"/>
-            <a:ext cx="12191695" cy="384048"/>
-          </a:xfrm>
-          <a:prstGeom prst="rect">
-            <a:avLst/>
-          </a:prstGeom>
-          <a:solidFill>
-            <a:srgbClr val="0B2D5B"/>
-          </a:solidFill>
-          <a:ln>
-            <a:noFill/>
-          </a:ln>
-          <a:effectLst/>
-        </p:spPr>
-        <p:style>
-          <a:lnRef idx="1">
-            <a:schemeClr val="accent1"/>
-          </a:lnRef>
-          <a:fillRef idx="3">
-            <a:schemeClr val="accent1"/>
-          </a:fillRef>
-          <a:effectRef idx="2">
-            <a:schemeClr val="accent1"/>
-          </a:effectRef>
-          <a:fontRef idx="minor">
-            <a:schemeClr val="lt1"/>
-          </a:fontRef>
-        </p:style>
-        <p:txBody>
-          <a:bodyPr rtlCol="0" anchor="ctr"/>
-          <a:lstStyle/>
-          <a:p>
-            <a:pPr algn="ctr"/>
-          </a:p>
-        </p:txBody>
-      </p:sp>
-      <p:sp>
-        <p:nvSpPr>
-          <p:cNvPr id="3" name="TextBox 2"/>
-          <p:cNvSpPr txBox="1"/>
-          <p:nvPr/>
-        </p:nvSpPr>
-        <p:spPr>
-          <a:xfrm>
-            <a:off x="548640" y="100584"/>
-            <a:ext cx="10972800" cy="274320"/>
-          </a:xfrm>
-          <a:prstGeom prst="rect">
-            <a:avLst/>
-          </a:prstGeom>
-          <a:noFill/>
-        </p:spPr>
-        <p:txBody>
-          <a:bodyPr wrap="square" anchor="t" lIns="0" rIns="0" tIns="0" bIns="0">
-            <a:spAutoFit/>
-          </a:bodyPr>
-          <a:lstStyle/>
-          <a:p>
-            <a:pPr algn="l">
-              <a:spcAft>
-                <a:spcPts val="495"/>
-              </a:spcAft>
-            </a:pPr>
-            <a:r>
-              <a:rPr sz="1100" b="1" i="0">
-                <a:solidFill>
-                  <a:srgbClr val="FFFFFF"/>
-                </a:solidFill>
-                <a:latin typeface="Inter Tight"/>
-              </a:rPr>
-              <a:t>TEACHER PAGE  ·  skipped when you present  ·  Background</a:t>
-            </a:r>
-          </a:p>
-        </p:txBody>
-      </p:sp>
-      <p:sp>
-        <p:nvSpPr>
-          <p:cNvPr id="4" name="TextBox 3"/>
-          <p:cNvSpPr txBox="1"/>
-          <p:nvPr/>
-        </p:nvSpPr>
-        <p:spPr>
-          <a:xfrm>
-            <a:off x="548640" y="685800"/>
-            <a:ext cx="10972800" cy="640080"/>
-          </a:xfrm>
-          <a:prstGeom prst="rect">
-            <a:avLst/>
-          </a:prstGeom>
-          <a:noFill/>
-        </p:spPr>
-        <p:txBody>
-          <a:bodyPr wrap="square" anchor="t" lIns="0" rIns="0" tIns="0" bIns="0">
-            <a:spAutoFit/>
-          </a:bodyPr>
-          <a:lstStyle/>
-          <a:p>
-            <a:pPr algn="l">
-              <a:spcAft>
-                <a:spcPts val="1350"/>
-              </a:spcAft>
-            </a:pPr>
-            <a:r>
-              <a:rPr sz="3000" b="1" i="0">
-                <a:solidFill>
-                  <a:srgbClr val="1C1B19"/>
-                </a:solidFill>
-                <a:latin typeface="Source Serif 4"/>
-              </a:rPr>
-              <a:t>What the research says</a:t>
-            </a:r>
-          </a:p>
-        </p:txBody>
-      </p:sp>
-      <p:sp>
-        <p:nvSpPr>
-          <p:cNvPr id="5" name="TextBox 4"/>
-          <p:cNvSpPr txBox="1"/>
-          <p:nvPr/>
-        </p:nvSpPr>
-        <p:spPr>
-          <a:xfrm>
-            <a:off x="548640" y="1463040"/>
-            <a:ext cx="5394960" cy="4937760"/>
-          </a:xfrm>
-          <a:prstGeom prst="rect">
-            <a:avLst/>
-          </a:prstGeom>
-          <a:noFill/>
-        </p:spPr>
-        <p:txBody>
-          <a:bodyPr wrap="square" anchor="t" lIns="0" rIns="0" tIns="0" bIns="0">
-            <a:spAutoFit/>
-          </a:bodyPr>
-          <a:lstStyle/>
-          <a:p>
-            <a:pPr algn="l">
-              <a:spcAft>
-                <a:spcPts val="585"/>
-              </a:spcAft>
-            </a:pPr>
-            <a:r>
-              <a:rPr sz="1300" b="0" i="0">
-                <a:solidFill>
-                  <a:srgbClr val="1C1B19"/>
-                </a:solidFill>
-                <a:latin typeface="Source Serif 4"/>
-              </a:rPr>
-              <a:t>Adults who had just moved and college first-years took about 50 hours together to become casual friends, about 90 to become friends, and over 200 to become close friends. Estimates vary a lot by person.</a:t>
-            </a:r>
-          </a:p>
-          <a:p>
-            <a:pPr algn="l">
-              <a:spcAft>
-                <a:spcPts val="585"/>
-              </a:spcAft>
-            </a:pPr>
-            <a:r>
-              <a:rPr sz="1050" b="0" i="0">
-                <a:solidFill>
-                  <a:srgbClr val="5D5A54"/>
-                </a:solidFill>
-                <a:latin typeface="Inter Tight"/>
-              </a:rPr>
-              <a:t>Hall, Journal of Social and Personal Relationships, 2019</a:t>
-            </a:r>
-          </a:p>
-          <a:p>
-            <a:pPr algn="l">
-              <a:spcAft>
-                <a:spcPts val="585"/>
-              </a:spcAft>
-            </a:pPr>
-            <a:r>
-              <a:rPr sz="1300" b="0" i="0">
-                <a:solidFill>
-                  <a:srgbClr val="1C1B19"/>
-                </a:solidFill>
-                <a:latin typeface="Source Serif 4"/>
-              </a:rPr>
-              <a:t>University students randomly assigned seats on the first day were more likely to be friends a year later with the people who sat next to them or in the same row.</a:t>
-            </a:r>
-          </a:p>
-          <a:p>
-            <a:pPr algn="l">
-              <a:spcAft>
-                <a:spcPts val="585"/>
-              </a:spcAft>
-            </a:pPr>
-            <a:r>
-              <a:rPr sz="1050" b="0" i="0">
-                <a:solidFill>
-                  <a:srgbClr val="5D5A54"/>
-                </a:solidFill>
-                <a:latin typeface="Inter Tight"/>
-              </a:rPr>
-              <a:t>Back, Schmukle and Egloff, Psychological Science, 2008</a:t>
-            </a:r>
-          </a:p>
-          <a:p>
-            <a:pPr algn="l">
-              <a:spcAft>
-                <a:spcPts val="585"/>
-              </a:spcAft>
-            </a:pPr>
-            <a:r>
-              <a:rPr sz="1300" b="0" i="0">
-                <a:solidFill>
-                  <a:srgbClr val="1C1B19"/>
-                </a:solidFill>
-                <a:latin typeface="Source Serif 4"/>
-              </a:rPr>
-              <a:t>Across five studies, people who had just talked with someone new underestimated how much the other person liked them. Among college roommates, the gap lasted most of the school year.</a:t>
-            </a:r>
-          </a:p>
-          <a:p>
-            <a:pPr algn="l">
-              <a:spcAft>
-                <a:spcPts val="585"/>
-              </a:spcAft>
-            </a:pPr>
-            <a:r>
-              <a:rPr sz="1050" b="0" i="0">
-                <a:solidFill>
-                  <a:srgbClr val="5D5A54"/>
-                </a:solidFill>
-                <a:latin typeface="Inter Tight"/>
-              </a:rPr>
-              <a:t>Boothby et al., Psychological Science, 2018</a:t>
-            </a:r>
-          </a:p>
-        </p:txBody>
-      </p:sp>
-      <p:sp>
-        <p:nvSpPr>
-          <p:cNvPr id="6" name="TextBox 5"/>
-          <p:cNvSpPr txBox="1"/>
-          <p:nvPr/>
-        </p:nvSpPr>
-        <p:spPr>
-          <a:xfrm>
-            <a:off x="6217920" y="1463040"/>
-            <a:ext cx="5394960" cy="4937760"/>
-          </a:xfrm>
-          <a:prstGeom prst="rect">
-            <a:avLst/>
-          </a:prstGeom>
-          <a:noFill/>
-        </p:spPr>
-        <p:txBody>
-          <a:bodyPr wrap="square" anchor="t" lIns="0" rIns="0" tIns="0" bIns="0">
-            <a:spAutoFit/>
-          </a:bodyPr>
-          <a:lstStyle/>
-          <a:p>
-            <a:pPr algn="l">
-              <a:spcAft>
-                <a:spcPts val="585"/>
-              </a:spcAft>
-            </a:pPr>
-            <a:r>
-              <a:rPr sz="1300" b="0" i="0">
-                <a:solidFill>
-                  <a:srgbClr val="1C1B19"/>
-                </a:solidFill>
-                <a:latin typeface="Source Serif 4"/>
-              </a:rPr>
-              <a:t>Strangers asked to talk about meaningful things found it less awkward and more connecting than they expected. People assume others only want small talk.</a:t>
-            </a:r>
-          </a:p>
-          <a:p>
-            <a:pPr algn="l">
-              <a:spcAft>
-                <a:spcPts val="585"/>
-              </a:spcAft>
-            </a:pPr>
-            <a:r>
-              <a:rPr sz="1050" b="0" i="0">
-                <a:solidFill>
-                  <a:srgbClr val="5D5A54"/>
-                </a:solidFill>
-                <a:latin typeface="Inter Tight"/>
-              </a:rPr>
-              <a:t>Kardas, Kumar and Epley, Journal of Personality and Social Psychology, 2022</a:t>
-            </a:r>
-          </a:p>
-          <a:p>
-            <a:pPr algn="l">
-              <a:spcAft>
-                <a:spcPts val="585"/>
-              </a:spcAft>
-            </a:pPr>
-            <a:r>
-              <a:rPr sz="1300" b="0" i="0">
-                <a:solidFill>
-                  <a:srgbClr val="1C1B19"/>
-                </a:solidFill>
-                <a:latin typeface="Source Serif 4"/>
-              </a:rPr>
-              <a:t>169 teens followed from 15 to 25: a strong close friendship at 15 predicted more self-worth and less anxiety and depression by the mid-20s. Being popular with the broader group did not, and went with more social anxiety later. One study, a link and not proof of cause.</a:t>
-            </a:r>
-          </a:p>
-          <a:p>
-            <a:pPr algn="l">
-              <a:spcAft>
-                <a:spcPts val="585"/>
-              </a:spcAft>
-            </a:pPr>
-            <a:r>
-              <a:rPr sz="1050" b="0" i="0">
-                <a:solidFill>
-                  <a:srgbClr val="5D5A54"/>
-                </a:solidFill>
-                <a:latin typeface="Inter Tight"/>
-              </a:rPr>
-              <a:t>Narr et al., Child Development, 2019 (University of Virginia)</a:t>
-            </a:r>
-          </a:p>
-          <a:p>
-            <a:pPr algn="l">
-              <a:spcAft>
-                <a:spcPts val="585"/>
-              </a:spcAft>
-            </a:pPr>
-            <a:r>
-              <a:rPr sz="1300" b="0" i="0">
-                <a:solidFill>
-                  <a:srgbClr val="1C1B19"/>
-                </a:solidFill>
-                <a:latin typeface="Source Serif 4"/>
-              </a:rPr>
-              <a:t>Young people's time spent in person with friends dropped by nearly 70% over about two decades.</a:t>
-            </a:r>
-          </a:p>
-          <a:p>
-            <a:pPr algn="l">
-              <a:spcAft>
-                <a:spcPts val="585"/>
-              </a:spcAft>
-            </a:pPr>
-            <a:r>
-              <a:rPr sz="1050" b="0" i="0">
-                <a:solidFill>
-                  <a:srgbClr val="5D5A54"/>
-                </a:solidFill>
-                <a:latin typeface="Inter Tight"/>
-              </a:rPr>
-              <a:t>U.S. Surgeon General's Advisory on Loneliness and Isolation, 2023</a:t>
-            </a:r>
-          </a:p>
-        </p:txBody>
-      </p:sp>
-    </p:spTree>
-  </p:cSld>
-  <p:clrMapOvr>
-    <a:masterClrMapping/>
-  </p:clrMapOvr>
-</p:sld>
-</file>
-
-<file path=ppt/slides/slide5.xml><?xml version="1.0" encoding="utf-8"?>
-<p:sld xmlns:a="http://schemas.openxmlformats.org/drawingml/2006/main" xmlns:p="http://schemas.openxmlformats.org/presentationml/2006/main" xmlns:r="http://schemas.openxmlformats.org/officeDocument/2006/relationships">
-  <p:cSld>
-    <p:bg>
-      <p:bgPr>
-        <a:solidFill>
-          <a:srgbClr val="0B2D5B"/>
-        </a:solidFill>
-        <a:effectLst/>
-      </p:bgPr>
-    </p:bg>
-    <p:spTree>
-      <p:nvGrpSpPr>
-        <p:cNvPr id="1" name=""/>
-        <p:cNvGrpSpPr/>
-        <p:nvPr/>
-      </p:nvGrpSpPr>
-      <p:grpSpPr/>
-      <p:sp>
-        <p:nvSpPr>
-          <p:cNvPr id="2" name="Rectangle 1"/>
-          <p:cNvSpPr/>
-          <p:nvPr/>
-        </p:nvSpPr>
-        <p:spPr>
-          <a:xfrm>
-            <a:off x="548640" y="502920"/>
-            <a:ext cx="457200" cy="54864"/>
-          </a:xfrm>
-          <a:prstGeom prst="rect">
-            <a:avLst/>
-          </a:prstGeom>
-          <a:solidFill>
-            <a:srgbClr val="F47B20"/>
-          </a:solidFill>
-          <a:ln>
-            <a:noFill/>
-          </a:ln>
-          <a:effectLst/>
-        </p:spPr>
-        <p:style>
-          <a:lnRef idx="1">
-            <a:schemeClr val="accent1"/>
-          </a:lnRef>
-          <a:fillRef idx="3">
-            <a:schemeClr val="accent1"/>
-          </a:fillRef>
-          <a:effectRef idx="2">
-            <a:schemeClr val="accent1"/>
-          </a:effectRef>
-          <a:fontRef idx="minor">
-            <a:schemeClr val="lt1"/>
-          </a:fontRef>
-        </p:style>
-        <p:txBody>
-          <a:bodyPr rtlCol="0" anchor="ctr"/>
-          <a:lstStyle/>
-          <a:p>
-            <a:pPr algn="ctr"/>
-          </a:p>
-        </p:txBody>
-      </p:sp>
-      <p:sp>
-        <p:nvSpPr>
-          <p:cNvPr id="3" name="TextBox 2"/>
-          <p:cNvSpPr txBox="1"/>
-          <p:nvPr/>
-        </p:nvSpPr>
-        <p:spPr>
-          <a:xfrm>
-            <a:off x="1143000" y="393192"/>
-            <a:ext cx="8229600" cy="274320"/>
-          </a:xfrm>
-          <a:prstGeom prst="rect">
-            <a:avLst/>
-          </a:prstGeom>
-          <a:noFill/>
-        </p:spPr>
-        <p:txBody>
-          <a:bodyPr wrap="square" anchor="t" lIns="0" rIns="0" tIns="0" bIns="0">
-            <a:spAutoFit/>
-          </a:bodyPr>
-          <a:lstStyle/>
-          <a:p>
-            <a:pPr algn="l">
-              <a:spcAft>
-                <a:spcPts val="540"/>
-              </a:spcAft>
-            </a:pPr>
-            <a:r>
-              <a:rPr sz="1200" b="1" i="0">
-                <a:solidFill>
-                  <a:srgbClr val="5D5A54"/>
-                </a:solidFill>
-                <a:latin typeface="Inter Tight"/>
-              </a:rPr>
-              <a:t>FINDING YOUR PEOPLE</a:t>
-            </a:r>
-          </a:p>
-        </p:txBody>
-      </p:sp>
-      <p:sp>
-        <p:nvSpPr>
-          <p:cNvPr id="4" name="TextBox 3"/>
-          <p:cNvSpPr txBox="1"/>
-          <p:nvPr/>
-        </p:nvSpPr>
-        <p:spPr>
-          <a:xfrm>
-            <a:off x="8229600" y="6400800"/>
-            <a:ext cx="3410712" cy="274320"/>
-          </a:xfrm>
-          <a:prstGeom prst="rect">
-            <a:avLst/>
-          </a:prstGeom>
-          <a:noFill/>
-        </p:spPr>
-        <p:txBody>
-          <a:bodyPr wrap="square" anchor="t" lIns="0" rIns="0" tIns="0" bIns="0">
-            <a:spAutoFit/>
-          </a:bodyPr>
-          <a:lstStyle/>
-          <a:p>
-            <a:pPr algn="r">
-              <a:spcAft>
-                <a:spcPts val="450"/>
-              </a:spcAft>
-            </a:pPr>
-            <a:r>
-              <a:rPr sz="1000" b="0" i="0">
-                <a:solidFill>
-                  <a:srgbClr val="5D5A54"/>
-                </a:solidFill>
-                <a:latin typeface="Inter Tight"/>
-              </a:rPr>
-              <a:t>Beaver Counseling</a:t>
-            </a:r>
-          </a:p>
-        </p:txBody>
-      </p:sp>
-      <p:sp>
-        <p:nvSpPr>
-          <p:cNvPr id="5" name="TextBox 4"/>
-          <p:cNvSpPr txBox="1"/>
-          <p:nvPr/>
-        </p:nvSpPr>
-        <p:spPr>
-          <a:xfrm>
-            <a:off x="822960" y="2011680"/>
-            <a:ext cx="10515600" cy="1463040"/>
-          </a:xfrm>
-          <a:prstGeom prst="rect">
-            <a:avLst/>
-          </a:prstGeom>
-          <a:noFill/>
-        </p:spPr>
-        <p:txBody>
-          <a:bodyPr wrap="square" anchor="b" lIns="0" rIns="0" tIns="0" bIns="0">
-            <a:spAutoFit/>
-          </a:bodyPr>
-          <a:lstStyle/>
-          <a:p>
-            <a:pPr algn="l">
-              <a:spcAft>
-                <a:spcPts val="2700"/>
-              </a:spcAft>
-            </a:pPr>
-            <a:r>
-              <a:rPr sz="6000" b="1" i="0">
-                <a:solidFill>
-                  <a:srgbClr val="FFFFFF"/>
-                </a:solidFill>
-                <a:latin typeface="Source Serif 4"/>
-              </a:rPr>
-              <a:t>Finding Your People</a:t>
-            </a:r>
-          </a:p>
-        </p:txBody>
-      </p:sp>
-      <p:sp>
-        <p:nvSpPr>
-          <p:cNvPr id="6" name="TextBox 5"/>
-          <p:cNvSpPr txBox="1"/>
-          <p:nvPr/>
-        </p:nvSpPr>
-        <p:spPr>
-          <a:xfrm>
-            <a:off x="822960" y="3611880"/>
-            <a:ext cx="10515600" cy="914400"/>
-          </a:xfrm>
-          <a:prstGeom prst="rect">
-            <a:avLst/>
-          </a:prstGeom>
-          <a:noFill/>
-        </p:spPr>
-        <p:txBody>
-          <a:bodyPr wrap="square" anchor="t" lIns="0" rIns="0" tIns="0" bIns="0">
-            <a:spAutoFit/>
-          </a:bodyPr>
-          <a:lstStyle/>
-          <a:p>
-            <a:pPr algn="l">
-              <a:spcAft>
-                <a:spcPts val="1080"/>
-              </a:spcAft>
-            </a:pPr>
-            <a:r>
-              <a:rPr sz="2400" b="0" i="1">
-                <a:solidFill>
-                  <a:srgbClr val="E8E4DA"/>
-                </a:solidFill>
-                <a:latin typeface="Source Serif 4"/>
-              </a:rPr>
-              <a:t>Where you fit, and how long it takes.</a:t>
-            </a:r>
-          </a:p>
-        </p:txBody>
-      </p:sp>
-      <p:sp>
-        <p:nvSpPr>
-          <p:cNvPr id="7" name="TextBox 6"/>
-          <p:cNvSpPr txBox="1"/>
-          <p:nvPr/>
-        </p:nvSpPr>
-        <p:spPr>
-          <a:xfrm>
-            <a:off x="822960" y="6035040"/>
-            <a:ext cx="7315200" cy="365760"/>
-          </a:xfrm>
-          <a:prstGeom prst="rect">
-            <a:avLst/>
-          </a:prstGeom>
-          <a:noFill/>
-        </p:spPr>
-        <p:txBody>
-          <a:bodyPr wrap="square" anchor="t" lIns="0" rIns="0" tIns="0" bIns="0">
-            <a:spAutoFit/>
-          </a:bodyPr>
-          <a:lstStyle/>
-          <a:p>
-            <a:pPr algn="l">
-              <a:spcAft>
-                <a:spcPts val="585"/>
-              </a:spcAft>
-            </a:pPr>
-            <a:r>
-              <a:rPr sz="1300" b="0" i="0">
-                <a:solidFill>
-                  <a:srgbClr val="E8E4DA"/>
-                </a:solidFill>
-                <a:latin typeface="Inter Tight"/>
-              </a:rPr>
-              <a:t>Beaver Upper School · Counseling</a:t>
+                <a:latin typeface="Source Serif 4"/>
+              </a:rPr>
+              <a:t>You can say the real thing to them.</a:t>
             </a:r>
           </a:p>
         </p:txBody>
@@ -8525,7 +9277,7 @@
                 </a:solidFill>
                 <a:latin typeface="Inter Tight"/>
               </a:rPr>
-              <a:t>MYTH OR FACT?</a:t>
+              <a:t>THE LIKING GAP</a:t>
             </a:r>
           </a:p>
         </p:txBody>
@@ -8577,7 +9329,46 @@
         </p:nvSpPr>
         <p:spPr>
           <a:xfrm>
-            <a:off x="822960" y="1005840"/>
+            <a:off x="822960" y="1463040"/>
+            <a:ext cx="10515600" cy="3291840"/>
+          </a:xfrm>
+          <a:prstGeom prst="rect">
+            <a:avLst/>
+          </a:prstGeom>
+          <a:noFill/>
+        </p:spPr>
+        <p:txBody>
+          <a:bodyPr wrap="square" anchor="ctr" lIns="0" rIns="0" tIns="0" bIns="0">
+            <a:spAutoFit/>
+          </a:bodyPr>
+          <a:lstStyle/>
+          <a:p>
+            <a:pPr algn="l">
+              <a:spcAft>
+                <a:spcPts val="2070"/>
+              </a:spcAft>
+            </a:pPr>
+            <a:r>
+              <a:rPr sz="4600" b="1" i="0">
+                <a:solidFill>
+                  <a:srgbClr val="1C1B19"/>
+                </a:solidFill>
+                <a:latin typeface="Source Serif 4"/>
+              </a:rPr>
+              <a:t>They liked you more than you think.</a:t>
+            </a:r>
+          </a:p>
+        </p:txBody>
+      </p:sp>
+      <p:sp>
+        <p:nvSpPr>
+          <p:cNvPr id="6" name="TextBox 5"/>
+          <p:cNvSpPr txBox="1"/>
+          <p:nvPr/>
+        </p:nvSpPr>
+        <p:spPr>
+          <a:xfrm>
+            <a:off x="822960" y="4846320"/>
             <a:ext cx="10515600" cy="1097280"/>
           </a:xfrm>
           <a:prstGeom prst="rect">
@@ -8593,407 +9384,17 @@
           <a:p>
             <a:pPr algn="l">
               <a:spcAft>
-                <a:spcPts val="1620"/>
-              </a:spcAft>
-            </a:pPr>
-            <a:r>
-              <a:rPr sz="3600" b="1" i="0">
-                <a:solidFill>
-                  <a:srgbClr val="1C1B19"/>
-                </a:solidFill>
-                <a:latin typeface="Source Serif 4"/>
-              </a:rPr>
-              <a:t>Stand up if you think it's a fact.</a:t>
-            </a:r>
-          </a:p>
-        </p:txBody>
-      </p:sp>
-      <p:sp>
-        <p:nvSpPr>
-          <p:cNvPr id="6" name="TextBox 5"/>
-          <p:cNvSpPr txBox="1"/>
-          <p:nvPr/>
-        </p:nvSpPr>
-        <p:spPr>
-          <a:xfrm>
-            <a:off x="822960" y="2057400"/>
-            <a:ext cx="548640" cy="804672"/>
-          </a:xfrm>
-          <a:prstGeom prst="rect">
-            <a:avLst/>
-          </a:prstGeom>
-          <a:noFill/>
-        </p:spPr>
-        <p:txBody>
-          <a:bodyPr wrap="square" anchor="t" lIns="0" rIns="0" tIns="0" bIns="0">
-            <a:spAutoFit/>
-          </a:bodyPr>
-          <a:lstStyle/>
-          <a:p>
-            <a:pPr algn="l">
-              <a:spcAft>
-                <a:spcPts val="1170"/>
-              </a:spcAft>
-            </a:pPr>
-            <a:r>
-              <a:rPr sz="2600" b="1" i="0">
-                <a:solidFill>
-                  <a:srgbClr val="F47B20"/>
-                </a:solidFill>
-                <a:latin typeface="Source Serif 4"/>
-              </a:rPr>
-              <a:t>1</a:t>
-            </a:r>
-          </a:p>
-        </p:txBody>
-      </p:sp>
-      <p:sp>
-        <p:nvSpPr>
-          <p:cNvPr id="7" name="TextBox 6"/>
-          <p:cNvSpPr txBox="1"/>
-          <p:nvPr/>
-        </p:nvSpPr>
-        <p:spPr>
-          <a:xfrm>
-            <a:off x="1463040" y="2093976"/>
-            <a:ext cx="9875520" cy="804672"/>
-          </a:xfrm>
-          <a:prstGeom prst="rect">
-            <a:avLst/>
-          </a:prstGeom>
-          <a:noFill/>
-        </p:spPr>
-        <p:txBody>
-          <a:bodyPr wrap="square" anchor="t" lIns="0" rIns="0" tIns="0" bIns="0">
-            <a:spAutoFit/>
-          </a:bodyPr>
-          <a:lstStyle/>
-          <a:p>
-            <a:pPr algn="l">
-              <a:spcAft>
-                <a:spcPts val="945"/>
-              </a:spcAft>
-            </a:pPr>
-            <a:r>
-              <a:rPr sz="2100" b="1" i="0">
-                <a:solidFill>
-                  <a:srgbClr val="1C1B19"/>
-                </a:solidFill>
-                <a:latin typeface="Source Serif 4"/>
-              </a:rPr>
-              <a:t>Friendship either clicks or it doesn't.</a:t>
-            </a:r>
-          </a:p>
-        </p:txBody>
-      </p:sp>
-      <p:sp>
-        <p:nvSpPr>
-          <p:cNvPr id="8" name="TextBox 7"/>
-          <p:cNvSpPr txBox="1"/>
-          <p:nvPr/>
-        </p:nvSpPr>
-        <p:spPr>
-          <a:xfrm>
-            <a:off x="822960" y="2862072"/>
-            <a:ext cx="548640" cy="804672"/>
-          </a:xfrm>
-          <a:prstGeom prst="rect">
-            <a:avLst/>
-          </a:prstGeom>
-          <a:noFill/>
-        </p:spPr>
-        <p:txBody>
-          <a:bodyPr wrap="square" anchor="t" lIns="0" rIns="0" tIns="0" bIns="0">
-            <a:spAutoFit/>
-          </a:bodyPr>
-          <a:lstStyle/>
-          <a:p>
-            <a:pPr algn="l">
-              <a:spcAft>
-                <a:spcPts val="1170"/>
-              </a:spcAft>
-            </a:pPr>
-            <a:r>
-              <a:rPr sz="2600" b="1" i="0">
-                <a:solidFill>
-                  <a:srgbClr val="F47B20"/>
-                </a:solidFill>
-                <a:latin typeface="Source Serif 4"/>
-              </a:rPr>
-              <a:t>2</a:t>
-            </a:r>
-          </a:p>
-        </p:txBody>
-      </p:sp>
-      <p:sp>
-        <p:nvSpPr>
-          <p:cNvPr id="9" name="TextBox 8"/>
-          <p:cNvSpPr txBox="1"/>
-          <p:nvPr/>
-        </p:nvSpPr>
-        <p:spPr>
-          <a:xfrm>
-            <a:off x="1463040" y="2898648"/>
-            <a:ext cx="9875520" cy="804672"/>
-          </a:xfrm>
-          <a:prstGeom prst="rect">
-            <a:avLst/>
-          </a:prstGeom>
-          <a:noFill/>
-        </p:spPr>
-        <p:txBody>
-          <a:bodyPr wrap="square" anchor="t" lIns="0" rIns="0" tIns="0" bIns="0">
-            <a:spAutoFit/>
-          </a:bodyPr>
-          <a:lstStyle/>
-          <a:p>
-            <a:pPr algn="l">
-              <a:spcAft>
-                <a:spcPts val="945"/>
-              </a:spcAft>
-            </a:pPr>
-            <a:r>
-              <a:rPr sz="2100" b="1" i="0">
-                <a:solidFill>
-                  <a:srgbClr val="1C1B19"/>
-                </a:solidFill>
-                <a:latin typeface="Source Serif 4"/>
-              </a:rPr>
-              <a:t>If they wanted to hang out, they'd ask.</a:t>
-            </a:r>
-          </a:p>
-        </p:txBody>
-      </p:sp>
-      <p:sp>
-        <p:nvSpPr>
-          <p:cNvPr id="10" name="TextBox 9"/>
-          <p:cNvSpPr txBox="1"/>
-          <p:nvPr/>
-        </p:nvSpPr>
-        <p:spPr>
-          <a:xfrm>
-            <a:off x="822960" y="3666744"/>
-            <a:ext cx="548640" cy="804672"/>
-          </a:xfrm>
-          <a:prstGeom prst="rect">
-            <a:avLst/>
-          </a:prstGeom>
-          <a:noFill/>
-        </p:spPr>
-        <p:txBody>
-          <a:bodyPr wrap="square" anchor="t" lIns="0" rIns="0" tIns="0" bIns="0">
-            <a:spAutoFit/>
-          </a:bodyPr>
-          <a:lstStyle/>
-          <a:p>
-            <a:pPr algn="l">
-              <a:spcAft>
-                <a:spcPts val="1170"/>
-              </a:spcAft>
-            </a:pPr>
-            <a:r>
-              <a:rPr sz="2600" b="1" i="0">
-                <a:solidFill>
-                  <a:srgbClr val="F47B20"/>
-                </a:solidFill>
-                <a:latin typeface="Source Serif 4"/>
-              </a:rPr>
-              <a:t>3</a:t>
-            </a:r>
-          </a:p>
-        </p:txBody>
-      </p:sp>
-      <p:sp>
-        <p:nvSpPr>
-          <p:cNvPr id="11" name="TextBox 10"/>
-          <p:cNvSpPr txBox="1"/>
-          <p:nvPr/>
-        </p:nvSpPr>
-        <p:spPr>
-          <a:xfrm>
-            <a:off x="1463040" y="3703320"/>
-            <a:ext cx="9875520" cy="804672"/>
-          </a:xfrm>
-          <a:prstGeom prst="rect">
-            <a:avLst/>
-          </a:prstGeom>
-          <a:noFill/>
-        </p:spPr>
-        <p:txBody>
-          <a:bodyPr wrap="square" anchor="t" lIns="0" rIns="0" tIns="0" bIns="0">
-            <a:spAutoFit/>
-          </a:bodyPr>
-          <a:lstStyle/>
-          <a:p>
-            <a:pPr algn="l">
-              <a:spcAft>
-                <a:spcPts val="945"/>
-              </a:spcAft>
-            </a:pPr>
-            <a:r>
-              <a:rPr sz="2100" b="1" i="0">
-                <a:solidFill>
-                  <a:srgbClr val="1C1B19"/>
-                </a:solidFill>
-                <a:latin typeface="Source Serif 4"/>
-              </a:rPr>
-              <a:t>Where you sit can shape who your friends are.</a:t>
-            </a:r>
-          </a:p>
-        </p:txBody>
-      </p:sp>
-      <p:sp>
-        <p:nvSpPr>
-          <p:cNvPr id="12" name="TextBox 11"/>
-          <p:cNvSpPr txBox="1"/>
-          <p:nvPr/>
-        </p:nvSpPr>
-        <p:spPr>
-          <a:xfrm>
-            <a:off x="822960" y="4471416"/>
-            <a:ext cx="548640" cy="804672"/>
-          </a:xfrm>
-          <a:prstGeom prst="rect">
-            <a:avLst/>
-          </a:prstGeom>
-          <a:noFill/>
-        </p:spPr>
-        <p:txBody>
-          <a:bodyPr wrap="square" anchor="t" lIns="0" rIns="0" tIns="0" bIns="0">
-            <a:spAutoFit/>
-          </a:bodyPr>
-          <a:lstStyle/>
-          <a:p>
-            <a:pPr algn="l">
-              <a:spcAft>
-                <a:spcPts val="1170"/>
-              </a:spcAft>
-            </a:pPr>
-            <a:r>
-              <a:rPr sz="2600" b="1" i="0">
-                <a:solidFill>
-                  <a:srgbClr val="F47B20"/>
-                </a:solidFill>
-                <a:latin typeface="Source Serif 4"/>
-              </a:rPr>
-              <a:t>4</a:t>
-            </a:r>
-          </a:p>
-        </p:txBody>
-      </p:sp>
-      <p:sp>
-        <p:nvSpPr>
-          <p:cNvPr id="13" name="TextBox 12"/>
-          <p:cNvSpPr txBox="1"/>
-          <p:nvPr/>
-        </p:nvSpPr>
-        <p:spPr>
-          <a:xfrm>
-            <a:off x="1463040" y="4507992"/>
-            <a:ext cx="9875520" cy="804672"/>
-          </a:xfrm>
-          <a:prstGeom prst="rect">
-            <a:avLst/>
-          </a:prstGeom>
-          <a:noFill/>
-        </p:spPr>
-        <p:txBody>
-          <a:bodyPr wrap="square" anchor="t" lIns="0" rIns="0" tIns="0" bIns="0">
-            <a:spAutoFit/>
-          </a:bodyPr>
-          <a:lstStyle/>
-          <a:p>
-            <a:pPr algn="l">
-              <a:spcAft>
-                <a:spcPts val="945"/>
-              </a:spcAft>
-            </a:pPr>
-            <a:r>
-              <a:rPr sz="2100" b="1" i="0">
-                <a:solidFill>
-                  <a:srgbClr val="1C1B19"/>
-                </a:solidFill>
-                <a:latin typeface="Source Serif 4"/>
-              </a:rPr>
-              <a:t>More followers means more friends.</a:t>
-            </a:r>
-          </a:p>
-        </p:txBody>
-      </p:sp>
-      <p:sp>
-        <p:nvSpPr>
-          <p:cNvPr id="14" name="TextBox 13"/>
-          <p:cNvSpPr txBox="1"/>
-          <p:nvPr/>
-        </p:nvSpPr>
-        <p:spPr>
-          <a:xfrm>
-            <a:off x="822960" y="5276088"/>
-            <a:ext cx="548640" cy="804672"/>
-          </a:xfrm>
-          <a:prstGeom prst="rect">
-            <a:avLst/>
-          </a:prstGeom>
-          <a:noFill/>
-        </p:spPr>
-        <p:txBody>
-          <a:bodyPr wrap="square" anchor="t" lIns="0" rIns="0" tIns="0" bIns="0">
-            <a:spAutoFit/>
-          </a:bodyPr>
-          <a:lstStyle/>
-          <a:p>
-            <a:pPr algn="l">
-              <a:spcAft>
-                <a:spcPts val="1170"/>
-              </a:spcAft>
-            </a:pPr>
-            <a:r>
-              <a:rPr sz="2600" b="1" i="0">
-                <a:solidFill>
-                  <a:srgbClr val="F47B20"/>
-                </a:solidFill>
-                <a:latin typeface="Source Serif 4"/>
-              </a:rPr>
-              <a:t>5</a:t>
-            </a:r>
-          </a:p>
-        </p:txBody>
-      </p:sp>
-      <p:sp>
-        <p:nvSpPr>
-          <p:cNvPr id="15" name="TextBox 14"/>
-          <p:cNvSpPr txBox="1"/>
-          <p:nvPr/>
-        </p:nvSpPr>
-        <p:spPr>
-          <a:xfrm>
-            <a:off x="1463040" y="5312664"/>
-            <a:ext cx="9875520" cy="804672"/>
-          </a:xfrm>
-          <a:prstGeom prst="rect">
-            <a:avLst/>
-          </a:prstGeom>
-          <a:noFill/>
-        </p:spPr>
-        <p:txBody>
-          <a:bodyPr wrap="square" anchor="t" lIns="0" rIns="0" tIns="0" bIns="0">
-            <a:spAutoFit/>
-          </a:bodyPr>
-          <a:lstStyle/>
-          <a:p>
-            <a:pPr algn="l">
-              <a:spcAft>
-                <a:spcPts val="945"/>
-              </a:spcAft>
-            </a:pPr>
-            <a:r>
-              <a:rPr sz="2100" b="1" i="0">
-                <a:solidFill>
-                  <a:srgbClr val="1C1B19"/>
-                </a:solidFill>
-                <a:latin typeface="Source Serif 4"/>
-              </a:rPr>
-              <a:t>Most people would rather stick to small talk.</a:t>
+                <a:spcPts val="990"/>
+              </a:spcAft>
+            </a:pPr>
+            <a:r>
+              <a:rPr sz="2200" b="0" i="1">
+                <a:solidFill>
+                  <a:srgbClr val="5D5A54"/>
+                </a:solidFill>
+                <a:latin typeface="Source Serif 4"/>
+              </a:rPr>
+              <a:t>After talking with someone new, people underestimate how much the other person enjoyed it.</a:t>
             </a:r>
           </a:p>
         </p:txBody>
@@ -9102,7 +9503,7 @@
                 </a:solidFill>
                 <a:latin typeface="Inter Tight"/>
               </a:rPr>
-              <a:t>MYTH OR FACT?</a:t>
+              <a:t>PAIR-SHARE</a:t>
             </a:r>
           </a:p>
         </p:txBody>
@@ -9148,14 +9549,97 @@
       </p:sp>
       <p:sp>
         <p:nvSpPr>
-          <p:cNvPr id="5" name="TextBox 4"/>
+          <p:cNvPr id="5" name="Rectangle 4"/>
+          <p:cNvSpPr/>
+          <p:nvPr/>
+        </p:nvSpPr>
+        <p:spPr>
+          <a:xfrm>
+            <a:off x="822960" y="1371600"/>
+            <a:ext cx="73152" cy="3566160"/>
+          </a:xfrm>
+          <a:prstGeom prst="rect">
+            <a:avLst/>
+          </a:prstGeom>
+          <a:solidFill>
+            <a:srgbClr val="F47B20"/>
+          </a:solidFill>
+          <a:ln>
+            <a:noFill/>
+          </a:ln>
+          <a:effectLst/>
+        </p:spPr>
+        <p:style>
+          <a:lnRef idx="1">
+            <a:schemeClr val="accent1"/>
+          </a:lnRef>
+          <a:fillRef idx="3">
+            <a:schemeClr val="accent1"/>
+          </a:fillRef>
+          <a:effectRef idx="2">
+            <a:schemeClr val="accent1"/>
+          </a:effectRef>
+          <a:fontRef idx="minor">
+            <a:schemeClr val="lt1"/>
+          </a:fontRef>
+        </p:style>
+        <p:txBody>
+          <a:bodyPr rtlCol="0" anchor="ctr"/>
+          <a:lstStyle/>
+          <a:p>
+            <a:pPr algn="ctr"/>
+          </a:p>
+        </p:txBody>
+      </p:sp>
+      <p:sp>
+        <p:nvSpPr>
+          <p:cNvPr id="6" name="TextBox 5"/>
           <p:cNvSpPr txBox="1"/>
           <p:nvPr/>
         </p:nvSpPr>
         <p:spPr>
           <a:xfrm>
-            <a:off x="822960" y="1005840"/>
-            <a:ext cx="10515600" cy="1097280"/>
+            <a:off x="1188720" y="1371600"/>
+            <a:ext cx="10058400" cy="3566160"/>
+          </a:xfrm>
+          <a:prstGeom prst="rect">
+            <a:avLst/>
+          </a:prstGeom>
+          <a:noFill/>
+        </p:spPr>
+        <p:txBody>
+          <a:bodyPr wrap="square" anchor="ctr" lIns="0" rIns="0" tIns="0" bIns="0">
+            <a:spAutoFit/>
+          </a:bodyPr>
+          <a:lstStyle/>
+          <a:p>
+            <a:pPr algn="l">
+              <a:spcAft>
+                <a:spcPts val="1800"/>
+              </a:spcAft>
+            </a:pPr>
+            <a:r>
+              <a:rPr sz="4000" b="0" i="1">
+                <a:solidFill>
+                  <a:srgbClr val="1C1B19"/>
+                </a:solidFill>
+                <a:latin typeface="Source Serif 4"/>
+              </a:rPr>
+              <a:t>Ask your partner one question below small talk.</a:t>
+            </a:r>
+          </a:p>
+        </p:txBody>
+      </p:sp>
+      <p:sp>
+        <p:nvSpPr>
+          <p:cNvPr id="7" name="TextBox 6"/>
+          <p:cNvSpPr txBox="1"/>
+          <p:nvPr/>
+        </p:nvSpPr>
+        <p:spPr>
+          <a:xfrm>
+            <a:off x="1188720" y="5120640"/>
+            <a:ext cx="10058400" cy="914400"/>
           </a:xfrm>
           <a:prstGeom prst="rect">
             <a:avLst/>
@@ -9170,487 +9654,17 @@
           <a:p>
             <a:pPr algn="l">
               <a:spcAft>
-                <a:spcPts val="1620"/>
-              </a:spcAft>
-            </a:pPr>
-            <a:r>
-              <a:rPr sz="3600" b="1" i="0">
-                <a:solidFill>
-                  <a:srgbClr val="1C1B19"/>
-                </a:solidFill>
-                <a:latin typeface="Source Serif 4"/>
-              </a:rPr>
-              <a:t>The answers</a:t>
-            </a:r>
-          </a:p>
-        </p:txBody>
-      </p:sp>
-      <p:sp>
-        <p:nvSpPr>
-          <p:cNvPr id="6" name="TextBox 5"/>
-          <p:cNvSpPr txBox="1"/>
-          <p:nvPr/>
-        </p:nvSpPr>
-        <p:spPr>
-          <a:xfrm>
-            <a:off x="822960" y="2057400"/>
-            <a:ext cx="548640" cy="804672"/>
-          </a:xfrm>
-          <a:prstGeom prst="rect">
-            <a:avLst/>
-          </a:prstGeom>
-          <a:noFill/>
-        </p:spPr>
-        <p:txBody>
-          <a:bodyPr wrap="square" anchor="t" lIns="0" rIns="0" tIns="0" bIns="0">
-            <a:spAutoFit/>
-          </a:bodyPr>
-          <a:lstStyle/>
-          <a:p>
-            <a:pPr algn="l">
-              <a:spcAft>
-                <a:spcPts val="1170"/>
-              </a:spcAft>
-            </a:pPr>
-            <a:r>
-              <a:rPr sz="2600" b="1" i="0">
-                <a:solidFill>
-                  <a:srgbClr val="F47B20"/>
-                </a:solidFill>
-                <a:latin typeface="Source Serif 4"/>
-              </a:rPr>
-              <a:t>1</a:t>
-            </a:r>
-          </a:p>
-        </p:txBody>
-      </p:sp>
-      <p:sp>
-        <p:nvSpPr>
-          <p:cNvPr id="7" name="TextBox 6"/>
-          <p:cNvSpPr txBox="1"/>
-          <p:nvPr/>
-        </p:nvSpPr>
-        <p:spPr>
-          <a:xfrm>
-            <a:off x="1463040" y="2093976"/>
-            <a:ext cx="9875520" cy="804672"/>
-          </a:xfrm>
-          <a:prstGeom prst="rect">
-            <a:avLst/>
-          </a:prstGeom>
-          <a:noFill/>
-        </p:spPr>
-        <p:txBody>
-          <a:bodyPr wrap="square" anchor="t" lIns="0" rIns="0" tIns="0" bIns="0">
-            <a:spAutoFit/>
-          </a:bodyPr>
-          <a:lstStyle/>
-          <a:p>
-            <a:pPr algn="l">
-              <a:spcAft>
-                <a:spcPts val="945"/>
-              </a:spcAft>
-            </a:pPr>
-            <a:r>
-              <a:rPr sz="2100" b="1" i="0">
-                <a:solidFill>
-                  <a:srgbClr val="1C1B19"/>
-                </a:solidFill>
-                <a:latin typeface="Source Serif 4"/>
-              </a:rPr>
-              <a:t>Myth.</a:t>
-            </a:r>
-          </a:p>
-          <a:p>
-            <a:pPr algn="l">
-              <a:spcAft>
-                <a:spcPts val="945"/>
-              </a:spcAft>
-            </a:pPr>
-            <a:r>
-              <a:rPr sz="1600" b="0" i="0">
+                <a:spcPts val="810"/>
+              </a:spcAft>
+            </a:pPr>
+            <a:r>
+              <a:rPr sz="1800" b="0" i="0">
                 <a:solidFill>
                   <a:srgbClr val="5D5A54"/>
                 </a:solidFill>
-                <a:latin typeface="Source Serif 4"/>
-              </a:rPr>
-              <a:t>Instant chemistry happens. Most close friendships are built over many hours.</a:t>
-            </a:r>
-          </a:p>
-        </p:txBody>
-      </p:sp>
-      <p:sp>
-        <p:nvSpPr>
-          <p:cNvPr id="8" name="TextBox 7"/>
-          <p:cNvSpPr txBox="1"/>
-          <p:nvPr/>
-        </p:nvSpPr>
-        <p:spPr>
-          <a:xfrm>
-            <a:off x="822960" y="2862072"/>
-            <a:ext cx="548640" cy="804672"/>
-          </a:xfrm>
-          <a:prstGeom prst="rect">
-            <a:avLst/>
-          </a:prstGeom>
-          <a:noFill/>
-        </p:spPr>
-        <p:txBody>
-          <a:bodyPr wrap="square" anchor="t" lIns="0" rIns="0" tIns="0" bIns="0">
-            <a:spAutoFit/>
-          </a:bodyPr>
-          <a:lstStyle/>
-          <a:p>
-            <a:pPr algn="l">
-              <a:spcAft>
-                <a:spcPts val="1170"/>
-              </a:spcAft>
-            </a:pPr>
-            <a:r>
-              <a:rPr sz="2600" b="1" i="0">
-                <a:solidFill>
-                  <a:srgbClr val="F47B20"/>
-                </a:solidFill>
-                <a:latin typeface="Source Serif 4"/>
-              </a:rPr>
-              <a:t>2</a:t>
-            </a:r>
-          </a:p>
-        </p:txBody>
-      </p:sp>
-      <p:sp>
-        <p:nvSpPr>
-          <p:cNvPr id="9" name="TextBox 8"/>
-          <p:cNvSpPr txBox="1"/>
-          <p:nvPr/>
-        </p:nvSpPr>
-        <p:spPr>
-          <a:xfrm>
-            <a:off x="1463040" y="2898648"/>
-            <a:ext cx="9875520" cy="804672"/>
-          </a:xfrm>
-          <a:prstGeom prst="rect">
-            <a:avLst/>
-          </a:prstGeom>
-          <a:noFill/>
-        </p:spPr>
-        <p:txBody>
-          <a:bodyPr wrap="square" anchor="t" lIns="0" rIns="0" tIns="0" bIns="0">
-            <a:spAutoFit/>
-          </a:bodyPr>
-          <a:lstStyle/>
-          <a:p>
-            <a:pPr algn="l">
-              <a:spcAft>
-                <a:spcPts val="945"/>
-              </a:spcAft>
-            </a:pPr>
-            <a:r>
-              <a:rPr sz="2100" b="1" i="0">
-                <a:solidFill>
-                  <a:srgbClr val="1C1B19"/>
-                </a:solidFill>
-                <a:latin typeface="Source Serif 4"/>
-              </a:rPr>
-              <a:t>Myth.</a:t>
-            </a:r>
-          </a:p>
-          <a:p>
-            <a:pPr algn="l">
-              <a:spcAft>
-                <a:spcPts val="945"/>
-              </a:spcAft>
-            </a:pPr>
-            <a:r>
-              <a:rPr sz="1600" b="0" i="0">
-                <a:solidFill>
-                  <a:srgbClr val="5D5A54"/>
-                </a:solidFill>
-                <a:latin typeface="Source Serif 4"/>
-              </a:rPr>
-              <a:t>They're probably waiting on you. Someone has to go first.</a:t>
-            </a:r>
-          </a:p>
-        </p:txBody>
-      </p:sp>
-      <p:sp>
-        <p:nvSpPr>
-          <p:cNvPr id="10" name="TextBox 9"/>
-          <p:cNvSpPr txBox="1"/>
-          <p:nvPr/>
-        </p:nvSpPr>
-        <p:spPr>
-          <a:xfrm>
-            <a:off x="822960" y="3666744"/>
-            <a:ext cx="548640" cy="804672"/>
-          </a:xfrm>
-          <a:prstGeom prst="rect">
-            <a:avLst/>
-          </a:prstGeom>
-          <a:noFill/>
-        </p:spPr>
-        <p:txBody>
-          <a:bodyPr wrap="square" anchor="t" lIns="0" rIns="0" tIns="0" bIns="0">
-            <a:spAutoFit/>
-          </a:bodyPr>
-          <a:lstStyle/>
-          <a:p>
-            <a:pPr algn="l">
-              <a:spcAft>
-                <a:spcPts val="1170"/>
-              </a:spcAft>
-            </a:pPr>
-            <a:r>
-              <a:rPr sz="2600" b="1" i="0">
-                <a:solidFill>
-                  <a:srgbClr val="F47B20"/>
-                </a:solidFill>
-                <a:latin typeface="Source Serif 4"/>
-              </a:rPr>
-              <a:t>3</a:t>
-            </a:r>
-          </a:p>
-        </p:txBody>
-      </p:sp>
-      <p:sp>
-        <p:nvSpPr>
-          <p:cNvPr id="11" name="TextBox 10"/>
-          <p:cNvSpPr txBox="1"/>
-          <p:nvPr/>
-        </p:nvSpPr>
-        <p:spPr>
-          <a:xfrm>
-            <a:off x="1463040" y="3703320"/>
-            <a:ext cx="9875520" cy="804672"/>
-          </a:xfrm>
-          <a:prstGeom prst="rect">
-            <a:avLst/>
-          </a:prstGeom>
-          <a:noFill/>
-        </p:spPr>
-        <p:txBody>
-          <a:bodyPr wrap="square" anchor="t" lIns="0" rIns="0" tIns="0" bIns="0">
-            <a:spAutoFit/>
-          </a:bodyPr>
-          <a:lstStyle/>
-          <a:p>
-            <a:pPr algn="l">
-              <a:spcAft>
-                <a:spcPts val="945"/>
-              </a:spcAft>
-            </a:pPr>
-            <a:r>
-              <a:rPr sz="2100" b="1" i="0">
-                <a:solidFill>
-                  <a:srgbClr val="1C1B19"/>
-                </a:solidFill>
-                <a:latin typeface="Source Serif 4"/>
-              </a:rPr>
-              <a:t>Fact.</a:t>
-            </a:r>
-          </a:p>
-          <a:p>
-            <a:pPr algn="l">
-              <a:spcAft>
-                <a:spcPts val="945"/>
-              </a:spcAft>
-            </a:pPr>
-            <a:r>
-              <a:rPr sz="1600" b="0" i="0">
-                <a:solidFill>
-                  <a:srgbClr val="5D5A54"/>
-                </a:solidFill>
-                <a:latin typeface="Source Serif 4"/>
-              </a:rPr>
-              <a:t>Random seat assignments predicted friendships a year later.</a:t>
-            </a:r>
-          </a:p>
-        </p:txBody>
-      </p:sp>
-      <p:sp>
-        <p:nvSpPr>
-          <p:cNvPr id="12" name="TextBox 11"/>
-          <p:cNvSpPr txBox="1"/>
-          <p:nvPr/>
-        </p:nvSpPr>
-        <p:spPr>
-          <a:xfrm>
-            <a:off x="822960" y="4471416"/>
-            <a:ext cx="548640" cy="804672"/>
-          </a:xfrm>
-          <a:prstGeom prst="rect">
-            <a:avLst/>
-          </a:prstGeom>
-          <a:noFill/>
-        </p:spPr>
-        <p:txBody>
-          <a:bodyPr wrap="square" anchor="t" lIns="0" rIns="0" tIns="0" bIns="0">
-            <a:spAutoFit/>
-          </a:bodyPr>
-          <a:lstStyle/>
-          <a:p>
-            <a:pPr algn="l">
-              <a:spcAft>
-                <a:spcPts val="1170"/>
-              </a:spcAft>
-            </a:pPr>
-            <a:r>
-              <a:rPr sz="2600" b="1" i="0">
-                <a:solidFill>
-                  <a:srgbClr val="F47B20"/>
-                </a:solidFill>
-                <a:latin typeface="Source Serif 4"/>
-              </a:rPr>
-              <a:t>4</a:t>
-            </a:r>
-          </a:p>
-        </p:txBody>
-      </p:sp>
-      <p:sp>
-        <p:nvSpPr>
-          <p:cNvPr id="13" name="TextBox 12"/>
-          <p:cNvSpPr txBox="1"/>
-          <p:nvPr/>
-        </p:nvSpPr>
-        <p:spPr>
-          <a:xfrm>
-            <a:off x="1463040" y="4507992"/>
-            <a:ext cx="9875520" cy="804672"/>
-          </a:xfrm>
-          <a:prstGeom prst="rect">
-            <a:avLst/>
-          </a:prstGeom>
-          <a:noFill/>
-        </p:spPr>
-        <p:txBody>
-          <a:bodyPr wrap="square" anchor="t" lIns="0" rIns="0" tIns="0" bIns="0">
-            <a:spAutoFit/>
-          </a:bodyPr>
-          <a:lstStyle/>
-          <a:p>
-            <a:pPr algn="l">
-              <a:spcAft>
-                <a:spcPts val="945"/>
-              </a:spcAft>
-            </a:pPr>
-            <a:r>
-              <a:rPr sz="2100" b="1" i="0">
-                <a:solidFill>
-                  <a:srgbClr val="1C1B19"/>
-                </a:solidFill>
-                <a:latin typeface="Source Serif 4"/>
-              </a:rPr>
-              <a:t>Myth.</a:t>
-            </a:r>
-          </a:p>
-          <a:p>
-            <a:pPr algn="l">
-              <a:spcAft>
-                <a:spcPts val="945"/>
-              </a:spcAft>
-            </a:pPr>
-            <a:r>
-              <a:rPr sz="1600" b="0" i="0">
-                <a:solidFill>
-                  <a:srgbClr val="5D5A54"/>
-                </a:solidFill>
-                <a:latin typeface="Source Serif 4"/>
-              </a:rPr>
-              <a:t>Popular and close are different things, with different effects.</a:t>
-            </a:r>
-          </a:p>
-        </p:txBody>
-      </p:sp>
-      <p:sp>
-        <p:nvSpPr>
-          <p:cNvPr id="14" name="TextBox 13"/>
-          <p:cNvSpPr txBox="1"/>
-          <p:nvPr/>
-        </p:nvSpPr>
-        <p:spPr>
-          <a:xfrm>
-            <a:off x="822960" y="5276088"/>
-            <a:ext cx="548640" cy="804672"/>
-          </a:xfrm>
-          <a:prstGeom prst="rect">
-            <a:avLst/>
-          </a:prstGeom>
-          <a:noFill/>
-        </p:spPr>
-        <p:txBody>
-          <a:bodyPr wrap="square" anchor="t" lIns="0" rIns="0" tIns="0" bIns="0">
-            <a:spAutoFit/>
-          </a:bodyPr>
-          <a:lstStyle/>
-          <a:p>
-            <a:pPr algn="l">
-              <a:spcAft>
-                <a:spcPts val="1170"/>
-              </a:spcAft>
-            </a:pPr>
-            <a:r>
-              <a:rPr sz="2600" b="1" i="0">
-                <a:solidFill>
-                  <a:srgbClr val="F47B20"/>
-                </a:solidFill>
-                <a:latin typeface="Source Serif 4"/>
-              </a:rPr>
-              <a:t>5</a:t>
-            </a:r>
-          </a:p>
-        </p:txBody>
-      </p:sp>
-      <p:sp>
-        <p:nvSpPr>
-          <p:cNvPr id="15" name="TextBox 14"/>
-          <p:cNvSpPr txBox="1"/>
-          <p:nvPr/>
-        </p:nvSpPr>
-        <p:spPr>
-          <a:xfrm>
-            <a:off x="1463040" y="5312664"/>
-            <a:ext cx="9875520" cy="804672"/>
-          </a:xfrm>
-          <a:prstGeom prst="rect">
-            <a:avLst/>
-          </a:prstGeom>
-          <a:noFill/>
-        </p:spPr>
-        <p:txBody>
-          <a:bodyPr wrap="square" anchor="t" lIns="0" rIns="0" tIns="0" bIns="0">
-            <a:spAutoFit/>
-          </a:bodyPr>
-          <a:lstStyle/>
-          <a:p>
-            <a:pPr algn="l">
-              <a:spcAft>
-                <a:spcPts val="945"/>
-              </a:spcAft>
-            </a:pPr>
-            <a:r>
-              <a:rPr sz="2100" b="1" i="0">
-                <a:solidFill>
-                  <a:srgbClr val="1C1B19"/>
-                </a:solidFill>
-                <a:latin typeface="Source Serif 4"/>
-              </a:rPr>
-              <a:t>Myth.</a:t>
-            </a:r>
-          </a:p>
-          <a:p>
-            <a:pPr algn="l">
-              <a:spcAft>
-                <a:spcPts val="945"/>
-              </a:spcAft>
-            </a:pPr>
-            <a:r>
-              <a:rPr sz="1600" b="0" i="0">
-                <a:solidFill>
-                  <a:srgbClr val="5D5A54"/>
-                </a:solidFill>
-                <a:latin typeface="Source Serif 4"/>
-              </a:rPr>
-              <a:t>People want to go deeper than they expect.</a:t>
+                <a:latin typeface="Inter Tight"/>
+              </a:rPr>
+              <a:t>"What made you pick that elective?" or "What's been the hardest part of this year so far?" Then ask one follow-up.</a:t>
             </a:r>
           </a:p>
         </p:txBody>
@@ -9759,7 +9773,7 @@
                 </a:solidFill>
                 <a:latin typeface="Inter Tight"/>
               </a:rPr>
-              <a:t>FRIENDSHIP RUNS ON A CLOCK</a:t>
+              <a:t>FIND YOUR RUNG</a:t>
             </a:r>
           </a:p>
         </p:txBody>
@@ -9812,7 +9826,7 @@
         <p:spPr>
           <a:xfrm>
             <a:off x="822960" y="1005840"/>
-            <a:ext cx="10515600" cy="1097280"/>
+            <a:ext cx="10515600" cy="914400"/>
           </a:xfrm>
           <a:prstGeom prst="rect">
             <a:avLst/>
@@ -9827,31 +9841,77 @@
           <a:p>
             <a:pPr algn="l">
               <a:spcAft>
-                <a:spcPts val="1620"/>
-              </a:spcAft>
-            </a:pPr>
-            <a:r>
-              <a:rPr sz="3600" b="1" i="0">
+                <a:spcPts val="1530"/>
+              </a:spcAft>
+            </a:pPr>
+            <a:r>
+              <a:rPr sz="3400" b="1" i="0">
                 <a:solidFill>
                   <a:srgbClr val="1C1B19"/>
                 </a:solidFill>
                 <a:latin typeface="Source Serif 4"/>
               </a:rPr>
-              <a:t>Rough hours it takes</a:t>
-            </a:r>
-          </a:p>
-        </p:txBody>
-      </p:sp>
-      <p:sp>
-        <p:nvSpPr>
-          <p:cNvPr id="6" name="TextBox 5"/>
+              <a:t>Pick one person. Where are you now?</a:t>
+            </a:r>
+          </a:p>
+        </p:txBody>
+      </p:sp>
+      <p:sp>
+        <p:nvSpPr>
+          <p:cNvPr id="6" name="Rectangle 5"/>
+          <p:cNvSpPr/>
+          <p:nvPr/>
+        </p:nvSpPr>
+        <p:spPr>
+          <a:xfrm>
+            <a:off x="822960" y="2103120"/>
+            <a:ext cx="5120640" cy="3931920"/>
+          </a:xfrm>
+          <a:prstGeom prst="rect">
+            <a:avLst/>
+          </a:prstGeom>
+          <a:solidFill>
+            <a:srgbClr val="FFFFFF"/>
+          </a:solidFill>
+          <a:ln w="15875">
+            <a:solidFill>
+              <a:srgbClr val="D8D2C6"/>
+            </a:solidFill>
+          </a:ln>
+          <a:effectLst/>
+        </p:spPr>
+        <p:style>
+          <a:lnRef idx="1">
+            <a:schemeClr val="accent1"/>
+          </a:lnRef>
+          <a:fillRef idx="3">
+            <a:schemeClr val="accent1"/>
+          </a:fillRef>
+          <a:effectRef idx="2">
+            <a:schemeClr val="accent1"/>
+          </a:effectRef>
+          <a:fontRef idx="minor">
+            <a:schemeClr val="lt1"/>
+          </a:fontRef>
+        </p:style>
+        <p:txBody>
+          <a:bodyPr rtlCol="0" anchor="ctr"/>
+          <a:lstStyle/>
+          <a:p>
+            <a:pPr algn="ctr"/>
+          </a:p>
+        </p:txBody>
+      </p:sp>
+      <p:sp>
+        <p:nvSpPr>
+          <p:cNvPr id="7" name="TextBox 6"/>
           <p:cNvSpPr txBox="1"/>
           <p:nvPr/>
         </p:nvSpPr>
         <p:spPr>
           <a:xfrm>
-            <a:off x="822960" y="2194560"/>
-            <a:ext cx="548640" cy="1051560"/>
+            <a:off x="1097280" y="2286000"/>
+            <a:ext cx="4572000" cy="457200"/>
           </a:xfrm>
           <a:prstGeom prst="rect">
             <a:avLst/>
@@ -9866,31 +9926,31 @@
           <a:p>
             <a:pPr algn="l">
               <a:spcAft>
-                <a:spcPts val="1170"/>
-              </a:spcAft>
-            </a:pPr>
-            <a:r>
-              <a:rPr sz="2600" b="1" i="0">
-                <a:solidFill>
-                  <a:srgbClr val="F47B20"/>
-                </a:solidFill>
-                <a:latin typeface="Source Serif 4"/>
-              </a:rPr>
-              <a:t>1</a:t>
-            </a:r>
-          </a:p>
-        </p:txBody>
-      </p:sp>
-      <p:sp>
-        <p:nvSpPr>
-          <p:cNvPr id="7" name="TextBox 6"/>
+                <a:spcPts val="585"/>
+              </a:spcAft>
+            </a:pPr>
+            <a:r>
+              <a:rPr sz="1300" b="1" i="0">
+                <a:solidFill>
+                  <a:srgbClr val="0B2D5B"/>
+                </a:solidFill>
+                <a:latin typeface="Inter Tight"/>
+              </a:rPr>
+              <a:t>GETTING STARTED</a:t>
+            </a:r>
+          </a:p>
+        </p:txBody>
+      </p:sp>
+      <p:sp>
+        <p:nvSpPr>
+          <p:cNvPr id="8" name="TextBox 7"/>
           <p:cNvSpPr txBox="1"/>
           <p:nvPr/>
         </p:nvSpPr>
         <p:spPr>
           <a:xfrm>
-            <a:off x="1463040" y="2231136"/>
-            <a:ext cx="9875520" cy="1051560"/>
+            <a:off x="1097280" y="2788920"/>
+            <a:ext cx="4572000" cy="3108960"/>
           </a:xfrm>
           <a:prstGeom prst="rect">
             <a:avLst/>
@@ -9905,47 +9965,125 @@
           <a:p>
             <a:pPr algn="l">
               <a:spcAft>
-                <a:spcPts val="945"/>
-              </a:spcAft>
-            </a:pPr>
-            <a:r>
-              <a:rPr sz="2100" b="1" i="0">
+                <a:spcPts val="855"/>
+              </a:spcAft>
+            </a:pPr>
+            <a:r>
+              <a:rPr sz="1900" b="0" i="0">
                 <a:solidFill>
                   <a:srgbClr val="1C1B19"/>
                 </a:solidFill>
                 <a:latin typeface="Source Serif 4"/>
               </a:rPr>
-              <a:t>About 50 hours: casual friend.</a:t>
-            </a:r>
-          </a:p>
-          <a:p>
-            <a:pPr algn="l">
-              <a:spcAft>
-                <a:spcPts val="945"/>
-              </a:spcAft>
-            </a:pPr>
-            <a:r>
-              <a:rPr sz="1600" b="0" i="0">
-                <a:solidFill>
-                  <a:srgbClr val="5D5A54"/>
-                </a:solidFill>
-                <a:latin typeface="Source Serif 4"/>
-              </a:rPr>
-              <a:t>You'd sit together without a reason.</a:t>
-            </a:r>
-          </a:p>
-        </p:txBody>
-      </p:sp>
-      <p:sp>
-        <p:nvSpPr>
-          <p:cNvPr id="8" name="TextBox 7"/>
+              <a:t>Said hi or nodded in passing</a:t>
+            </a:r>
+          </a:p>
+          <a:p>
+            <a:pPr algn="l">
+              <a:spcAft>
+                <a:spcPts val="855"/>
+              </a:spcAft>
+            </a:pPr>
+            <a:r>
+              <a:rPr sz="1900" b="0" i="0">
+                <a:solidFill>
+                  <a:srgbClr val="1C1B19"/>
+                </a:solidFill>
+                <a:latin typeface="Source Serif 4"/>
+              </a:rPr>
+              <a:t>Talked about class or practice</a:t>
+            </a:r>
+          </a:p>
+          <a:p>
+            <a:pPr algn="l">
+              <a:spcAft>
+                <a:spcPts val="855"/>
+              </a:spcAft>
+            </a:pPr>
+            <a:r>
+              <a:rPr sz="1900" b="0" i="0">
+                <a:solidFill>
+                  <a:srgbClr val="1C1B19"/>
+                </a:solidFill>
+                <a:latin typeface="Source Serif 4"/>
+              </a:rPr>
+              <a:t>Asked about something they care about</a:t>
+            </a:r>
+          </a:p>
+          <a:p>
+            <a:pPr algn="l">
+              <a:spcAft>
+                <a:spcPts val="855"/>
+              </a:spcAft>
+            </a:pPr>
+            <a:r>
+              <a:rPr sz="1900" b="0" i="0">
+                <a:solidFill>
+                  <a:srgbClr val="1C1B19"/>
+                </a:solidFill>
+                <a:latin typeface="Source Serif 4"/>
+              </a:rPr>
+              <a:t>Chose to sit or partner with them</a:t>
+            </a:r>
+          </a:p>
+        </p:txBody>
+      </p:sp>
+      <p:sp>
+        <p:nvSpPr>
+          <p:cNvPr id="9" name="Rectangle 8"/>
+          <p:cNvSpPr/>
+          <p:nvPr/>
+        </p:nvSpPr>
+        <p:spPr>
+          <a:xfrm>
+            <a:off x="6309360" y="2103120"/>
+            <a:ext cx="5120640" cy="3931920"/>
+          </a:xfrm>
+          <a:prstGeom prst="rect">
+            <a:avLst/>
+          </a:prstGeom>
+          <a:solidFill>
+            <a:srgbClr val="FFFFFF"/>
+          </a:solidFill>
+          <a:ln w="15875">
+            <a:solidFill>
+              <a:srgbClr val="D8D2C6"/>
+            </a:solidFill>
+          </a:ln>
+          <a:effectLst/>
+        </p:spPr>
+        <p:style>
+          <a:lnRef idx="1">
+            <a:schemeClr val="accent1"/>
+          </a:lnRef>
+          <a:fillRef idx="3">
+            <a:schemeClr val="accent1"/>
+          </a:fillRef>
+          <a:effectRef idx="2">
+            <a:schemeClr val="accent1"/>
+          </a:effectRef>
+          <a:fontRef idx="minor">
+            <a:schemeClr val="lt1"/>
+          </a:fontRef>
+        </p:style>
+        <p:txBody>
+          <a:bodyPr rtlCol="0" anchor="ctr"/>
+          <a:lstStyle/>
+          <a:p>
+            <a:pPr algn="ctr"/>
+          </a:p>
+        </p:txBody>
+      </p:sp>
+      <p:sp>
+        <p:nvSpPr>
+          <p:cNvPr id="10" name="TextBox 9"/>
           <p:cNvSpPr txBox="1"/>
           <p:nvPr/>
         </p:nvSpPr>
         <p:spPr>
           <a:xfrm>
-            <a:off x="822960" y="3246120"/>
-            <a:ext cx="548640" cy="1051560"/>
+            <a:off x="6583680" y="2286000"/>
+            <a:ext cx="4572000" cy="457200"/>
           </a:xfrm>
           <a:prstGeom prst="rect">
             <a:avLst/>
@@ -9960,31 +10098,31 @@
           <a:p>
             <a:pPr algn="l">
               <a:spcAft>
-                <a:spcPts val="1170"/>
-              </a:spcAft>
-            </a:pPr>
-            <a:r>
-              <a:rPr sz="2600" b="1" i="0">
-                <a:solidFill>
-                  <a:srgbClr val="F47B20"/>
-                </a:solidFill>
-                <a:latin typeface="Source Serif 4"/>
-              </a:rPr>
-              <a:t>2</a:t>
-            </a:r>
-          </a:p>
-        </p:txBody>
-      </p:sp>
-      <p:sp>
-        <p:nvSpPr>
-          <p:cNvPr id="9" name="TextBox 8"/>
+                <a:spcPts val="585"/>
+              </a:spcAft>
+            </a:pPr>
+            <a:r>
+              <a:rPr sz="1300" b="1" i="0">
+                <a:solidFill>
+                  <a:srgbClr val="0B2D5B"/>
+                </a:solidFill>
+                <a:latin typeface="Inter Tight"/>
+              </a:rPr>
+              <a:t>MOVING CLOSER</a:t>
+            </a:r>
+          </a:p>
+        </p:txBody>
+      </p:sp>
+      <p:sp>
+        <p:nvSpPr>
+          <p:cNvPr id="11" name="TextBox 10"/>
           <p:cNvSpPr txBox="1"/>
           <p:nvPr/>
         </p:nvSpPr>
         <p:spPr>
           <a:xfrm>
-            <a:off x="1463040" y="3282696"/>
-            <a:ext cx="9875520" cy="1051560"/>
+            <a:off x="6583680" y="2788920"/>
+            <a:ext cx="4572000" cy="3108960"/>
           </a:xfrm>
           <a:prstGeom prst="rect">
             <a:avLst/>
@@ -9999,127 +10137,65 @@
           <a:p>
             <a:pPr algn="l">
               <a:spcAft>
-                <a:spcPts val="945"/>
-              </a:spcAft>
-            </a:pPr>
-            <a:r>
-              <a:rPr sz="2100" b="1" i="0">
+                <a:spcPts val="855"/>
+              </a:spcAft>
+            </a:pPr>
+            <a:r>
+              <a:rPr sz="1900" b="0" i="0">
                 <a:solidFill>
                   <a:srgbClr val="1C1B19"/>
                 </a:solidFill>
                 <a:latin typeface="Source Serif 4"/>
               </a:rPr>
-              <a:t>About 90 hours: friend.</a:t>
-            </a:r>
-          </a:p>
-          <a:p>
-            <a:pPr algn="l">
-              <a:spcAft>
-                <a:spcPts val="945"/>
-              </a:spcAft>
-            </a:pPr>
-            <a:r>
-              <a:rPr sz="1600" b="0" i="0">
-                <a:solidFill>
-                  <a:srgbClr val="5D5A54"/>
-                </a:solidFill>
-                <a:latin typeface="Source Serif 4"/>
-              </a:rPr>
-              <a:t>You make plans on purpose.</a:t>
-            </a:r>
-          </a:p>
-        </p:txBody>
-      </p:sp>
-      <p:sp>
-        <p:nvSpPr>
-          <p:cNvPr id="10" name="TextBox 9"/>
-          <p:cNvSpPr txBox="1"/>
-          <p:nvPr/>
-        </p:nvSpPr>
-        <p:spPr>
-          <a:xfrm>
-            <a:off x="822960" y="4297679"/>
-            <a:ext cx="548640" cy="1051560"/>
-          </a:xfrm>
-          <a:prstGeom prst="rect">
-            <a:avLst/>
-          </a:prstGeom>
-          <a:noFill/>
-        </p:spPr>
-        <p:txBody>
-          <a:bodyPr wrap="square" anchor="t" lIns="0" rIns="0" tIns="0" bIns="0">
-            <a:spAutoFit/>
-          </a:bodyPr>
-          <a:lstStyle/>
-          <a:p>
-            <a:pPr algn="l">
-              <a:spcAft>
-                <a:spcPts val="1170"/>
-              </a:spcAft>
-            </a:pPr>
-            <a:r>
-              <a:rPr sz="2600" b="1" i="0">
-                <a:solidFill>
-                  <a:srgbClr val="F47B20"/>
-                </a:solidFill>
-                <a:latin typeface="Source Serif 4"/>
-              </a:rPr>
-              <a:t>3</a:t>
-            </a:r>
-          </a:p>
-        </p:txBody>
-      </p:sp>
-      <p:sp>
-        <p:nvSpPr>
-          <p:cNvPr id="11" name="TextBox 10"/>
-          <p:cNvSpPr txBox="1"/>
-          <p:nvPr/>
-        </p:nvSpPr>
-        <p:spPr>
-          <a:xfrm>
-            <a:off x="1463040" y="4334255"/>
-            <a:ext cx="9875520" cy="1051560"/>
-          </a:xfrm>
-          <a:prstGeom prst="rect">
-            <a:avLst/>
-          </a:prstGeom>
-          <a:noFill/>
-        </p:spPr>
-        <p:txBody>
-          <a:bodyPr wrap="square" anchor="t" lIns="0" rIns="0" tIns="0" bIns="0">
-            <a:spAutoFit/>
-          </a:bodyPr>
-          <a:lstStyle/>
-          <a:p>
-            <a:pPr algn="l">
-              <a:spcAft>
-                <a:spcPts val="945"/>
-              </a:spcAft>
-            </a:pPr>
-            <a:r>
-              <a:rPr sz="2100" b="1" i="0">
+              <a:t>Got their number or followed them</a:t>
+            </a:r>
+          </a:p>
+          <a:p>
+            <a:pPr algn="l">
+              <a:spcAft>
+                <a:spcPts val="855"/>
+              </a:spcAft>
+            </a:pPr>
+            <a:r>
+              <a:rPr sz="1900" b="0" i="0">
                 <a:solidFill>
                   <a:srgbClr val="1C1B19"/>
                 </a:solidFill>
                 <a:latin typeface="Source Serif 4"/>
               </a:rPr>
-              <a:t>Over 200 hours: close friend.</a:t>
-            </a:r>
-          </a:p>
-          <a:p>
-            <a:pPr algn="l">
-              <a:spcAft>
-                <a:spcPts val="945"/>
-              </a:spcAft>
-            </a:pPr>
-            <a:r>
-              <a:rPr sz="1600" b="0" i="0">
-                <a:solidFill>
-                  <a:srgbClr val="5D5A54"/>
-                </a:solidFill>
-                <a:latin typeface="Source Serif 4"/>
-              </a:rPr>
-              <a:t>You can say the real thing to them.</a:t>
+              <a:t>Texted about something besides logistics</a:t>
+            </a:r>
+          </a:p>
+          <a:p>
+            <a:pPr algn="l">
+              <a:spcAft>
+                <a:spcPts val="855"/>
+              </a:spcAft>
+            </a:pPr>
+            <a:r>
+              <a:rPr sz="1900" b="0" i="0">
+                <a:solidFill>
+                  <a:srgbClr val="1C1B19"/>
+                </a:solidFill>
+                <a:latin typeface="Source Serif 4"/>
+              </a:rPr>
+              <a:t>Made a specific plan</a:t>
+            </a:r>
+          </a:p>
+          <a:p>
+            <a:pPr algn="l">
+              <a:spcAft>
+                <a:spcPts val="855"/>
+              </a:spcAft>
+            </a:pPr>
+            <a:r>
+              <a:rPr sz="1900" b="0" i="0">
+                <a:solidFill>
+                  <a:srgbClr val="1C1B19"/>
+                </a:solidFill>
+                <a:latin typeface="Source Serif 4"/>
+              </a:rPr>
+              <a:t>Your step: the next rung up</a:t>
             </a:r>
           </a:p>
         </p:txBody>
@@ -10228,7 +10304,7 @@
                 </a:solidFill>
                 <a:latin typeface="Inter Tight"/>
               </a:rPr>
-              <a:t>THE LIKING GAP</a:t>
+              <a:t>THREE MOMENTS</a:t>
             </a:r>
           </a:p>
         </p:txBody>
@@ -10280,47 +10356,8 @@
         </p:nvSpPr>
         <p:spPr>
           <a:xfrm>
-            <a:off x="822960" y="1463040"/>
-            <a:ext cx="10515600" cy="3291840"/>
-          </a:xfrm>
-          <a:prstGeom prst="rect">
-            <a:avLst/>
-          </a:prstGeom>
-          <a:noFill/>
-        </p:spPr>
-        <p:txBody>
-          <a:bodyPr wrap="square" anchor="ctr" lIns="0" rIns="0" tIns="0" bIns="0">
-            <a:spAutoFit/>
-          </a:bodyPr>
-          <a:lstStyle/>
-          <a:p>
-            <a:pPr algn="l">
-              <a:spcAft>
-                <a:spcPts val="2070"/>
-              </a:spcAft>
-            </a:pPr>
-            <a:r>
-              <a:rPr sz="4600" b="1" i="0">
-                <a:solidFill>
-                  <a:srgbClr val="1C1B19"/>
-                </a:solidFill>
-                <a:latin typeface="Source Serif 4"/>
-              </a:rPr>
-              <a:t>They liked you more than you think.</a:t>
-            </a:r>
-          </a:p>
-        </p:txBody>
-      </p:sp>
-      <p:sp>
-        <p:nvSpPr>
-          <p:cNvPr id="6" name="TextBox 5"/>
-          <p:cNvSpPr txBox="1"/>
-          <p:nvPr/>
-        </p:nvSpPr>
-        <p:spPr>
-          <a:xfrm>
-            <a:off x="822960" y="4846320"/>
-            <a:ext cx="10515600" cy="1097280"/>
+            <a:off x="822960" y="1005840"/>
+            <a:ext cx="10515600" cy="914400"/>
           </a:xfrm>
           <a:prstGeom prst="rect">
             <a:avLst/>
@@ -10335,17 +10372,389 @@
           <a:p>
             <a:pPr algn="l">
               <a:spcAft>
-                <a:spcPts val="990"/>
-              </a:spcAft>
-            </a:pPr>
-            <a:r>
-              <a:rPr sz="2200" b="0" i="1">
-                <a:solidFill>
-                  <a:srgbClr val="5D5A54"/>
-                </a:solidFill>
-                <a:latin typeface="Source Serif 4"/>
-              </a:rPr>
-              <a:t>After talking with someone new, people underestimate how much the other person enjoyed it.</a:t>
+                <a:spcPts val="1530"/>
+              </a:spcAft>
+            </a:pPr>
+            <a:r>
+              <a:rPr sz="3400" b="1" i="0">
+                <a:solidFill>
+                  <a:srgbClr val="1C1B19"/>
+                </a:solidFill>
+                <a:latin typeface="Source Serif 4"/>
+              </a:rPr>
+              <a:t>What's the next move?</a:t>
+            </a:r>
+          </a:p>
+        </p:txBody>
+      </p:sp>
+      <p:sp>
+        <p:nvSpPr>
+          <p:cNvPr id="6" name="Rectangle 5"/>
+          <p:cNvSpPr/>
+          <p:nvPr/>
+        </p:nvSpPr>
+        <p:spPr>
+          <a:xfrm>
+            <a:off x="822960" y="2103120"/>
+            <a:ext cx="3322320" cy="3840480"/>
+          </a:xfrm>
+          <a:prstGeom prst="rect">
+            <a:avLst/>
+          </a:prstGeom>
+          <a:solidFill>
+            <a:srgbClr val="FFFFFF"/>
+          </a:solidFill>
+          <a:ln w="15875">
+            <a:solidFill>
+              <a:srgbClr val="D8D2C6"/>
+            </a:solidFill>
+          </a:ln>
+          <a:effectLst/>
+        </p:spPr>
+        <p:style>
+          <a:lnRef idx="1">
+            <a:schemeClr val="accent1"/>
+          </a:lnRef>
+          <a:fillRef idx="3">
+            <a:schemeClr val="accent1"/>
+          </a:fillRef>
+          <a:effectRef idx="2">
+            <a:schemeClr val="accent1"/>
+          </a:effectRef>
+          <a:fontRef idx="minor">
+            <a:schemeClr val="lt1"/>
+          </a:fontRef>
+        </p:style>
+        <p:txBody>
+          <a:bodyPr rtlCol="0" anchor="ctr"/>
+          <a:lstStyle/>
+          <a:p>
+            <a:pPr algn="ctr"/>
+          </a:p>
+        </p:txBody>
+      </p:sp>
+      <p:sp>
+        <p:nvSpPr>
+          <p:cNvPr id="7" name="TextBox 6"/>
+          <p:cNvSpPr txBox="1"/>
+          <p:nvPr/>
+        </p:nvSpPr>
+        <p:spPr>
+          <a:xfrm>
+            <a:off x="1051560" y="2286000"/>
+            <a:ext cx="2865120" cy="365760"/>
+          </a:xfrm>
+          <a:prstGeom prst="rect">
+            <a:avLst/>
+          </a:prstGeom>
+          <a:noFill/>
+        </p:spPr>
+        <p:txBody>
+          <a:bodyPr wrap="square" anchor="t" lIns="0" rIns="0" tIns="0" bIns="0">
+            <a:spAutoFit/>
+          </a:bodyPr>
+          <a:lstStyle/>
+          <a:p>
+            <a:pPr algn="l">
+              <a:spcAft>
+                <a:spcPts val="585"/>
+              </a:spcAft>
+            </a:pPr>
+            <a:r>
+              <a:rPr sz="1300" b="1" i="0">
+                <a:solidFill>
+                  <a:srgbClr val="0B2D5B"/>
+                </a:solidFill>
+                <a:latin typeface="Inter Tight"/>
+              </a:rPr>
+              <a:t>AMARA</a:t>
+            </a:r>
+          </a:p>
+        </p:txBody>
+      </p:sp>
+      <p:sp>
+        <p:nvSpPr>
+          <p:cNvPr id="8" name="TextBox 7"/>
+          <p:cNvSpPr txBox="1"/>
+          <p:nvPr/>
+        </p:nvSpPr>
+        <p:spPr>
+          <a:xfrm>
+            <a:off x="1051560" y="2743200"/>
+            <a:ext cx="2865120" cy="3017520"/>
+          </a:xfrm>
+          <a:prstGeom prst="rect">
+            <a:avLst/>
+          </a:prstGeom>
+          <a:noFill/>
+        </p:spPr>
+        <p:txBody>
+          <a:bodyPr wrap="square" anchor="t" lIns="0" rIns="0" tIns="0" bIns="0">
+            <a:spAutoFit/>
+          </a:bodyPr>
+          <a:lstStyle/>
+          <a:p>
+            <a:pPr algn="l">
+              <a:spcAft>
+                <a:spcPts val="810"/>
+              </a:spcAft>
+            </a:pPr>
+            <a:r>
+              <a:rPr sz="1800" b="0" i="0">
+                <a:solidFill>
+                  <a:srgbClr val="1C1B19"/>
+                </a:solidFill>
+                <a:latin typeface="Source Serif 4"/>
+              </a:rPr>
+              <a:t>Moved here this summer with her grandmother. She and her lab partner Diego joke every class, and that's it.</a:t>
+            </a:r>
+          </a:p>
+        </p:txBody>
+      </p:sp>
+      <p:sp>
+        <p:nvSpPr>
+          <p:cNvPr id="9" name="Rectangle 8"/>
+          <p:cNvSpPr/>
+          <p:nvPr/>
+        </p:nvSpPr>
+        <p:spPr>
+          <a:xfrm>
+            <a:off x="4419600" y="2103120"/>
+            <a:ext cx="3322320" cy="3840480"/>
+          </a:xfrm>
+          <a:prstGeom prst="rect">
+            <a:avLst/>
+          </a:prstGeom>
+          <a:solidFill>
+            <a:srgbClr val="FFFFFF"/>
+          </a:solidFill>
+          <a:ln w="15875">
+            <a:solidFill>
+              <a:srgbClr val="D8D2C6"/>
+            </a:solidFill>
+          </a:ln>
+          <a:effectLst/>
+        </p:spPr>
+        <p:style>
+          <a:lnRef idx="1">
+            <a:schemeClr val="accent1"/>
+          </a:lnRef>
+          <a:fillRef idx="3">
+            <a:schemeClr val="accent1"/>
+          </a:fillRef>
+          <a:effectRef idx="2">
+            <a:schemeClr val="accent1"/>
+          </a:effectRef>
+          <a:fontRef idx="minor">
+            <a:schemeClr val="lt1"/>
+          </a:fontRef>
+        </p:style>
+        <p:txBody>
+          <a:bodyPr rtlCol="0" anchor="ctr"/>
+          <a:lstStyle/>
+          <a:p>
+            <a:pPr algn="ctr"/>
+          </a:p>
+        </p:txBody>
+      </p:sp>
+      <p:sp>
+        <p:nvSpPr>
+          <p:cNvPr id="10" name="TextBox 9"/>
+          <p:cNvSpPr txBox="1"/>
+          <p:nvPr/>
+        </p:nvSpPr>
+        <p:spPr>
+          <a:xfrm>
+            <a:off x="4648200" y="2286000"/>
+            <a:ext cx="2865120" cy="365760"/>
+          </a:xfrm>
+          <a:prstGeom prst="rect">
+            <a:avLst/>
+          </a:prstGeom>
+          <a:noFill/>
+        </p:spPr>
+        <p:txBody>
+          <a:bodyPr wrap="square" anchor="t" lIns="0" rIns="0" tIns="0" bIns="0">
+            <a:spAutoFit/>
+          </a:bodyPr>
+          <a:lstStyle/>
+          <a:p>
+            <a:pPr algn="l">
+              <a:spcAft>
+                <a:spcPts val="585"/>
+              </a:spcAft>
+            </a:pPr>
+            <a:r>
+              <a:rPr sz="1300" b="1" i="0">
+                <a:solidFill>
+                  <a:srgbClr val="0B2D5B"/>
+                </a:solidFill>
+                <a:latin typeface="Inter Tight"/>
+              </a:rPr>
+              <a:t>KENJI</a:t>
+            </a:r>
+          </a:p>
+        </p:txBody>
+      </p:sp>
+      <p:sp>
+        <p:nvSpPr>
+          <p:cNvPr id="11" name="TextBox 10"/>
+          <p:cNvSpPr txBox="1"/>
+          <p:nvPr/>
+        </p:nvSpPr>
+        <p:spPr>
+          <a:xfrm>
+            <a:off x="4648200" y="2743200"/>
+            <a:ext cx="2865120" cy="3017520"/>
+          </a:xfrm>
+          <a:prstGeom prst="rect">
+            <a:avLst/>
+          </a:prstGeom>
+          <a:noFill/>
+        </p:spPr>
+        <p:txBody>
+          <a:bodyPr wrap="square" anchor="t" lIns="0" rIns="0" tIns="0" bIns="0">
+            <a:spAutoFit/>
+          </a:bodyPr>
+          <a:lstStyle/>
+          <a:p>
+            <a:pPr algn="l">
+              <a:spcAft>
+                <a:spcPts val="810"/>
+              </a:spcAft>
+            </a:pPr>
+            <a:r>
+              <a:rPr sz="1800" b="0" i="0">
+                <a:solidFill>
+                  <a:srgbClr val="1C1B19"/>
+                </a:solidFill>
+                <a:latin typeface="Source Serif 4"/>
+              </a:rPr>
+              <a:t>Volunteers Saturdays at a food pantry with three kids his age. They're funny on shift and gone when it ends.</a:t>
+            </a:r>
+          </a:p>
+        </p:txBody>
+      </p:sp>
+      <p:sp>
+        <p:nvSpPr>
+          <p:cNvPr id="12" name="Rectangle 11"/>
+          <p:cNvSpPr/>
+          <p:nvPr/>
+        </p:nvSpPr>
+        <p:spPr>
+          <a:xfrm>
+            <a:off x="8016239" y="2103120"/>
+            <a:ext cx="3322320" cy="3840480"/>
+          </a:xfrm>
+          <a:prstGeom prst="rect">
+            <a:avLst/>
+          </a:prstGeom>
+          <a:solidFill>
+            <a:srgbClr val="FFFFFF"/>
+          </a:solidFill>
+          <a:ln w="15875">
+            <a:solidFill>
+              <a:srgbClr val="D8D2C6"/>
+            </a:solidFill>
+          </a:ln>
+          <a:effectLst/>
+        </p:spPr>
+        <p:style>
+          <a:lnRef idx="1">
+            <a:schemeClr val="accent1"/>
+          </a:lnRef>
+          <a:fillRef idx="3">
+            <a:schemeClr val="accent1"/>
+          </a:fillRef>
+          <a:effectRef idx="2">
+            <a:schemeClr val="accent1"/>
+          </a:effectRef>
+          <a:fontRef idx="minor">
+            <a:schemeClr val="lt1"/>
+          </a:fontRef>
+        </p:style>
+        <p:txBody>
+          <a:bodyPr rtlCol="0" anchor="ctr"/>
+          <a:lstStyle/>
+          <a:p>
+            <a:pPr algn="ctr"/>
+          </a:p>
+        </p:txBody>
+      </p:sp>
+      <p:sp>
+        <p:nvSpPr>
+          <p:cNvPr id="13" name="TextBox 12"/>
+          <p:cNvSpPr txBox="1"/>
+          <p:nvPr/>
+        </p:nvSpPr>
+        <p:spPr>
+          <a:xfrm>
+            <a:off x="8244839" y="2286000"/>
+            <a:ext cx="2865120" cy="365760"/>
+          </a:xfrm>
+          <a:prstGeom prst="rect">
+            <a:avLst/>
+          </a:prstGeom>
+          <a:noFill/>
+        </p:spPr>
+        <p:txBody>
+          <a:bodyPr wrap="square" anchor="t" lIns="0" rIns="0" tIns="0" bIns="0">
+            <a:spAutoFit/>
+          </a:bodyPr>
+          <a:lstStyle/>
+          <a:p>
+            <a:pPr algn="l">
+              <a:spcAft>
+                <a:spcPts val="585"/>
+              </a:spcAft>
+            </a:pPr>
+            <a:r>
+              <a:rPr sz="1300" b="1" i="0">
+                <a:solidFill>
+                  <a:srgbClr val="0B2D5B"/>
+                </a:solidFill>
+                <a:latin typeface="Inter Tight"/>
+              </a:rPr>
+              <a:t>SOFIA</a:t>
+            </a:r>
+          </a:p>
+        </p:txBody>
+      </p:sp>
+      <p:sp>
+        <p:nvSpPr>
+          <p:cNvPr id="14" name="TextBox 13"/>
+          <p:cNvSpPr txBox="1"/>
+          <p:nvPr/>
+        </p:nvSpPr>
+        <p:spPr>
+          <a:xfrm>
+            <a:off x="8244839" y="2743200"/>
+            <a:ext cx="2865120" cy="3017520"/>
+          </a:xfrm>
+          <a:prstGeom prst="rect">
+            <a:avLst/>
+          </a:prstGeom>
+          <a:noFill/>
+        </p:spPr>
+        <p:txBody>
+          <a:bodyPr wrap="square" anchor="t" lIns="0" rIns="0" tIns="0" bIns="0">
+            <a:spAutoFit/>
+          </a:bodyPr>
+          <a:lstStyle/>
+          <a:p>
+            <a:pPr algn="l">
+              <a:spcAft>
+                <a:spcPts val="810"/>
+              </a:spcAft>
+            </a:pPr>
+            <a:r>
+              <a:rPr sz="1800" b="0" i="0">
+                <a:solidFill>
+                  <a:srgbClr val="1C1B19"/>
+                </a:solidFill>
+                <a:latin typeface="Source Serif 4"/>
+              </a:rPr>
+              <a:t>Her middle school friends all joined the fall play. She runs cross-country and feels like a guest at their lunch table.</a:t>
             </a:r>
           </a:p>
         </p:txBody>

--- a/decks/finding-your-people-lesson-v2.pptx
+++ b/decks/finding-your-people-lesson-v2.pptx
@@ -7466,6 +7466,45 @@
                 <a:latin typeface="Inter Tight"/>
               </a:rPr>
               <a:t>Beaver Upper School · Counseling</a:t>
+            </a:r>
+          </a:p>
+        </p:txBody>
+      </p:sp>
+      <p:sp>
+        <p:nvSpPr>
+          <p:cNvPr id="8" name="TextBox 7"/>
+          <p:cNvSpPr txBox="1"/>
+          <p:nvPr/>
+        </p:nvSpPr>
+        <p:spPr>
+          <a:xfrm>
+            <a:off x="6766560" y="5897880"/>
+            <a:ext cx="4846320" cy="640080"/>
+          </a:xfrm>
+          <a:prstGeom prst="rect">
+            <a:avLst/>
+          </a:prstGeom>
+          <a:noFill/>
+        </p:spPr>
+        <p:txBody>
+          <a:bodyPr wrap="square" anchor="t" lIns="0" rIns="0" tIns="0" bIns="0">
+            <a:spAutoFit/>
+          </a:bodyPr>
+          <a:lstStyle/>
+          <a:p>
+            <a:pPr algn="r">
+              <a:spcAft>
+                <a:spcPts val="495"/>
+              </a:spcAft>
+            </a:pPr>
+            <a:r>
+              <a:rPr sz="1100" b="0" i="0">
+                <a:solidFill>
+                  <a:srgbClr val="E8E4DA"/>
+                </a:solidFill>
+                <a:latin typeface="Inter Tight"/>
+              </a:rPr>
+              <a:t>Written by Dr. Rick Wilson, with AI-assisted drafting. Every lesson is reviewed and edited by Dr. Wilson.</a:t>
             </a:r>
           </a:p>
         </p:txBody>
